--- a/v2/research/editable/single/12_ai_funnel_lst_ecosystem.pptx
+++ b/v2/research/editable/single/12_ai_funnel_lst_ecosystem.pptx
@@ -2,13 +2,13 @@
 <file path=ppt/presentation.xml><?xml version="1.0" encoding="utf-8"?>
 <p:presentation xmlns:p="http://schemas.openxmlformats.org/presentationml/2006/main">
   <p:sldMasterIdLst>
-    <p:sldMasterId xmlns:r="http://schemas.openxmlformats.org/officeDocument/2006/relationships" id="2147483648" r:id="R47ed06138ebe4043"/>
+    <p:sldMasterId xmlns:r="http://schemas.openxmlformats.org/officeDocument/2006/relationships" id="2147483648" r:id="Rffea889c2991410c"/>
   </p:sldMasterIdLst>
   <p:notesMasterIdLst>
-    <p:notesMasterId xmlns:r="http://schemas.openxmlformats.org/officeDocument/2006/relationships" r:id="Rc166d3ca738d458d"/>
+    <p:notesMasterId xmlns:r="http://schemas.openxmlformats.org/officeDocument/2006/relationships" r:id="Rcf62a85c9c124f96"/>
   </p:notesMasterIdLst>
   <p:sldIdLst>
-    <p:sldId xmlns:r="http://schemas.openxmlformats.org/officeDocument/2006/relationships" id="256" r:id="R67945b57a3a44166"/>
+    <p:sldId xmlns:r="http://schemas.openxmlformats.org/officeDocument/2006/relationships" id="256" r:id="Re5aa2913caab4f1e"/>
   </p:sldIdLst>
   <p:sldSz cx="18288000" cy="10287000"/>
   <p:notesSz cx="6858000" cy="9144000"/>
@@ -442,7 +442,7 @@
           <a:lstStyle xmlns:a="http://schemas.openxmlformats.org/drawingml/2006/main"/>
           <a:p xmlns:a="http://schemas.openxmlformats.org/drawingml/2006/main">
             <a:r>
-              <a:t>Figure 12. Updated 13 October 2026. The market anchors and illustrative stage counts retain their original units, years, geography and boundaries. The six product families are broader than the displayed anchors; the values must not be added. Company rows group listing venues, not incorporation or headquarters. GenScript is HK-listed; Gibco maps to Thermo Fisher TMO and Cytiva/HyClone to Danaher DHR. BD BDX is shown for specimen collection/preanalytics; its former Biosciences and Diagnostic Solutions business, including flow cytometry, moved to Waters WAT on 9 February 2026. These are different current equity exposures. Tsingke NEEQ:874813 is not an A-share exchange listing. Brand logos remain original; chart colors use the user-supplied eight-color palette.</a:t>
+              <a:t>Figure 12. Updated 13 October 2026. Universal stage counts removed. Workload multiples are analyst sensitivities. Supplier listing groups retain their scope. Recombinant protein estimate is commissioned/disputed; media/resin headlines withheld pending original-file verification. The six product families are broader than the displayed anchors; the values must not be added. Company rows group listing venues, not incorporation or headquarters. GenScript is HK-listed; Gibco maps to Thermo Fisher TMO and Cytiva/HyClone to Danaher DHR. BD BDX is shown for specimen collection/preanalytics; its former Biosciences and Diagnostic Solutions business, including flow cytometry, moved to Waters WAT on 9 February 2026. These are different current equity exposures. Tsingke NEEQ:874813 is not an A-share exchange listing. Brand logos remain original; chart colors use the user-supplied eight-color palette.</a:t>
             </a:r>
           </a:p>
           <a:p xmlns:a="http://schemas.openxmlformats.org/drawingml/2006/main">
@@ -452,6 +452,371 @@
           </a:p>
           <a:p xmlns:a="http://schemas.openxmlformats.org/drawingml/2006/main">
             <a:r>
+              <a:t># Evidence review and implemented corrections</a:t>
+            </a:r>
+          </a:p>
+          <a:p xmlns:a="http://schemas.openxmlformats.org/drawingml/2006/main">
+            <a:r>
+              <a:t/>
+            </a:r>
+          </a:p>
+          <a:p xmlns:a="http://schemas.openxmlformats.org/drawingml/2006/main">
+            <a:r>
+              <a:t>Reviewed 13 October 2026. The website, affected figures and their PPT/PDF exports distinguish verified quotations from independently measured markets, analyst scenarios and unresolved source checks. The investment thesis is conditional on funded experiments and supplier orders.</a:t>
+            </a:r>
+          </a:p>
+          <a:p xmlns:a="http://schemas.openxmlformats.org/drawingml/2006/main">
+            <a:r>
+              <a:t/>
+            </a:r>
+          </a:p>
+          <a:p xmlns:a="http://schemas.openxmlformats.org/drawingml/2006/main">
+            <a:r>
+              <a:t>## Implemented changes</a:t>
+            </a:r>
+          </a:p>
+          <a:p xmlns:a="http://schemas.openxmlformats.org/drawingml/2006/main">
+            <a:r>
+              <a:t/>
+            </a:r>
+          </a:p>
+          <a:p xmlns:a="http://schemas.openxmlformats.org/drawingml/2006/main">
+            <a:r>
+              <a:t>- Figures 11–12 and the interactive funnel no longer present universal pre-AI/AI molecule counts or a synthetic cohort per clinical entrant. The page distinguishes small molecules from proteins/antibodies and uses 1× / 2× / 5× / 10× measurement-workload sensitivities. These are model inputs, not forecasts of fully profiled candidates.</a:t>
+            </a:r>
+          </a:p>
+          <a:p xmlns:a="http://schemas.openxmlformats.org/drawingml/2006/main">
+            <a:r>
+              <a:t>- Figure 03 replaces unsupported customer spending percentages with a qualitative product-use map. Research hospitals are explicit. Food, environmental and industrial-chemical uses are outside this life-science scope; clinical IVD analyzers are not included in research-instrument examples.</a:t>
+            </a:r>
+          </a:p>
+          <a:p xmlns:a="http://schemas.openxmlformats.org/drawingml/2006/main">
+            <a:r>
+              <a:t>- Figure 06 and the calculator separate physical quantities from spending. Price ratios, usable wells and reagent overhead are explicit scenario inputs.</a:t>
+            </a:r>
+          </a:p>
+          <a:p xmlns:a="http://schemas.openxmlformats.org/drawingml/2006/main">
+            <a:r>
+              <a:t>- Figure 07 replaces the unsupported 100% funding allocation with hypothetical total funding × 5% / 10% / 20% tool-purchase capture. These are cumulative sensitivities without a fixed horizon, not observed capital raised, vendor orders or annual TAM.</a:t>
+            </a:r>
+          </a:p>
+          <a:p xmlns:a="http://schemas.openxmlformats.org/drawingml/2006/main">
+            <a:r>
+              <a:t>- Figure 02 retains the quoted F&amp;S values and correct arithmetic but labels the issuer-commissioned scope. The China/global ratio is not multinational suppliers’ China revenue exposure.</a:t>
+            </a:r>
+          </a:p>
+          <a:p xmlns:a="http://schemas.openxmlformats.org/drawingml/2006/main">
+            <a:r>
+              <a:t>- Figure 12 retains the source-confirmed supplier/ticker map, labels recombinant-protein market disagreement and withholds the two Duoning headline market values pending source recovery.</a:t>
+            </a:r>
+          </a:p>
+          <a:p xmlns:a="http://schemas.openxmlformats.org/drawingml/2006/main">
+            <a:r>
+              <a:t/>
+            </a:r>
+          </a:p>
+          <a:p xmlns:a="http://schemas.openxmlformats.org/drawingml/2006/main">
+            <a:r>
+              <a:t>## Market quotations and remaining limitations</a:t>
+            </a:r>
+          </a:p>
+          <a:p xmlns:a="http://schemas.openxmlformats.org/drawingml/2006/main">
+            <a:r>
+              <a:t/>
+            </a:r>
+          </a:p>
+          <a:p xmlns:a="http://schemas.openxmlformats.org/drawingml/2006/main">
+            <a:r>
+              <a:t>### Four quoted anchors checked against their primary issuer documents</a:t>
+            </a:r>
+          </a:p>
+          <a:p xmlns:a="http://schemas.openxmlformats.org/drawingml/2006/main">
+            <a:r>
+              <a:t/>
+            </a:r>
+          </a:p>
+          <a:p xmlns:a="http://schemas.openxmlformats.org/drawingml/2006/main">
+            <a:r>
+              <a:t>1. China DNA-synthesis services, 2025: RMB1.33bn = RMB0.53bn oligonucleotide services + RMB0.80bn long-fragment services. Equipment, molecular reagents and sequencing are excluded. Tsingke prospectus, printed 1-1-158 / PDF159. [Primary filing](https://static.sse.com.cn/stock/disclosure/announcement/c/202606/002233_20260630_Z9LA.pdf).</a:t>
+            </a:r>
+          </a:p>
+          <a:p xmlns:a="http://schemas.openxmlformats.org/drawingml/2006/main">
+            <a:r>
+              <a:t>2. Global research-grade recombinant-protein reagents, 2025: US$3.5bn; China approximately US$0.4bn. ACRO filing, printed p.71 / PDF80. The issuer commissioned F&amp;S for RMB530,000, disclosed on printed p.63 / PDF72. This confirms the quotation and commissioning, not independent market measurement. [Primary filing](https://www1.hkexnews.hk/app/sehk/2026/108910/documents/sehk26093002651_c.pdf).</a:t>
+            </a:r>
+          </a:p>
+          <a:p xmlns:a="http://schemas.openxmlformats.org/drawingml/2006/main">
+            <a:r>
+              <a:t>3. China disposable plastic biological laboratory consumables, 2024: approximately RMB23bn. JET Biofil’s annual-report summary, PDF6, cites industry research. The broad scope includes research, clinical and industrial applications. A constant CAGR extrapolated from 2020 is not an independent validation. [Primary disclosure](https://static.cninfo.com.cn/finalpage/2026-04-30/1225255989.PDF).</a:t>
+            </a:r>
+          </a:p>
+          <a:p xmlns:a="http://schemas.openxmlformats.org/drawingml/2006/main">
+            <a:r>
+              <a:t>4. China sequencing instruments and consumables, 2024: RMB4.3bn. MGI annual report, pp.41–42, cites CIC/company/conference sources. The total includes clinical applications and does not size LC-MS, flow or imaging. Summing selected issuers’ China revenues is not a market check without harmonized product and geography definitions. [Primary disclosure](https://static.cninfo.com.cn/finalpage/2025-04-30/1223427376.PDF).</a:t>
+            </a:r>
+          </a:p>
+          <a:p xmlns:a="http://schemas.openxmlformats.org/drawingml/2006/main">
+            <a:r>
+              <a:t/>
+            </a:r>
+          </a:p>
+          <a:p xmlns:a="http://schemas.openxmlformats.org/drawingml/2006/main">
+            <a:r>
+              <a:t>### Protein estimates disagree; no harmonized range</a:t>
+            </a:r>
+          </a:p>
+          <a:p xmlns:a="http://schemas.openxmlformats.org/drawingml/2006/main">
+            <a:r>
+              <a:t/>
+            </a:r>
+          </a:p>
+          <a:p xmlns:a="http://schemas.openxmlformats.org/drawingml/2006/main">
+            <a:r>
+              <a:t>- F&amp;S/ACRO: US$3.5bn in 2025 for research-grade protein reagents, issuer commissioned.</a:t>
+            </a:r>
+          </a:p>
+          <a:p xmlns:a="http://schemas.openxmlformats.org/drawingml/2006/main">
+            <a:r>
+              <a:t>- MarketsandMarkets: US$1.11bn in 2026 for finished off-the-shelf research-use protein consumables. [Original release](https://www.marketsandmarkets.com/PressReleases/research-use-recombinant-protein.asp), [scope definition](https://www.marketsandmarkets.com/Market-Reports/research-use-recombinant-protein-market-156810846.html).</a:t>
+            </a:r>
+          </a:p>
+          <a:p xmlns:a="http://schemas.openxmlformats.org/drawingml/2006/main">
+            <a:r>
+              <a:t>- Global Market Insights: approximately US$2.5bn in 2025 for broader protein inputs and outsourced production services, including therapeutic and diagnostic uses. [Original report page](https://www.gminsights.com/industry-analysis/recombinant-proteins-market).</a:t>
+            </a:r>
+          </a:p>
+          <a:p xmlns:a="http://schemas.openxmlformats.org/drawingml/2006/main">
+            <a:r>
+              <a:t/>
+            </a:r>
+          </a:p>
+          <a:p xmlns:a="http://schemas.openxmlformats.org/drawingml/2006/main">
+            <a:r>
+              <a:t>Different years, product boundaries and methods prevent treating these figures as endpoints of a confidence interval. The disagreement warrants lower confidence in absolute TAM. It does not by itself prove F&amp;S inflated the market or identify one correct number. The source-specific historical series is not spliced with alternative providers.</a:t>
+            </a:r>
+          </a:p>
+          <a:p xmlns:a="http://schemas.openxmlformats.org/drawingml/2006/main">
+            <a:r>
+              <a:t/>
+            </a:r>
+          </a:p>
+          <a:p xmlns:a="http://schemas.openxmlformats.org/drawingml/2006/main">
+            <a:r>
+              <a:t>### Duoning values withheld from headlines</a:t>
+            </a:r>
+          </a:p>
+          <a:p xmlns:a="http://schemas.openxmlformats.org/drawingml/2006/main">
+            <a:r>
+              <a:t/>
+            </a:r>
+          </a:p>
+          <a:p xmlns:a="http://schemas.openxmlformats.org/drawingml/2006/main">
+            <a:r>
+              <a:t>Previous source notes cited China 2024 bioprocess media US$323.5m and bioprocess resins US$578.2m from the January2026 Duoning application, printed pp.126 and132. Its original Chinese and English full PDFs return404. The official index marks the application lapsed and no longer exposes full download links. Values and detailed exclusions have not been directly reverified in this review. They remain in source history as unverified prior citations, while headline cards and the funnel show “Source pending.” A search excerpt, derivative report, or assumed Protein A share does not restore original verification. [Official application index](https://www1.hkexnews.hk/app/appyearlyindex.html?lang=en&amp;year=2026).</a:t>
+            </a:r>
+          </a:p>
+          <a:p xmlns:a="http://schemas.openxmlformats.org/drawingml/2006/main">
+            <a:r>
+              <a:t/>
+            </a:r>
+          </a:p>
+          <a:p xmlns:a="http://schemas.openxmlformats.org/drawingml/2006/main">
+            <a:r>
+              <a:t>### Figure 02 uses one F&amp;S definition</a:t>
+            </a:r>
+          </a:p>
+          <a:p xmlns:a="http://schemas.openxmlformats.org/drawingml/2006/main">
+            <a:r>
+              <a:t/>
+            </a:r>
+          </a:p>
+          <a:p xmlns:a="http://schemas.openxmlformats.org/drawingml/2006/main">
+            <a:r>
+              <a:t>Quoted 2025 global/China LST estimates are US$41.5bn / US$7.7bn; research biological reagents US$26.4bn / US$4.6bn. Residual other tools are US$15.1bn / US$3.1bn. China/global = 7.7 /41.5 =18.554%, rounded18.6%. The residual is calculated and has not been split independently into instruments and consumables. Source: ACRO filing, printed pp.64–65 and67; commissioning p.63. Much larger broad tools/services estimates have different boundaries. Those boundaries have not been reconciled, and neither a broad-market alternative nor Western issuer geography percentages are replacement denominators.</a:t>
+            </a:r>
+          </a:p>
+          <a:p xmlns:a="http://schemas.openxmlformats.org/drawingml/2006/main">
+            <a:r>
+              <a:t/>
+            </a:r>
+          </a:p>
+          <a:p xmlns:a="http://schemas.openxmlformats.org/drawingml/2006/main">
+            <a:r>
+              <a:t>## Workflow and clinical evidence</a:t>
+            </a:r>
+          </a:p>
+          <a:p xmlns:a="http://schemas.openxmlformats.org/drawingml/2006/main">
+            <a:r>
+              <a:t/>
+            </a:r>
+          </a:p>
+          <a:p xmlns:a="http://schemas.openxmlformats.org/drawingml/2006/main">
+            <a:r>
+              <a:t>- Classical docking evaluated170 million compounds in2019 and synthesized/tested44 and549 for two targets. This is a study-level example, not a clinical-entrant cohort. [Lyu et al., Nature2019](https://www.nature.com/articles/s41586-019-0917-9).</a:t>
+            </a:r>
+          </a:p>
+          <a:p xmlns:a="http://schemas.openxmlformats.org/drawingml/2006/main">
+            <a:r>
+              <a:t>- A classical docking platform screened approximately1.3 billion compounds in2020. “Pre-AI” is not a universal cutoff; the distinction is method and workflow. [Gorgulla et al., Nature2020](https://pmc.ncbi.nlm.nih.gov/articles/PMC8352709/).</a:t>
+            </a:r>
+          </a:p>
+          <a:p xmlns:a="http://schemas.openxmlformats.org/drawingml/2006/main">
+            <a:r>
+              <a:t>- DSP-1181 was the350th compound synthesized in one company-reported program. [Sumitomo technical report2021, PDF4](https://www.sumitomo-chem.co.jp/english/rd/report/2021E_3.pdf).</a:t>
+            </a:r>
+          </a:p>
+          <a:p xmlns:a="http://schemas.openxmlformats.org/drawingml/2006/main">
+            <a:r>
+              <a:t>- REC-617 optimization synthesized136 novel compounds, according to company reporting. This is not a controlled industry-wide comparison. [Recursion2024 annual report](https://www.sec.gov/Archives/edgar/data/1601830/000160183025000064/rxrxannualreport2024.pdf).</a:t>
+            </a:r>
+          </a:p>
+          <a:p xmlns:a="http://schemas.openxmlformats.org/drawingml/2006/main">
+            <a:r>
+              <a:t>- Insilico’s78-molecule statement is company-reported and not used as a generic funnel parameter. The78 in a prominent Nature trial description refers to participants; these units must not be confused. [Company case study](https://insilico.com/casestudy).</a:t>
+            </a:r>
+          </a:p>
+          <a:p xmlns:a="http://schemas.openxmlformats.org/drawingml/2006/main">
+            <a:r>
+              <a:t>- Pooled protein screens and purified individual profiles are distinct. Bennett et al. screened approximately80,000 pooled designs then confirmed selected binders individually; substantial pooled protein screening also existed in2017. [Bennett et al.2023](https://www.nature.com/articles/s41467-023-38328-5), [Chevalier et al.2017](https://www.nature.com/articles/nature23912).</a:t>
+            </a:r>
+          </a:p>
+          <a:p xmlns:a="http://schemas.openxmlformats.org/drawingml/2006/main">
+            <a:r>
+              <a:t>- BIO’s7.9% Phase I-to-approval estimate covers2011–2020. Wong et al.’s13.8% covers2000–2015 with different data/methods. The two-study span is not a confidence interval, current consensus or an AI comparison. Neither is an expected output of the removed synthetic funnel. [BIO report](https://go.bio.org/rs/490-EHZ-999/images/ClinicalDevelopmentSuccessRates2011_2020.pdf), [Wong et al.](https://doi.org/10.1093/biostatistics/kxx069).</a:t>
+            </a:r>
+          </a:p>
+          <a:p xmlns:a="http://schemas.openxmlformats.org/drawingml/2006/main">
+            <a:r>
+              <a:t/>
+            </a:r>
+          </a:p>
+          <a:p xmlns:a="http://schemas.openxmlformats.org/drawingml/2006/main">
+            <a:r>
+              <a:t>## Unit-economics calculations</a:t>
+            </a:r>
+          </a:p>
+          <a:p xmlns:a="http://schemas.openxmlformats.org/drawingml/2006/main">
+            <a:r>
+              <a:t/>
+            </a:r>
+          </a:p>
+          <a:p xmlns:a="http://schemas.openxmlformats.org/drawingml/2006/main">
+            <a:r>
+              <a:t>Baseline:100,000 tests ×100µL =10L; ceil(100,000 /96)=1,042 destination plates;100,000 tips at1/test.</a:t>
+            </a:r>
+          </a:p>
+          <a:p xmlns:a="http://schemas.openxmlformats.org/drawingml/2006/main">
+            <a:r>
+              <a:t/>
+            </a:r>
+          </a:p>
+          <a:p xmlns:a="http://schemas.openxmlformats.org/drawingml/2006/main">
+            <a:r>
+              <a:t>Example:1,000,000 tests ×5µL =5L; ceil(1,000,000 /1,536)=652 destination plates;100,000 tips at0.1/test.</a:t>
+            </a:r>
+          </a:p>
+          <a:p xmlns:a="http://schemas.openxmlformats.org/drawingml/2006/main">
+            <a:r>
+              <a:t/>
+            </a:r>
+          </a:p>
+          <a:p xmlns:a="http://schemas.openxmlformats.org/drawingml/2006/main">
+            <a:r>
+              <a:t>Plate-count ratio =652/1,042 =0.625720. Plate-spend ratio =0.625720 × comparable plate ASP ratio. Break-even ASP =1,042/652 =1.598160. At1×/2×/4× ASP, spend ratios are0.625720 /1.251440 /2.502879. These price multipliers are scenario inputs, not vendor quotes. The review’s “plastic spend probably rises” is not established without equivalent product quotes and consumption scope.</a:t>
+            </a:r>
+          </a:p>
+          <a:p xmlns:a="http://schemas.openxmlformats.org/drawingml/2006/main">
+            <a:r>
+              <a:t/>
+            </a:r>
+          </a:p>
+          <a:p xmlns:a="http://schemas.openxmlformats.org/drawingml/2006/main">
+            <a:r>
+              <a:t>Calculator reagent volume =tests ×usable assay µL ×(1 + case-specific extra-reagent overhead)/1,000,000. The baseline uses its own overhead input. New destination plates =ceil(tests /floor(wells ×usable-well fraction)); baseline plates assume100% usable wells. Price ratios multiply quantity ratios separately for reagent, plate and tip spend. Real workflows can also require source plates, reservoirs, controls, retests and instrument capital. [Beckman’s source-container and dead-volume documentation](https://www.beckman.com/supplies/echo-qualified-supplies). Average tips/test is a model input, not a recommendation to reuse biological-sample tips.</a:t>
+            </a:r>
+          </a:p>
+          <a:p xmlns:a="http://schemas.openxmlformats.org/drawingml/2006/main">
+            <a:r>
+              <a:t/>
+            </a:r>
+          </a:p>
+          <a:p xmlns:a="http://schemas.openxmlformats.org/drawingml/2006/main">
+            <a:r>
+              <a:t>Funding scenarios:US$50/100/200bn ×5%/10%/20% capture imply cumulative tool purchases of [2.5,5,10] / [5,10,20] / [10,20,40] US$bn. No fixed time horizon or empirical capture share is asserted. Exclude labor, clinical execution, compute/data/software, facilities and funding not spent on tools. CRO fees and embedded vendor-input purchases must not be added together. [Recursion2025 10-K](https://www.sec.gov/Archives/edgar/data/1601830/000160183026000039/rxrx-20251231.htm), pp.147–148, illustrates diverse R&amp;D cost categories, not universal cash shares.</a:t>
+            </a:r>
+          </a:p>
+          <a:p xmlns:a="http://schemas.openxmlformats.org/drawingml/2006/main">
+            <a:r>
+              <a:t/>
+            </a:r>
+          </a:p>
+          <a:p xmlns:a="http://schemas.openxmlformats.org/drawingml/2006/main">
+            <a:r>
+              <a:t>An incremental equipment budget need not resemble the composition of existing annual tool sales. The reviewer’s30% equipment versus64% market-reagents comparison alone is not an arithmetic contradiction. Unsupported allocation shares were removed because their evidential basis was missing.</a:t>
+            </a:r>
+          </a:p>
+          <a:p xmlns:a="http://schemas.openxmlformats.org/drawingml/2006/main">
+            <a:r>
+              <a:t/>
+            </a:r>
+          </a:p>
+          <a:p xmlns:a="http://schemas.openxmlformats.org/drawingml/2006/main">
+            <a:r>
+              <a:t>## Current sequencing-policy correction</a:t>
+            </a:r>
+          </a:p>
+          <a:p xmlns:a="http://schemas.openxmlformats.org/drawingml/2006/main">
+            <a:r>
+              <a:t/>
+            </a:r>
+          </a:p>
+          <a:p xmlns:a="http://schemas.openxmlformats.org/drawingml/2006/main">
+            <a:r>
+              <a:t>China’s blanket Illumina sequencer-export prohibition introduced on4March2025 ended on10November2025. Illumina remained on the Unreliable Entity List and instrument purchases required government approval, confirmed in its2026-filed annual report. The reviewer’s ongoing blanket-ban statement is outdated. The2024 anchor remains a dated source estimate rather than a current policy-adjusted TAM. [Illumina announcement](https://www.illumina.com/company/news-center/press-releases/2025/97cd0e7b-b018-4ab8-beb0-0f538b164ae6.html), [MOFCOM update](https://exportcontrol.mofcom.gov.cn/article/gndt/202511/1187.html), [2025 annual report filed2026](https://www.sec.gov/Archives/edgar/data/1110803/000111080326000024/ilmn-20251228.htm).</a:t>
+            </a:r>
+          </a:p>
+          <a:p xmlns:a="http://schemas.openxmlformats.org/drawingml/2006/main">
+            <a:r>
+              <a:t/>
+            </a:r>
+          </a:p>
+          <a:p xmlns:a="http://schemas.openxmlformats.org/drawingml/2006/main">
+            <a:r>
+              <a:t>BD/Waters ownership and verified supplier tickers remain as previously sourced in palette/TICKER_SOURCES.md. This review does not establish any supplier’s AI-attributable revenue, market share or valuation upside.</a:t>
+            </a:r>
+          </a:p>
+          <a:p xmlns:a="http://schemas.openxmlformats.org/drawingml/2006/main">
+            <a:r>
+              <a:t/>
+            </a:r>
+          </a:p>
+          <a:p xmlns:a="http://schemas.openxmlformats.org/drawingml/2006/main">
+            <a:r>
+              <a:t/>
+            </a:r>
+          </a:p>
+          <a:p xmlns:a="http://schemas.openxmlformats.org/drawingml/2006/main">
+            <a:r>
+              <a:t>## Superseded source history</a:t>
+            </a:r>
+          </a:p>
+          <a:p xmlns:a="http://schemas.openxmlformats.org/drawingml/2006/main">
+            <a:r>
+              <a:t/>
+            </a:r>
+          </a:p>
+          <a:p xmlns:a="http://schemas.openxmlformats.org/drawingml/2006/main">
+            <a:r>
+              <a:t>The following preserves prior citation history. Its universal molecule counts, customer-percentage assumptions, funding allocation and Duoning headline figures were superseded by the review above and must not be used as current inputs.</a:t>
+            </a:r>
+          </a:p>
+          <a:p xmlns:a="http://schemas.openxmlformats.org/drawingml/2006/main">
+            <a:r>
+              <a:t/>
+            </a:r>
+          </a:p>
+          <a:p xmlns:a="http://schemas.openxmlformats.org/drawingml/2006/main">
+            <a:r>
               <a:t># Sources, assumptions and market boundaries</a:t>
             </a:r>
           </a:p>
@@ -763,6 +1128,216 @@
           <a:p xmlns:a="http://schemas.openxmlformats.org/drawingml/2006/main">
             <a:r>
               <a:t>Lucide icons are sourced from the project's official GitHub repository, recolored teal for the graphic and provided under the ISC license. The full license is included in `assets/icons/LICENSE`.</a:t>
+            </a:r>
+          </a:p>
+          <a:p xmlns:a="http://schemas.openxmlformats.org/drawingml/2006/main">
+            <a:r>
+              <a:t/>
+            </a:r>
+          </a:p>
+          <a:p xmlns:a="http://schemas.openxmlformats.org/drawingml/2006/main">
+            <a:r>
+              <a:t/>
+            </a:r>
+          </a:p>
+          <a:p xmlns:a="http://schemas.openxmlformats.org/drawingml/2006/main">
+            <a:r>
+              <a:t># Supplier tickers and current BD exposure</a:t>
+            </a:r>
+          </a:p>
+          <a:p xmlns:a="http://schemas.openxmlformats.org/drawingml/2006/main">
+            <a:r>
+              <a:t/>
+            </a:r>
+          </a:p>
+          <a:p xmlns:a="http://schemas.openxmlformats.org/drawingml/2006/main">
+            <a:r>
+              <a:t>Updated 13 October 2026. Rows identify representative suppliers or their listed parents, not market shares or investment recommendations. China/HK and US groups refer to listing venues; they do not imply legal domicile, headquarters or pure-play exposure.</a:t>
+            </a:r>
+          </a:p>
+          <a:p xmlns:a="http://schemas.openxmlformats.org/drawingml/2006/main">
+            <a:r>
+              <a:t/>
+            </a:r>
+          </a:p>
+          <a:p xmlns:a="http://schemas.openxmlformats.org/drawingml/2006/main">
+            <a:r>
+              <a:t>BD (NYSE:BDX) remains relevant to specimen collection and preanalytical sample handling. Its former Biosciences and Diagnostic Solutions business, including flow cytometry, moved to Waters (NYSE:WAT) on 9 February 2026.</a:t>
+            </a:r>
+          </a:p>
+          <a:p xmlns:a="http://schemas.openxmlformats.org/drawingml/2006/main">
+            <a:r>
+              <a:t/>
+            </a:r>
+          </a:p>
+          <a:p xmlns:a="http://schemas.openxmlformats.org/drawingml/2006/main">
+            <a:r>
+              <a:t>- [BD completion release](https://investors.bd.com/news-events/press-releases/detail/937/bd-completes-combination-of-biosciences-diagnostic-solutions-business-with-waters-corporation)</a:t>
+            </a:r>
+          </a:p>
+          <a:p xmlns:a="http://schemas.openxmlformats.org/drawingml/2006/main">
+            <a:r>
+              <a:t>- [Waters current transaction disclosure](https://www.waters.com/nextgen/us/en/about-waters/corporate-governance/legal-and-privacy-notices/bdtransaction.html)</a:t>
+            </a:r>
+          </a:p>
+          <a:p xmlns:a="http://schemas.openxmlformats.org/drawingml/2006/main">
+            <a:r>
+              <a:t>- [Current BD Vacutainer portfolio](https://go.bd.com/vacutainer-product-updates-TY.html): specimen-collection / sample-management products.</a:t>
+            </a:r>
+          </a:p>
+          <a:p xmlns:a="http://schemas.openxmlformats.org/drawingml/2006/main">
+            <a:r>
+              <a:t/>
+            </a:r>
+          </a:p>
+          <a:p xmlns:a="http://schemas.openxmlformats.org/drawingml/2006/main">
+            <a:r>
+              <a:t>Gibco is shown with Thermo Fisher (TMO); Cytiva and HyClone with Danaher (DHR). The underlying business exposure is narrower than the parent company's total revenue. Tsingke's code 874813 is a NEEQ code, not an A-share exchange listing; its IPO application is a separate filing. Suzhou Sepax is 688758.SH; the graphic refers to the China-listed issuer's chromatography portfolio.</a:t>
+            </a:r>
+          </a:p>
+          <a:p xmlns:a="http://schemas.openxmlformats.org/drawingml/2006/main">
+            <a:r>
+              <a:t/>
+            </a:r>
+          </a:p>
+          <a:p xmlns:a="http://schemas.openxmlformats.org/drawingml/2006/main">
+            <a:r>
+              <a:t>| Supplier / parent | Exchange | Ticker | Product pathway | Primary listing / business source |</a:t>
+            </a:r>
+          </a:p>
+          <a:p xmlns:a="http://schemas.openxmlformats.org/drawingml/2006/main">
+            <a:r>
+              <a:t>|---|---|---|---|---|</a:t>
+            </a:r>
+          </a:p>
+          <a:p xmlns:a="http://schemas.openxmlformats.org/drawingml/2006/main">
+            <a:r>
+              <a:t>| GenScript | HKEX | 1548 | Molecular construction | [Source](https://www.genscript.com/genscript-biotech-demonstrates-profitable-scale-and-strategic-leadership-in-h1-2025.html) |</a:t>
+            </a:r>
+          </a:p>
+          <a:p xmlns:a="http://schemas.openxmlformats.org/drawingml/2006/main">
+            <a:r>
+              <a:t>| Vazyme | SSE | 688105 | Molecular construction | [Source](https://www.vazyme.us/AboutUs/OurStrories/) |</a:t>
+            </a:r>
+          </a:p>
+          <a:p xmlns:a="http://schemas.openxmlformats.org/drawingml/2006/main">
+            <a:r>
+              <a:t>| Tsingke | NEEQ | 874813 | DNA synthesis; NEEQ-listed, A-share IPO application is separate | [Source](https://static.sse.com.cn/stock/disclosure/announcement/c/202606/002233_20260630_Z9LA.pdf) |</a:t>
+            </a:r>
+          </a:p>
+          <a:p xmlns:a="http://schemas.openxmlformats.org/drawingml/2006/main">
+            <a:r>
+              <a:t>| ACROBiosystems | SZSE | 301080 | Proteins / functional cells | [Source](https://www1.hkexnews.hk/app/sehk/2026/108910/documents/sehk26093002651_c.pdf) |</a:t>
+            </a:r>
+          </a:p>
+          <a:p xmlns:a="http://schemas.openxmlformats.org/drawingml/2006/main">
+            <a:r>
+              <a:t>| Sino Biological | SZSE | 301047 | Research proteins / antibodies | [Source](https://disc.static.szse.cn/disc/disk03/finalpage/2026-08-26/cd4ea950-7931-4164-bcec-20c03b8236e1.PDF) |</a:t>
+            </a:r>
+          </a:p>
+          <a:p xmlns:a="http://schemas.openxmlformats.org/drawingml/2006/main">
+            <a:r>
+              <a:t>| OPM Biosciences | SSE | 688293 | Cell culture media | [Source](https://opmbiosciences.com/) |</a:t>
+            </a:r>
+          </a:p>
+          <a:p xmlns:a="http://schemas.openxmlformats.org/drawingml/2006/main">
+            <a:r>
+              <a:t>| JET Biofil | SSE | 688026 | Plastic laboratory consumables | [Source](https://static.cninfo.com.cn/finalpage/2026-04-30/1225255989.PDF) |</a:t>
+            </a:r>
+          </a:p>
+          <a:p xmlns:a="http://schemas.openxmlformats.org/drawingml/2006/main">
+            <a:r>
+              <a:t>| Changhong | SZSE | 300151 | Life science / medical plastic consumables | [Source](https://static.cninfo.com.cn/finalpage/2025-10-30/1224764410.PDF) |</a:t>
+            </a:r>
+          </a:p>
+          <a:p xmlns:a="http://schemas.openxmlformats.org/drawingml/2006/main">
+            <a:r>
+              <a:t>| MGI | SSE | 688114 | Sequencing instruments / consumables | [Source](https://static.cninfo.com.cn/finalpage/2025-04-30/1223427376.PDF) |</a:t>
+            </a:r>
+          </a:p>
+          <a:p xmlns:a="http://schemas.openxmlformats.org/drawingml/2006/main">
+            <a:r>
+              <a:t>| NanoMicro | SSE | 688690 | Chromatography materials and analytical separation / purification | [Source](https://static.cninfo.com.cn/finalpage/2026-09-22/1225575593.PDF) |</a:t>
+            </a:r>
+          </a:p>
+          <a:p xmlns:a="http://schemas.openxmlformats.org/drawingml/2006/main">
+            <a:r>
+              <a:t>| Suzhou Sepax | SSE | 688758 | Chromatography columns / process media | [Source](https://www.sepax-tech.com.cn/skin/default/investorpdf/%E8%8B%8F%E5%B7%9E%E8%B5%9B%E5%88%86%E7%A7%91%E6%8A%80%E8%82%A1%E4%BB%BD%E6%9C%89%E9%99%90%E5%85%AC%E5%8F%B82025%E5%B9%B4%E7%AC%AC%E4%B8%80%E6%AC%A1%E4%B8%B4%E6%97%B6%E8%82%A1%E4%B8%9C%E4%BC%9A%E4%BC%9A%E8%AE%AE%E8%B5%84%E6%96%99.pdf) |</a:t>
+            </a:r>
+          </a:p>
+          <a:p xmlns:a="http://schemas.openxmlformats.org/drawingml/2006/main">
+            <a:r>
+              <a:t>| Twist Bioscience | NASDAQ | TWST | DNA synthesis | [Source](https://investors.twistbioscience.com/static-files/8c1d5bed-df6f-48d5-832f-eb2f32717c27) |</a:t>
+            </a:r>
+          </a:p>
+          <a:p xmlns:a="http://schemas.openxmlformats.org/drawingml/2006/main">
+            <a:r>
+              <a:t>| Thermo Fisher / Gibco | NYSE | TMO | Molecular tools, proteins, media and instruments; parent ticker | [Source](https://ir.thermofisher.com/investors/news-events/news/news-details/2026/Thermo-Fisher-Scientific-Reports-Second-Quarter-2026-Results/) |</a:t>
+            </a:r>
+          </a:p>
+          <a:p xmlns:a="http://schemas.openxmlformats.org/drawingml/2006/main">
+            <a:r>
+              <a:t>| Bio-Techne | NASDAQ | TECH | Proteins / functional assay reagents | [Source](https://investors.bio-techne.com/stock-data) |</a:t>
+            </a:r>
+          </a:p>
+          <a:p xmlns:a="http://schemas.openxmlformats.org/drawingml/2006/main">
+            <a:r>
+              <a:t>| Danaher / Cytiva / HyClone | NYSE | DHR | Culture and purification; parent ticker | [Source](https://www.danaher.com/our-businesses/biotechnology) |</a:t>
+            </a:r>
+          </a:p>
+          <a:p xmlns:a="http://schemas.openxmlformats.org/drawingml/2006/main">
+            <a:r>
+              <a:t>| Corning | NYSE | GLW | Laboratory plastics / cell culture | [Source](https://www.corning.com/content/dam/corning/media/worldwide/global/documents/corning_10-k_2025.pdf) |</a:t>
+            </a:r>
+          </a:p>
+          <a:p xmlns:a="http://schemas.openxmlformats.org/drawingml/2006/main">
+            <a:r>
+              <a:t>| BD | NYSE | BDX | Current specimen collection / preanalytics; ex-BD flow is WAT | [Source](https://investors.bd.com/news-events/press-releases/detail/937/bd-completes-combination-of-biosciences-diagnostic-solutions-business-with-waters-corporation) |</a:t>
+            </a:r>
+          </a:p>
+          <a:p xmlns:a="http://schemas.openxmlformats.org/drawingml/2006/main">
+            <a:r>
+              <a:t>| Illumina | NASDAQ | ILMN | Sequencing instruments / consumables | [Source](https://investor.illumina.com/static-files/eb129ea4-1f1a-408f-b87a-44eaee93c63d) |</a:t>
+            </a:r>
+          </a:p>
+          <a:p xmlns:a="http://schemas.openxmlformats.org/drawingml/2006/main">
+            <a:r>
+              <a:t>| Agilent | NYSE | A | Chromatography / analytical instruments | [Source](https://www.investor.agilent.com/stock-info/stock-quote-and-chart/) |</a:t>
+            </a:r>
+          </a:p>
+          <a:p xmlns:a="http://schemas.openxmlformats.org/drawingml/2006/main">
+            <a:r>
+              <a:t>| Waters / former BD Biosciences | NYSE | WAT | LC-MS / chromatography and ex-BD flow cytometry | [Source](https://www.waters.com/nextgen/us/en/about-waters/corporate-governance/legal-and-privacy-notices/bdtransaction.html) |</a:t>
+            </a:r>
+          </a:p>
+          <a:p xmlns:a="http://schemas.openxmlformats.org/drawingml/2006/main">
+            <a:r>
+              <a:t>| Repligen | NASDAQ | RGEN | Bioprocess purification / filtration tools | [Source](https://investors.repligen.com/stock-info/default.aspx) |</a:t>
+            </a:r>
+          </a:p>
+          <a:p xmlns:a="http://schemas.openxmlformats.org/drawingml/2006/main">
+            <a:r>
+              <a:t>| Tecan | SIX | TECN | Laboratory automation; Swiss-listed | [Source](https://www.tecan.com/hubfs/HubDB/Te-PrArc/180323_Tecan_KeplerCheuvreux.pdf) |</a:t>
+            </a:r>
+          </a:p>
+          <a:p xmlns:a="http://schemas.openxmlformats.org/drawingml/2006/main">
+            <a:r>
+              <a:t/>
+            </a:r>
+          </a:p>
+          <a:p xmlns:a="http://schemas.openxmlformats.org/drawingml/2006/main">
+            <a:r>
+              <a:t>The market anchors retain their original scope and sources. Adding a supplier does not broaden or update the displayed TAM. The labware family includes a clinical/preanalytical adjacency for BD; the displayed anchor continues to be the selected China plastic laboratory-consumables estimate. The analytics anchor remains China sequencing instruments plus consumables; it does not size flow cytometry.</a:t>
+            </a:r>
+          </a:p>
+          <a:p xmlns:a="http://schemas.openxmlformats.org/drawingml/2006/main">
+            <a:r>
+              <a:t/>
+            </a:r>
+          </a:p>
+          <a:p xmlns:a="http://schemas.openxmlformats.org/drawingml/2006/main">
+            <a:r>
+              <a:t>Original BD logo: https://news.bd.com/images/header-bd-logo.svg. Original company marks retain their colors; chart/UI colors use the user-supplied palette. The second RGB value was explicitly confirmed by the user as 172:212:241.</a:t>
             </a:r>
           </a:p>
           <a:p xmlns:a="http://schemas.openxmlformats.org/drawingml/2006/main">
@@ -1024,7 +1599,7 @@
           <p:cNvPr id="3" name="Title">
             <a:extLst xmlns:a="http://schemas.openxmlformats.org/drawingml/2006/main">
               <a:ext uri="{FF2B5EF4-FFF2-40B4-BE49-F238E27FC236}">
-                <a16:creationId xmlns:a16="http://schemas.microsoft.com/office/drawing/2014/main" id="{A4AB42AD-DED0-49D1-9DDF-BAB2A212728B}"/>
+                <a16:creationId xmlns:a16="http://schemas.microsoft.com/office/drawing/2014/main" id="{4B2DFF4E-5666-4A51-8559-399F62BFE8F1}"/>
               </a:ext>
             </a:extLst>
           </p:cNvPr>
@@ -1190,7 +1765,7 @@
           <p:cNvPr id="2" name="Subtitle">
             <a:extLst xmlns:a="http://schemas.openxmlformats.org/drawingml/2006/main">
               <a:ext uri="{FF2B5EF4-FFF2-40B4-BE49-F238E27FC236}">
-                <a16:creationId xmlns:a16="http://schemas.microsoft.com/office/drawing/2014/main" id="{6FC0D2CF-CCEB-4459-84A0-0E089CD71F16}"/>
+                <a16:creationId xmlns:a16="http://schemas.microsoft.com/office/drawing/2014/main" id="{7D3E1212-92C9-4275-BE68-176ED8703A9A}"/>
               </a:ext>
             </a:extLst>
           </p:cNvPr>
@@ -1373,7 +1948,7 @@
           <p:cNvPr id="2" name="Section title">
             <a:extLst xmlns:a="http://schemas.openxmlformats.org/drawingml/2006/main">
               <a:ext uri="{FF2B5EF4-FFF2-40B4-BE49-F238E27FC236}">
-                <a16:creationId xmlns:a16="http://schemas.microsoft.com/office/drawing/2014/main" id="{AA33C56B-E2E9-40A1-82E4-211550905FA2}"/>
+                <a16:creationId xmlns:a16="http://schemas.microsoft.com/office/drawing/2014/main" id="{9EBC3C4C-1A76-4AE8-A424-FDBEDB53F824}"/>
               </a:ext>
             </a:extLst>
           </p:cNvPr>
@@ -1556,7 +2131,7 @@
           <p:cNvPr id="3" name="Title">
             <a:extLst xmlns:a="http://schemas.openxmlformats.org/drawingml/2006/main">
               <a:ext uri="{FF2B5EF4-FFF2-40B4-BE49-F238E27FC236}">
-                <a16:creationId xmlns:a16="http://schemas.microsoft.com/office/drawing/2014/main" id="{8EB52BA4-4E84-4DB8-A23A-BBB37DD36E3B}"/>
+                <a16:creationId xmlns:a16="http://schemas.microsoft.com/office/drawing/2014/main" id="{B03CDD4B-28B8-411D-8718-FA881AA58C58}"/>
               </a:ext>
             </a:extLst>
           </p:cNvPr>
@@ -1722,7 +2297,7 @@
           <p:cNvPr id="2" name="Body">
             <a:extLst xmlns:a="http://schemas.openxmlformats.org/drawingml/2006/main">
               <a:ext uri="{FF2B5EF4-FFF2-40B4-BE49-F238E27FC236}">
-                <a16:creationId xmlns:a16="http://schemas.microsoft.com/office/drawing/2014/main" id="{9F01BFC8-AF08-4C9A-92E1-908B99C77424}"/>
+                <a16:creationId xmlns:a16="http://schemas.microsoft.com/office/drawing/2014/main" id="{137D9293-61CD-44E7-BB79-B85E09377D5F}"/>
               </a:ext>
             </a:extLst>
           </p:cNvPr>
@@ -1905,7 +2480,7 @@
           <p:cNvPr id="4" name="Title">
             <a:extLst xmlns:a="http://schemas.openxmlformats.org/drawingml/2006/main">
               <a:ext uri="{FF2B5EF4-FFF2-40B4-BE49-F238E27FC236}">
-                <a16:creationId xmlns:a16="http://schemas.microsoft.com/office/drawing/2014/main" id="{325C02AE-D62F-4C51-BBD3-9D7E12E4A2C8}"/>
+                <a16:creationId xmlns:a16="http://schemas.microsoft.com/office/drawing/2014/main" id="{3604A93D-8D35-4579-8CBF-2DC46448E8F5}"/>
               </a:ext>
             </a:extLst>
           </p:cNvPr>
@@ -2071,7 +2646,7 @@
           <p:cNvPr id="2" name="Left column">
             <a:extLst xmlns:a="http://schemas.openxmlformats.org/drawingml/2006/main">
               <a:ext uri="{FF2B5EF4-FFF2-40B4-BE49-F238E27FC236}">
-                <a16:creationId xmlns:a16="http://schemas.microsoft.com/office/drawing/2014/main" id="{6FC3780E-978F-4013-BD48-649C6ADD02EB}"/>
+                <a16:creationId xmlns:a16="http://schemas.microsoft.com/office/drawing/2014/main" id="{BBDECC06-F707-4503-8843-902C2FF9E886}"/>
               </a:ext>
             </a:extLst>
           </p:cNvPr>
@@ -2237,7 +2812,7 @@
           <p:cNvPr id="3" name="Right column">
             <a:extLst xmlns:a="http://schemas.openxmlformats.org/drawingml/2006/main">
               <a:ext uri="{FF2B5EF4-FFF2-40B4-BE49-F238E27FC236}">
-                <a16:creationId xmlns:a16="http://schemas.microsoft.com/office/drawing/2014/main" id="{1722314F-E0AC-4295-9AC3-F1663D3987F8}"/>
+                <a16:creationId xmlns:a16="http://schemas.microsoft.com/office/drawing/2014/main" id="{4C3B21DC-F463-4C7B-BD8E-E12E56AD662D}"/>
               </a:ext>
             </a:extLst>
           </p:cNvPr>
@@ -2420,7 +2995,7 @@
           <p:cNvPr id="3" name="Title">
             <a:extLst xmlns:a="http://schemas.openxmlformats.org/drawingml/2006/main">
               <a:ext uri="{FF2B5EF4-FFF2-40B4-BE49-F238E27FC236}">
-                <a16:creationId xmlns:a16="http://schemas.microsoft.com/office/drawing/2014/main" id="{91F80378-D4C5-4DBD-9CAD-81C3AFCBC0CE}"/>
+                <a16:creationId xmlns:a16="http://schemas.microsoft.com/office/drawing/2014/main" id="{EFB509BF-44FE-4DB1-A187-32E640BD1763}"/>
               </a:ext>
             </a:extLst>
           </p:cNvPr>
@@ -2586,7 +3161,7 @@
           <p:cNvPr id="2" name="Left column">
             <a:extLst xmlns:a="http://schemas.openxmlformats.org/drawingml/2006/main">
               <a:ext uri="{FF2B5EF4-FFF2-40B4-BE49-F238E27FC236}">
-                <a16:creationId xmlns:a16="http://schemas.microsoft.com/office/drawing/2014/main" id="{D054C07A-684A-475F-B210-E0E895686749}"/>
+                <a16:creationId xmlns:a16="http://schemas.microsoft.com/office/drawing/2014/main" id="{37B0E5B8-3A9C-495B-A418-094A904B4A9C}"/>
               </a:ext>
             </a:extLst>
           </p:cNvPr>
@@ -2790,12 +3365,12 @@
   </p:cSld>
   <p:clrMap bg1="lt1" tx1="dk1" bg2="lt2" tx2="dk2" accent1="accent1" accent2="accent2" accent3="accent3" accent4="accent4" accent5="accent5" accent6="accent6" hlink="hlink" folHlink="folHlink"/>
   <p:sldLayoutIdLst>
-    <p:sldLayoutId xmlns:r="http://schemas.openxmlformats.org/officeDocument/2006/relationships" id="2147483649" r:id="Reeadcb622341486c"/>
-    <p:sldLayoutId xmlns:r="http://schemas.openxmlformats.org/officeDocument/2006/relationships" id="2147483650" r:id="R1d899a785c444d97"/>
-    <p:sldLayoutId xmlns:r="http://schemas.openxmlformats.org/officeDocument/2006/relationships" id="2147483651" r:id="R7096ffb312f04fd9"/>
-    <p:sldLayoutId xmlns:r="http://schemas.openxmlformats.org/officeDocument/2006/relationships" id="2147483652" r:id="R072a7ab012fd45de"/>
-    <p:sldLayoutId xmlns:r="http://schemas.openxmlformats.org/officeDocument/2006/relationships" id="2147483653" r:id="R15b011495dbd4c29"/>
-    <p:sldLayoutId xmlns:r="http://schemas.openxmlformats.org/officeDocument/2006/relationships" id="2147483654" r:id="Re0fc75a443c24d99"/>
+    <p:sldLayoutId xmlns:r="http://schemas.openxmlformats.org/officeDocument/2006/relationships" id="2147483649" r:id="Re9d18f2a654b4c48"/>
+    <p:sldLayoutId xmlns:r="http://schemas.openxmlformats.org/officeDocument/2006/relationships" id="2147483650" r:id="Re6a0c6445be34f84"/>
+    <p:sldLayoutId xmlns:r="http://schemas.openxmlformats.org/officeDocument/2006/relationships" id="2147483651" r:id="R2b72a0cacbad4b93"/>
+    <p:sldLayoutId xmlns:r="http://schemas.openxmlformats.org/officeDocument/2006/relationships" id="2147483652" r:id="Ra1b3a5e804e545c3"/>
+    <p:sldLayoutId xmlns:r="http://schemas.openxmlformats.org/officeDocument/2006/relationships" id="2147483653" r:id="R444ec59681ed439f"/>
+    <p:sldLayoutId xmlns:r="http://schemas.openxmlformats.org/officeDocument/2006/relationships" id="2147483654" r:id="R2823812c2a0249aa"/>
   </p:sldLayoutIdLst>
   <p:txStyles>
     <p:titleStyle>
@@ -3343,10 +3918,10 @@
       </p:grpSpPr>
       <p:sp>
         <p:nvSpPr>
-          <p:cNvPr id="120" name="">
-            <a:extLst xmlns:a="http://schemas.openxmlformats.org/drawingml/2006/main">
-              <a:ext uri="{FF2B5EF4-FFF2-40B4-BE49-F238E27FC236}">
-                <a16:creationId xmlns:a16="http://schemas.microsoft.com/office/drawing/2014/main" id="{B38B60C4-C7E2-489F-883D-617E54161961}"/>
+          <p:cNvPr id="123" name="">
+            <a:extLst xmlns:a="http://schemas.openxmlformats.org/drawingml/2006/main">
+              <a:ext uri="{FF2B5EF4-FFF2-40B4-BE49-F238E27FC236}">
+                <a16:creationId xmlns:a16="http://schemas.microsoft.com/office/drawing/2014/main" id="{484809CE-2A0B-4720-A0D0-CF9F895A919E}"/>
               </a:ext>
             </a:extLst>
           </p:cNvPr>
@@ -3373,10 +3948,10 @@
       </p:sp>
       <p:sp>
         <p:nvSpPr>
-          <p:cNvPr id="2" name="AI-scale design meets finite experimental capacity">
-            <a:extLst xmlns:a="http://schemas.openxmlformats.org/drawingml/2006/main">
-              <a:ext uri="{FF2B5EF4-FFF2-40B4-BE49-F238E27FC236}">
-                <a16:creationId xmlns:a16="http://schemas.microsoft.com/office/drawing/2014/main" id="{D1256405-E27B-48A3-89A0-2E58AA6F396F}"/>
+          <p:cNvPr id="2" name="AI selection and biological evidence shape tool demand">
+            <a:extLst xmlns:a="http://schemas.openxmlformats.org/drawingml/2006/main">
+              <a:ext uri="{FF2B5EF4-FFF2-40B4-BE49-F238E27FC236}">
+                <a16:creationId xmlns:a16="http://schemas.microsoft.com/office/drawing/2014/main" id="{48E2506F-BB68-4800-9B7C-65331EFFCBFD}"/>
               </a:ext>
             </a:extLst>
           </p:cNvPr>
@@ -3433,17 +4008,17 @@
                 <a:ea typeface="Arial"/>
                 <a:cs typeface="Arial"/>
               </a:rPr>
-              <a:t>AI-scale design meets finite experimental capacity</a:t>
+              <a:t>AI selection and biological evidence shape tool demand</a:t>
             </a:r>
           </a:p>
         </p:txBody>
       </p:sp>
       <p:sp>
         <p:nvSpPr>
-          <p:cNvPr id="3" name="Working scenario: candidate generation expands faster than physical construction and biological validation.">
-            <a:extLst xmlns:a="http://schemas.openxmlformats.org/drawingml/2006/main">
-              <a:ext uri="{FF2B5EF4-FFF2-40B4-BE49-F238E27FC236}">
-                <a16:creationId xmlns:a16="http://schemas.microsoft.com/office/drawing/2014/main" id="{663958C5-1751-429C-AD1B-558118134D94}"/>
+          <p:cNvPr id="3" name="Workflows vary by modality; paid demand depends on funded assays, depth, net inputs and prices.">
+            <a:extLst xmlns:a="http://schemas.openxmlformats.org/drawingml/2006/main">
+              <a:ext uri="{FF2B5EF4-FFF2-40B4-BE49-F238E27FC236}">
+                <a16:creationId xmlns:a16="http://schemas.microsoft.com/office/drawing/2014/main" id="{D535589C-BE27-42A9-926C-1407893EA77D}"/>
               </a:ext>
             </a:extLst>
           </p:cNvPr>
@@ -3500,7 +4075,7 @@
                 <a:ea typeface="Arial"/>
                 <a:cs typeface="Arial"/>
               </a:rPr>
-              <a:t>Working scenario: candidate generation expands faster than physical construction and biological validation.</a:t>
+              <a:t>Workflows vary by modality; paid demand depends on funded assays, depth, net inputs and prices.</a:t>
             </a:r>
           </a:p>
         </p:txBody>
@@ -3510,7 +4085,7 @@
           <p:cNvPr id="4" name="">
             <a:extLst xmlns:a="http://schemas.openxmlformats.org/drawingml/2006/main">
               <a:ext uri="{FF2B5EF4-FFF2-40B4-BE49-F238E27FC236}">
-                <a16:creationId xmlns:a16="http://schemas.microsoft.com/office/drawing/2014/main" id="{A306A4CA-6A20-4709-B4A1-2F945A0BA6A8}"/>
+                <a16:creationId xmlns:a16="http://schemas.microsoft.com/office/drawing/2014/main" id="{6447B9BE-D93F-4A7B-9303-E72C26FB7C03}"/>
               </a:ext>
             </a:extLst>
           </p:cNvPr>
@@ -3547,10 +4122,10 @@
       </p:sp>
       <p:sp>
         <p:nvSpPr>
-          <p:cNvPr id="5" name="AI-ERA DISCOVERY FUNNEL">
-            <a:extLst xmlns:a="http://schemas.openxmlformats.org/drawingml/2006/main">
-              <a:ext uri="{FF2B5EF4-FFF2-40B4-BE49-F238E27FC236}">
-                <a16:creationId xmlns:a16="http://schemas.microsoft.com/office/drawing/2014/main" id="{725C4AEE-7E45-4453-AB2B-F8CC282D5E5C}"/>
+          <p:cNvPr id="5" name="MODALITY-AWARE DISCOVERY WORKFLOW">
+            <a:extLst xmlns:a="http://schemas.openxmlformats.org/drawingml/2006/main">
+              <a:ext uri="{FF2B5EF4-FFF2-40B4-BE49-F238E27FC236}">
+                <a16:creationId xmlns:a16="http://schemas.microsoft.com/office/drawing/2014/main" id="{B5C59D16-D7CD-45BD-8311-7440FA223FF0}"/>
               </a:ext>
             </a:extLst>
           </p:cNvPr>
@@ -3607,17 +4182,17 @@
                 <a:ea typeface="Arial"/>
                 <a:cs typeface="Arial"/>
               </a:rPr>
-              <a:t>AI-ERA DISCOVERY FUNNEL</a:t>
+              <a:t>MODALITY-AWARE DISCOVERY WORKFLOW</a:t>
             </a:r>
           </a:p>
         </p:txBody>
       </p:sp>
       <p:sp>
         <p:nvSpPr>
-          <p:cNvPr id="6" name="Illustrative counts per one clinical entrant">
-            <a:extLst xmlns:a="http://schemas.openxmlformats.org/drawingml/2006/main">
-              <a:ext uri="{FF2B5EF4-FFF2-40B4-BE49-F238E27FC236}">
-                <a16:creationId xmlns:a16="http://schemas.microsoft.com/office/drawing/2014/main" id="{F1F78BD2-F9AE-4075-9035-074698798EF8}"/>
+          <p:cNvPr id="6" name="Schematic widths; workload multipliers are sensitivities">
+            <a:extLst xmlns:a="http://schemas.openxmlformats.org/drawingml/2006/main">
+              <a:ext uri="{FF2B5EF4-FFF2-40B4-BE49-F238E27FC236}">
+                <a16:creationId xmlns:a16="http://schemas.microsoft.com/office/drawing/2014/main" id="{2251A0E4-361F-42C4-A0FD-CE0EF326D6F4}"/>
               </a:ext>
             </a:extLst>
           </p:cNvPr>
@@ -3674,7 +4249,7 @@
                 <a:ea typeface="Arial"/>
                 <a:cs typeface="Arial"/>
               </a:rPr>
-              <a:t>Illustrative counts per one clinical entrant</a:t>
+              <a:t>Schematic widths; workload multipliers are sensitivities</a:t>
             </a:r>
           </a:p>
         </p:txBody>
@@ -3684,7 +4259,7 @@
           <p:cNvPr id="7" name="">
             <a:extLst xmlns:a="http://schemas.openxmlformats.org/drawingml/2006/main">
               <a:ext uri="{FF2B5EF4-FFF2-40B4-BE49-F238E27FC236}">
-                <a16:creationId xmlns:a16="http://schemas.microsoft.com/office/drawing/2014/main" id="{C8673702-F09F-4D25-A1A3-9D5224301F11}"/>
+                <a16:creationId xmlns:a16="http://schemas.microsoft.com/office/drawing/2014/main" id="{70AA29D5-E297-44F0-B733-62C6261ACAE3}"/>
               </a:ext>
             </a:extLst>
           </p:cNvPr>
@@ -3729,10 +4304,10 @@
       </p:sp>
       <p:sp>
         <p:nvSpPr>
-          <p:cNvPr id="8" name="Virtual designs">
-            <a:extLst xmlns:a="http://schemas.openxmlformats.org/drawingml/2006/main">
-              <a:ext uri="{FF2B5EF4-FFF2-40B4-BE49-F238E27FC236}">
-                <a16:creationId xmlns:a16="http://schemas.microsoft.com/office/drawing/2014/main" id="{2690A193-0744-4423-B0AB-8E132D798698}"/>
+          <p:cNvPr id="8" name="Virtual search / design">
+            <a:extLst xmlns:a="http://schemas.openxmlformats.org/drawingml/2006/main">
+              <a:ext uri="{FF2B5EF4-FFF2-40B4-BE49-F238E27FC236}">
+                <a16:creationId xmlns:a16="http://schemas.microsoft.com/office/drawing/2014/main" id="{99CFA72E-359D-4E1F-8543-D9B7586A76CF}"/>
               </a:ext>
             </a:extLst>
           </p:cNvPr>
@@ -3789,17 +4364,17 @@
                 <a:ea typeface="Arial"/>
                 <a:cs typeface="Arial"/>
               </a:rPr>
-              <a:t>Virtual designs</a:t>
+              <a:t>Virtual search / design</a:t>
             </a:r>
           </a:p>
         </p:txBody>
       </p:sp>
       <p:sp>
         <p:nvSpPr>
-          <p:cNvPr id="9" name="10⁵–10⁹">
-            <a:extLst xmlns:a="http://schemas.openxmlformats.org/drawingml/2006/main">
-              <a:ext uri="{FF2B5EF4-FFF2-40B4-BE49-F238E27FC236}">
-                <a16:creationId xmlns:a16="http://schemas.microsoft.com/office/drawing/2014/main" id="{3C16F12F-C698-4887-A501-EAC7D1F015F4}"/>
+          <p:cNvPr id="9" name="Quality + selection">
+            <a:extLst xmlns:a="http://schemas.openxmlformats.org/drawingml/2006/main">
+              <a:ext uri="{FF2B5EF4-FFF2-40B4-BE49-F238E27FC236}">
+                <a16:creationId xmlns:a16="http://schemas.microsoft.com/office/drawing/2014/main" id="{55AB52E9-5B72-4D56-9A1D-A8AF29F454DA}"/>
               </a:ext>
             </a:extLst>
           </p:cNvPr>
@@ -3825,7 +4400,7 @@
           <a:bodyPr xmlns:a="http://schemas.openxmlformats.org/drawingml/2006/main" wrap="none" lIns="0" tIns="0" rIns="0" bIns="0" anchor="t"/>
           <a:lstStyle xmlns:a="http://schemas.openxmlformats.org/drawingml/2006/main">
             <a:defPPr algn="ctr">
-              <a:defRPr sz="2580" b="1">
+              <a:defRPr sz="1680" b="1">
                 <a:solidFill>
                   <a:srgbClr val="00355F"/>
                 </a:solidFill>
@@ -3838,7 +4413,7 @@
           <a:p xmlns:a="http://schemas.openxmlformats.org/drawingml/2006/main">
             <a:pPr algn="ctr">
               <a:buNone/>
-              <a:defRPr sz="2580" b="1">
+              <a:defRPr sz="1680" b="1">
                 <a:solidFill>
                   <a:srgbClr val="00355F"/>
                 </a:solidFill>
@@ -3848,7 +4423,7 @@
               </a:defRPr>
             </a:pPr>
             <a:r>
-              <a:rPr sz="2580" b="1">
+              <a:rPr sz="1680" b="1">
                 <a:solidFill>
                   <a:srgbClr val="00355F"/>
                 </a:solidFill>
@@ -3856,7 +4431,7 @@
                 <a:ea typeface="Arial"/>
                 <a:cs typeface="Arial"/>
               </a:rPr>
-              <a:t>10⁵–10⁹</a:t>
+              <a:t>Quality + selection</a:t>
             </a:r>
           </a:p>
         </p:txBody>
@@ -3866,7 +4441,7 @@
           <p:cNvPr id="10" name="">
             <a:extLst xmlns:a="http://schemas.openxmlformats.org/drawingml/2006/main">
               <a:ext uri="{FF2B5EF4-FFF2-40B4-BE49-F238E27FC236}">
-                <a16:creationId xmlns:a16="http://schemas.microsoft.com/office/drawing/2014/main" id="{168CA181-E74C-41C7-970E-13E42BBBC606}"/>
+                <a16:creationId xmlns:a16="http://schemas.microsoft.com/office/drawing/2014/main" id="{D8FA915D-3765-49B3-BEC2-27EEF19E2143}"/>
               </a:ext>
             </a:extLst>
           </p:cNvPr>
@@ -3911,10 +4486,10 @@
       </p:sp>
       <p:sp>
         <p:nvSpPr>
-          <p:cNvPr id="11" name="Physically made">
-            <a:extLst xmlns:a="http://schemas.openxmlformats.org/drawingml/2006/main">
-              <a:ext uri="{FF2B5EF4-FFF2-40B4-BE49-F238E27FC236}">
-                <a16:creationId xmlns:a16="http://schemas.microsoft.com/office/drawing/2014/main" id="{FFB9A473-2A21-4724-88D2-BB4114A0EF8B}"/>
+          <p:cNvPr id="11" name="Physical samples">
+            <a:extLst xmlns:a="http://schemas.openxmlformats.org/drawingml/2006/main">
+              <a:ext uri="{FF2B5EF4-FFF2-40B4-BE49-F238E27FC236}">
+                <a16:creationId xmlns:a16="http://schemas.microsoft.com/office/drawing/2014/main" id="{C9AE928B-7978-4413-A61F-289B7D7326A6}"/>
               </a:ext>
             </a:extLst>
           </p:cNvPr>
@@ -3971,17 +4546,17 @@
                 <a:ea typeface="Arial"/>
                 <a:cs typeface="Arial"/>
               </a:rPr>
-              <a:t>Physically made</a:t>
+              <a:t>Physical samples</a:t>
             </a:r>
           </a:p>
         </p:txBody>
       </p:sp>
       <p:sp>
         <p:nvSpPr>
-          <p:cNvPr id="12" name="10³–10⁴">
-            <a:extLst xmlns:a="http://schemas.openxmlformats.org/drawingml/2006/main">
-              <a:ext uri="{FF2B5EF4-FFF2-40B4-BE49-F238E27FC236}">
-                <a16:creationId xmlns:a16="http://schemas.microsoft.com/office/drawing/2014/main" id="{A304D462-EB8B-4809-B39C-308A0F91BA49}"/>
+          <p:cNvPr id="12" name="Modality-dependent">
+            <a:extLst xmlns:a="http://schemas.openxmlformats.org/drawingml/2006/main">
+              <a:ext uri="{FF2B5EF4-FFF2-40B4-BE49-F238E27FC236}">
+                <a16:creationId xmlns:a16="http://schemas.microsoft.com/office/drawing/2014/main" id="{B1F1FA0C-5044-4848-8C61-618E094CED8B}"/>
               </a:ext>
             </a:extLst>
           </p:cNvPr>
@@ -4007,7 +4582,7 @@
           <a:bodyPr xmlns:a="http://schemas.openxmlformats.org/drawingml/2006/main" wrap="none" lIns="0" tIns="0" rIns="0" bIns="0" anchor="t"/>
           <a:lstStyle xmlns:a="http://schemas.openxmlformats.org/drawingml/2006/main">
             <a:defPPr algn="ctr">
-              <a:defRPr sz="2580" b="1">
+              <a:defRPr sz="1560" b="1">
                 <a:solidFill>
                   <a:srgbClr val="00355F"/>
                 </a:solidFill>
@@ -4020,7 +4595,7 @@
           <a:p xmlns:a="http://schemas.openxmlformats.org/drawingml/2006/main">
             <a:pPr algn="ctr">
               <a:buNone/>
-              <a:defRPr sz="2580" b="1">
+              <a:defRPr sz="1560" b="1">
                 <a:solidFill>
                   <a:srgbClr val="00355F"/>
                 </a:solidFill>
@@ -4030,7 +4605,7 @@
               </a:defRPr>
             </a:pPr>
             <a:r>
-              <a:rPr sz="2580" b="1">
+              <a:rPr sz="1560" b="1">
                 <a:solidFill>
                   <a:srgbClr val="00355F"/>
                 </a:solidFill>
@@ -4038,7 +4613,7 @@
                 <a:ea typeface="Arial"/>
                 <a:cs typeface="Arial"/>
               </a:rPr>
-              <a:t>10³–10⁴</a:t>
+              <a:t>Modality-dependent</a:t>
             </a:r>
           </a:p>
         </p:txBody>
@@ -4048,7 +4623,7 @@
           <p:cNvPr id="13" name="">
             <a:extLst xmlns:a="http://schemas.openxmlformats.org/drawingml/2006/main">
               <a:ext uri="{FF2B5EF4-FFF2-40B4-BE49-F238E27FC236}">
-                <a16:creationId xmlns:a16="http://schemas.microsoft.com/office/drawing/2014/main" id="{D1C3E236-3CAD-4EA1-B540-0FA37EB1EFC4}"/>
+                <a16:creationId xmlns:a16="http://schemas.microsoft.com/office/drawing/2014/main" id="{4731F397-6FB6-4F45-A7E7-A5059594CC58}"/>
               </a:ext>
             </a:extLst>
           </p:cNvPr>
@@ -4093,10 +4668,10 @@
       </p:sp>
       <p:sp>
         <p:nvSpPr>
-          <p:cNvPr id="14" name="Fully profiled">
-            <a:extLst xmlns:a="http://schemas.openxmlformats.org/drawingml/2006/main">
-              <a:ext uri="{FF2B5EF4-FFF2-40B4-BE49-F238E27FC236}">
-                <a16:creationId xmlns:a16="http://schemas.microsoft.com/office/drawing/2014/main" id="{80BB4CA1-E1A6-4E39-9F89-808CEDAF8BCA}"/>
+          <p:cNvPr id="14" name="Assay workload">
+            <a:extLst xmlns:a="http://schemas.openxmlformats.org/drawingml/2006/main">
+              <a:ext uri="{FF2B5EF4-FFF2-40B4-BE49-F238E27FC236}">
+                <a16:creationId xmlns:a16="http://schemas.microsoft.com/office/drawing/2014/main" id="{D90912C3-5A31-4C01-853C-C83786367DCC}"/>
               </a:ext>
             </a:extLst>
           </p:cNvPr>
@@ -4153,17 +4728,17 @@
                 <a:ea typeface="Arial"/>
                 <a:cs typeface="Arial"/>
               </a:rPr>
-              <a:t>Fully profiled</a:t>
+              <a:t>Assay workload</a:t>
             </a:r>
           </a:p>
         </p:txBody>
       </p:sp>
       <p:sp>
         <p:nvSpPr>
-          <p:cNvPr id="15" name="50 → 500">
-            <a:extLst xmlns:a="http://schemas.openxmlformats.org/drawingml/2006/main">
-              <a:ext uri="{FF2B5EF4-FFF2-40B4-BE49-F238E27FC236}">
-                <a16:creationId xmlns:a16="http://schemas.microsoft.com/office/drawing/2014/main" id="{2054B034-913C-46C1-901F-E93806B60559}"/>
+          <p:cNvPr id="15" name="1× / 2× / 5× / 10×">
+            <a:extLst xmlns:a="http://schemas.openxmlformats.org/drawingml/2006/main">
+              <a:ext uri="{FF2B5EF4-FFF2-40B4-BE49-F238E27FC236}">
+                <a16:creationId xmlns:a16="http://schemas.microsoft.com/office/drawing/2014/main" id="{FE77CE63-E0B6-4E21-B2F1-A4D80D791C57}"/>
               </a:ext>
             </a:extLst>
           </p:cNvPr>
@@ -4189,7 +4764,7 @@
           <a:bodyPr xmlns:a="http://schemas.openxmlformats.org/drawingml/2006/main" wrap="none" lIns="0" tIns="0" rIns="0" bIns="0" anchor="t"/>
           <a:lstStyle xmlns:a="http://schemas.openxmlformats.org/drawingml/2006/main">
             <a:defPPr algn="ctr">
-              <a:defRPr sz="2580" b="1">
+              <a:defRPr sz="1440" b="1">
                 <a:solidFill>
                   <a:srgbClr val="FFFFFF"/>
                 </a:solidFill>
@@ -4202,7 +4777,7 @@
           <a:p xmlns:a="http://schemas.openxmlformats.org/drawingml/2006/main">
             <a:pPr algn="ctr">
               <a:buNone/>
-              <a:defRPr sz="2580" b="1">
+              <a:defRPr sz="1440" b="1">
                 <a:solidFill>
                   <a:srgbClr val="FFFFFF"/>
                 </a:solidFill>
@@ -4212,7 +4787,7 @@
               </a:defRPr>
             </a:pPr>
             <a:r>
-              <a:rPr sz="2580" b="1">
+              <a:rPr sz="1440" b="1">
                 <a:solidFill>
                   <a:srgbClr val="FFFFFF"/>
                 </a:solidFill>
@@ -4220,7 +4795,7 @@
                 <a:ea typeface="Arial"/>
                 <a:cs typeface="Arial"/>
               </a:rPr>
-              <a:t>50 → 500</a:t>
+              <a:t>1× / 2× / 5× / 10×</a:t>
             </a:r>
           </a:p>
         </p:txBody>
@@ -4230,7 +4805,7 @@
           <p:cNvPr id="16" name="">
             <a:extLst xmlns:a="http://schemas.openxmlformats.org/drawingml/2006/main">
               <a:ext uri="{FF2B5EF4-FFF2-40B4-BE49-F238E27FC236}">
-                <a16:creationId xmlns:a16="http://schemas.microsoft.com/office/drawing/2014/main" id="{FE1F75E6-3B4F-4C28-A161-E089F69A21ED}"/>
+                <a16:creationId xmlns:a16="http://schemas.microsoft.com/office/drawing/2014/main" id="{08BECAC5-0C74-441D-A00F-B3DAF243BE1D}"/>
               </a:ext>
             </a:extLst>
           </p:cNvPr>
@@ -4278,7 +4853,7 @@
           <p:cNvPr id="17" name="Clinical entry">
             <a:extLst xmlns:a="http://schemas.openxmlformats.org/drawingml/2006/main">
               <a:ext uri="{FF2B5EF4-FFF2-40B4-BE49-F238E27FC236}">
-                <a16:creationId xmlns:a16="http://schemas.microsoft.com/office/drawing/2014/main" id="{5EFD58BF-28F5-475D-BABF-78096EBC222D}"/>
+                <a16:creationId xmlns:a16="http://schemas.microsoft.com/office/drawing/2014/main" id="{B4A8E6DC-1767-4B09-A2BD-234165D57CC7}"/>
               </a:ext>
             </a:extLst>
           </p:cNvPr>
@@ -4342,10 +4917,10 @@
       </p:sp>
       <p:sp>
         <p:nvSpPr>
-          <p:cNvPr id="18" name="1">
-            <a:extLst xmlns:a="http://schemas.openxmlformats.org/drawingml/2006/main">
-              <a:ext uri="{FF2B5EF4-FFF2-40B4-BE49-F238E27FC236}">
-                <a16:creationId xmlns:a16="http://schemas.microsoft.com/office/drawing/2014/main" id="{688F8D8B-F0F4-48C0-B7AA-C27A04305B58}"/>
+          <p:cNvPr id="18" name="Funded programs">
+            <a:extLst xmlns:a="http://schemas.openxmlformats.org/drawingml/2006/main">
+              <a:ext uri="{FF2B5EF4-FFF2-40B4-BE49-F238E27FC236}">
+                <a16:creationId xmlns:a16="http://schemas.microsoft.com/office/drawing/2014/main" id="{B9D8EACD-48A2-40B8-A6ED-1CFE36C23FBB}"/>
               </a:ext>
             </a:extLst>
           </p:cNvPr>
@@ -4371,7 +4946,7 @@
           <a:bodyPr xmlns:a="http://schemas.openxmlformats.org/drawingml/2006/main" wrap="none" lIns="0" tIns="0" rIns="0" bIns="0" anchor="t"/>
           <a:lstStyle xmlns:a="http://schemas.openxmlformats.org/drawingml/2006/main">
             <a:defPPr algn="ctr">
-              <a:defRPr sz="1680" b="1">
+              <a:defRPr sz="1200" b="1">
                 <a:solidFill>
                   <a:srgbClr val="00355F"/>
                 </a:solidFill>
@@ -4384,7 +4959,7 @@
           <a:p xmlns:a="http://schemas.openxmlformats.org/drawingml/2006/main">
             <a:pPr algn="ctr">
               <a:buNone/>
-              <a:defRPr sz="1680" b="1">
+              <a:defRPr sz="1200" b="1">
                 <a:solidFill>
                   <a:srgbClr val="00355F"/>
                 </a:solidFill>
@@ -4394,7 +4969,7 @@
               </a:defRPr>
             </a:pPr>
             <a:r>
-              <a:rPr sz="1680" b="1">
+              <a:rPr sz="1200" b="1">
                 <a:solidFill>
                   <a:srgbClr val="00355F"/>
                 </a:solidFill>
@@ -4402,7 +4977,7 @@
                 <a:ea typeface="Arial"/>
                 <a:cs typeface="Arial"/>
               </a:rPr>
-              <a:t>1</a:t>
+              <a:t>Funded programs</a:t>
             </a:r>
           </a:p>
         </p:txBody>
@@ -4412,7 +4987,7 @@
           <p:cNvPr id="19" name="">
             <a:extLst xmlns:a="http://schemas.openxmlformats.org/drawingml/2006/main">
               <a:ext uri="{FF2B5EF4-FFF2-40B4-BE49-F238E27FC236}">
-                <a16:creationId xmlns:a16="http://schemas.microsoft.com/office/drawing/2014/main" id="{DD683BF2-CEB6-4D79-8930-5C5ABBB58C9C}"/>
+                <a16:creationId xmlns:a16="http://schemas.microsoft.com/office/drawing/2014/main" id="{DBCE1E9F-3A57-486B-AB14-A6DCBA3BCB52}"/>
               </a:ext>
             </a:extLst>
           </p:cNvPr>
@@ -4457,10 +5032,10 @@
       </p:sp>
       <p:sp>
         <p:nvSpPr>
-          <p:cNvPr id="20" name="Approvals">
-            <a:extLst xmlns:a="http://schemas.openxmlformats.org/drawingml/2006/main">
-              <a:ext uri="{FF2B5EF4-FFF2-40B4-BE49-F238E27FC236}">
-                <a16:creationId xmlns:a16="http://schemas.microsoft.com/office/drawing/2014/main" id="{F0D0F73F-86D0-4EA8-B9D0-CB2C3D99DD83}"/>
+          <p:cNvPr id="20" name="Approval gains">
+            <a:extLst xmlns:a="http://schemas.openxmlformats.org/drawingml/2006/main">
+              <a:ext uri="{FF2B5EF4-FFF2-40B4-BE49-F238E27FC236}">
+                <a16:creationId xmlns:a16="http://schemas.microsoft.com/office/drawing/2014/main" id="{C0975C86-92A4-4A93-BECC-B245F5C68D10}"/>
               </a:ext>
             </a:extLst>
           </p:cNvPr>
@@ -4517,17 +5092,17 @@
                 <a:ea typeface="Arial"/>
                 <a:cs typeface="Arial"/>
               </a:rPr>
-              <a:t>Approvals</a:t>
+              <a:t>Approval gains</a:t>
             </a:r>
           </a:p>
         </p:txBody>
       </p:sp>
       <p:sp>
         <p:nvSpPr>
-          <p:cNvPr id="21" name="Unknown">
-            <a:extLst xmlns:a="http://schemas.openxmlformats.org/drawingml/2006/main">
-              <a:ext uri="{FF2B5EF4-FFF2-40B4-BE49-F238E27FC236}">
-                <a16:creationId xmlns:a16="http://schemas.microsoft.com/office/drawing/2014/main" id="{ED228442-7255-428A-87AB-483850A307C2}"/>
+          <p:cNvPr id="21" name="Unproven">
+            <a:extLst xmlns:a="http://schemas.openxmlformats.org/drawingml/2006/main">
+              <a:ext uri="{FF2B5EF4-FFF2-40B4-BE49-F238E27FC236}">
+                <a16:creationId xmlns:a16="http://schemas.microsoft.com/office/drawing/2014/main" id="{3B63E9A1-2F6D-4CF8-BC91-2C0CD4C89CD1}"/>
               </a:ext>
             </a:extLst>
           </p:cNvPr>
@@ -4553,7 +5128,7 @@
           <a:bodyPr xmlns:a="http://schemas.openxmlformats.org/drawingml/2006/main" wrap="none" lIns="0" tIns="0" rIns="0" bIns="0" anchor="t"/>
           <a:lstStyle xmlns:a="http://schemas.openxmlformats.org/drawingml/2006/main">
             <a:defPPr algn="ctr">
-              <a:defRPr sz="1680" b="1">
+              <a:defRPr sz="1500" b="1">
                 <a:solidFill>
                   <a:srgbClr val="00355F"/>
                 </a:solidFill>
@@ -4566,7 +5141,7 @@
           <a:p xmlns:a="http://schemas.openxmlformats.org/drawingml/2006/main">
             <a:pPr algn="ctr">
               <a:buNone/>
-              <a:defRPr sz="1680" b="1">
+              <a:defRPr sz="1500" b="1">
                 <a:solidFill>
                   <a:srgbClr val="00355F"/>
                 </a:solidFill>
@@ -4576,7 +5151,7 @@
               </a:defRPr>
             </a:pPr>
             <a:r>
-              <a:rPr sz="1680" b="1">
+              <a:rPr sz="1500" b="1">
                 <a:solidFill>
                   <a:srgbClr val="00355F"/>
                 </a:solidFill>
@@ -4584,7 +5159,7 @@
                 <a:ea typeface="Arial"/>
                 <a:cs typeface="Arial"/>
               </a:rPr>
-              <a:t>Unknown</a:t>
+              <a:t>Unproven</a:t>
             </a:r>
           </a:p>
         </p:txBody>
@@ -4594,7 +5169,7 @@
           <p:cNvPr id="22" name="">
             <a:extLst xmlns:a="http://schemas.openxmlformats.org/drawingml/2006/main">
               <a:ext uri="{FF2B5EF4-FFF2-40B4-BE49-F238E27FC236}">
-                <a16:creationId xmlns:a16="http://schemas.microsoft.com/office/drawing/2014/main" id="{01E99CBD-EA71-40C1-B317-D33AF59C5031}"/>
+                <a16:creationId xmlns:a16="http://schemas.microsoft.com/office/drawing/2014/main" id="{E9BDC061-2286-4F81-A8C1-EAC3366EA5FD}"/>
               </a:ext>
             </a:extLst>
           </p:cNvPr>
@@ -4634,7 +5209,7 @@
           <p:cNvPr id="23" name="">
             <a:extLst xmlns:a="http://schemas.openxmlformats.org/drawingml/2006/main">
               <a:ext uri="{FF2B5EF4-FFF2-40B4-BE49-F238E27FC236}">
-                <a16:creationId xmlns:a16="http://schemas.microsoft.com/office/drawing/2014/main" id="{AC076321-D852-4612-BC29-75B18E703607}"/>
+                <a16:creationId xmlns:a16="http://schemas.microsoft.com/office/drawing/2014/main" id="{FC160DFE-68BD-4DA5-965A-D0F139362819}"/>
               </a:ext>
             </a:extLst>
           </p:cNvPr>
@@ -4674,7 +5249,7 @@
           <p:cNvPr id="24" name="">
             <a:extLst xmlns:a="http://schemas.openxmlformats.org/drawingml/2006/main">
               <a:ext uri="{FF2B5EF4-FFF2-40B4-BE49-F238E27FC236}">
-                <a16:creationId xmlns:a16="http://schemas.microsoft.com/office/drawing/2014/main" id="{3E42E26C-4B32-4728-9C3E-A39F96397C43}"/>
+                <a16:creationId xmlns:a16="http://schemas.microsoft.com/office/drawing/2014/main" id="{C13BA184-B5D9-4152-9D8F-8E936D8D5028}"/>
               </a:ext>
             </a:extLst>
           </p:cNvPr>
@@ -4714,7 +5289,7 @@
           <p:cNvPr id="25" name="">
             <a:extLst xmlns:a="http://schemas.openxmlformats.org/drawingml/2006/main">
               <a:ext uri="{FF2B5EF4-FFF2-40B4-BE49-F238E27FC236}">
-                <a16:creationId xmlns:a16="http://schemas.microsoft.com/office/drawing/2014/main" id="{D8E1A228-82CA-4AE1-978F-8EC3424F4AEA}"/>
+                <a16:creationId xmlns:a16="http://schemas.microsoft.com/office/drawing/2014/main" id="{CD4D1B31-A97E-4D46-9EDA-DAC4129D95CF}"/>
               </a:ext>
             </a:extLst>
           </p:cNvPr>
@@ -4760,7 +5335,7 @@
           <p:cNvPr id="26" name="">
             <a:extLst xmlns:a="http://schemas.openxmlformats.org/drawingml/2006/main">
               <a:ext uri="{FF2B5EF4-FFF2-40B4-BE49-F238E27FC236}">
-                <a16:creationId xmlns:a16="http://schemas.microsoft.com/office/drawing/2014/main" id="{6E60B072-F71A-4A7C-ABCB-794DA40CAC26}"/>
+                <a16:creationId xmlns:a16="http://schemas.microsoft.com/office/drawing/2014/main" id="{2C77E3A7-B54C-4B88-BACB-25047FB95B57}"/>
               </a:ext>
             </a:extLst>
           </p:cNvPr>
@@ -4800,7 +5375,7 @@
           <p:cNvPr id="27" name="">
             <a:extLst xmlns:a="http://schemas.openxmlformats.org/drawingml/2006/main">
               <a:ext uri="{FF2B5EF4-FFF2-40B4-BE49-F238E27FC236}">
-                <a16:creationId xmlns:a16="http://schemas.microsoft.com/office/drawing/2014/main" id="{53905B69-C2F4-4A28-955F-F51A693BA9E6}"/>
+                <a16:creationId xmlns:a16="http://schemas.microsoft.com/office/drawing/2014/main" id="{7D607DA8-5649-415C-AD87-25A971FE3F06}"/>
               </a:ext>
             </a:extLst>
           </p:cNvPr>
@@ -4840,23 +5415,23 @@
           <p:cNvPr id="28" name="">
             <a:extLst xmlns:a="http://schemas.openxmlformats.org/drawingml/2006/main">
               <a:ext uri="{FF2B5EF4-FFF2-40B4-BE49-F238E27FC236}">
-                <a16:creationId xmlns:a16="http://schemas.microsoft.com/office/drawing/2014/main" id="{4C2C97A1-C73B-4EC0-A6B7-214BB919450E}"/>
-              </a:ext>
-            </a:extLst>
-          </p:cNvPr>
-          <p:cNvSpPr>
-            <a:spLocks xmlns:a="http://schemas.openxmlformats.org/drawingml/2006/main" noGrp="1"/>
-          </p:cNvSpPr>
-          <p:nvPr/>
-        </p:nvSpPr>
-        <p:spPr>
-          <a:xfrm xmlns:a="http://schemas.openxmlformats.org/drawingml/2006/main">
-            <a:off x="762000" y="8481060"/>
-            <a:ext cx="5181600" cy="632460"/>
+                <a16:creationId xmlns:a16="http://schemas.microsoft.com/office/drawing/2014/main" id="{EA2593EE-E2D2-4B16-AB72-0FCF68B29A18}"/>
+              </a:ext>
+            </a:extLst>
+          </p:cNvPr>
+          <p:cNvSpPr>
+            <a:spLocks xmlns:a="http://schemas.openxmlformats.org/drawingml/2006/main" noGrp="1"/>
+          </p:cNvSpPr>
+          <p:nvPr/>
+        </p:nvSpPr>
+        <p:spPr>
+          <a:xfrm xmlns:a="http://schemas.openxmlformats.org/drawingml/2006/main">
+            <a:off x="762000" y="8343900"/>
+            <a:ext cx="2476500" cy="891540"/>
           </a:xfrm>
           <a:prstGeom xmlns:a="http://schemas.openxmlformats.org/drawingml/2006/main" prst="roundRect">
             <a:avLst>
-              <a:gd name="adj" fmla="val 10843"/>
+              <a:gd name="adj" fmla="val 7692"/>
             </a:avLst>
           </a:prstGeom>
           <a:solidFill xmlns:a="http://schemas.openxmlformats.org/drawingml/2006/main">
@@ -4867,58 +5442,58 @@
           </a:ln>
         </p:spPr>
       </p:sp>
-      <p:pic>
-        <p:nvPicPr>
+      <p:sp>
+        <p:nvSpPr>
           <p:cNvPr id="29" name="">
             <a:extLst xmlns:a="http://schemas.openxmlformats.org/drawingml/2006/main">
               <a:ext uri="{FF2B5EF4-FFF2-40B4-BE49-F238E27FC236}">
-                <a16:creationId xmlns:a16="http://schemas.microsoft.com/office/drawing/2014/main" id="{336DE10E-1820-4B4E-B705-27A90788D46E}"/>
-              </a:ext>
-            </a:extLst>
-          </p:cNvPr>
-          <p:cNvPicPr>
-            <a:picLocks xmlns:a="http://schemas.openxmlformats.org/drawingml/2006/main" noChangeAspect="1"/>
-          </p:cNvPicPr>
-          <p:nvPr/>
-        </p:nvPicPr>
-        <p:blipFill>
-          <a:blip xmlns:r="http://schemas.openxmlformats.org/officeDocument/2006/relationships" xmlns:a="http://schemas.openxmlformats.org/drawingml/2006/main" r:embed="Ra5d57eadd4a24024">
-            <a:extLst>
-              <a:ext uri="{96DAC541-7B7A-43D3-8B79-37D633B846F1}">
-                <asvg:svgBlip xmlns:asvg="http://schemas.microsoft.com/office/drawing/2016/SVG/main" r:embed="R43c0fe98aa5a4da9"/>
-              </a:ext>
-            </a:extLst>
-          </a:blip>
-          <a:stretch xmlns:a="http://schemas.openxmlformats.org/drawingml/2006/main"/>
-        </p:blipFill>
-        <p:spPr>
-          <a:xfrm xmlns:a="http://schemas.openxmlformats.org/drawingml/2006/main">
-            <a:off x="929640" y="8625840"/>
-            <a:ext cx="327660" cy="327660"/>
-          </a:xfrm>
-          <a:prstGeom xmlns:a="http://schemas.openxmlformats.org/drawingml/2006/main" prst="rect">
-            <a:avLst/>
-          </a:prstGeom>
-        </p:spPr>
-      </p:pic>
-      <p:sp>
-        <p:nvSpPr>
-          <p:cNvPr id="30" name="WET LAB = BUILD + TEST">
-            <a:extLst xmlns:a="http://schemas.openxmlformats.org/drawingml/2006/main">
-              <a:ext uri="{FF2B5EF4-FFF2-40B4-BE49-F238E27FC236}">
-                <a16:creationId xmlns:a16="http://schemas.microsoft.com/office/drawing/2014/main" id="{422AD2CA-4E6F-46FB-B297-41F7A0D69F9A}"/>
-              </a:ext>
-            </a:extLst>
-          </p:cNvPr>
-          <p:cNvSpPr>
-            <a:spLocks xmlns:a="http://schemas.openxmlformats.org/drawingml/2006/main" noGrp="1"/>
-          </p:cNvSpPr>
-          <p:nvPr/>
-        </p:nvSpPr>
-        <p:spPr>
-          <a:xfrm xmlns:a="http://schemas.openxmlformats.org/drawingml/2006/main">
-            <a:off x="1447800" y="8663940"/>
-            <a:ext cx="4343400" cy="327660"/>
+                <a16:creationId xmlns:a16="http://schemas.microsoft.com/office/drawing/2014/main" id="{45266A3E-FD5C-4525-93AD-866C66FDC925}"/>
+              </a:ext>
+            </a:extLst>
+          </p:cNvPr>
+          <p:cNvSpPr>
+            <a:spLocks xmlns:a="http://schemas.openxmlformats.org/drawingml/2006/main" noGrp="1"/>
+          </p:cNvSpPr>
+          <p:nvPr/>
+        </p:nvSpPr>
+        <p:spPr>
+          <a:xfrm xmlns:a="http://schemas.openxmlformats.org/drawingml/2006/main">
+            <a:off x="3375660" y="8343900"/>
+            <a:ext cx="2567940" cy="891540"/>
+          </a:xfrm>
+          <a:prstGeom xmlns:a="http://schemas.openxmlformats.org/drawingml/2006/main" prst="roundRect">
+            <a:avLst>
+              <a:gd name="adj" fmla="val 7692"/>
+            </a:avLst>
+          </a:prstGeom>
+          <a:solidFill xmlns:a="http://schemas.openxmlformats.org/drawingml/2006/main">
+            <a:srgbClr val="EEF6FC"/>
+          </a:solidFill>
+          <a:ln xmlns:a="http://schemas.openxmlformats.org/drawingml/2006/main" w="7620">
+            <a:solidFill>
+              <a:srgbClr val="A5A5A5"/>
+            </a:solidFill>
+          </a:ln>
+        </p:spPr>
+      </p:sp>
+      <p:sp>
+        <p:nvSpPr>
+          <p:cNvPr id="30" name="SMALL MOLECULES">
+            <a:extLst xmlns:a="http://schemas.openxmlformats.org/drawingml/2006/main">
+              <a:ext uri="{FF2B5EF4-FFF2-40B4-BE49-F238E27FC236}">
+                <a16:creationId xmlns:a16="http://schemas.microsoft.com/office/drawing/2014/main" id="{C08A3122-E452-4FA6-BF04-5B5B1F01E1F0}"/>
+              </a:ext>
+            </a:extLst>
+          </p:cNvPr>
+          <p:cNvSpPr>
+            <a:spLocks xmlns:a="http://schemas.openxmlformats.org/drawingml/2006/main" noGrp="1"/>
+          </p:cNvSpPr>
+          <p:nvPr/>
+        </p:nvSpPr>
+        <p:spPr>
+          <a:xfrm xmlns:a="http://schemas.openxmlformats.org/drawingml/2006/main">
+            <a:off x="883920" y="8473440"/>
+            <a:ext cx="2247900" cy="220980"/>
           </a:xfrm>
           <a:prstGeom xmlns:a="http://schemas.openxmlformats.org/drawingml/2006/main" prst="rect">
             <a:avLst/>
@@ -4932,7 +5507,7 @@
           <a:bodyPr xmlns:a="http://schemas.openxmlformats.org/drawingml/2006/main" wrap="none" lIns="0" tIns="0" rIns="0" bIns="0" anchor="t"/>
           <a:lstStyle xmlns:a="http://schemas.openxmlformats.org/drawingml/2006/main">
             <a:defPPr algn="l">
-              <a:defRPr sz="1740" b="1">
+              <a:defRPr sz="1200" b="1">
                 <a:solidFill>
                   <a:srgbClr val="00355F"/>
                 </a:solidFill>
@@ -4945,7 +5520,7 @@
           <a:p xmlns:a="http://schemas.openxmlformats.org/drawingml/2006/main">
             <a:pPr algn="l">
               <a:buNone/>
-              <a:defRPr sz="1740" b="1">
+              <a:defRPr sz="1200" b="1">
                 <a:solidFill>
                   <a:srgbClr val="00355F"/>
                 </a:solidFill>
@@ -4955,7 +5530,7 @@
               </a:defRPr>
             </a:pPr>
             <a:r>
-              <a:rPr sz="1740" b="1">
+              <a:rPr sz="1200" b="1">
                 <a:solidFill>
                   <a:srgbClr val="00355F"/>
                 </a:solidFill>
@@ -4963,29 +5538,278 @@
                 <a:ea typeface="Arial"/>
                 <a:cs typeface="Arial"/>
               </a:rPr>
-              <a:t>WET LAB = BUILD + TEST</a:t>
+              <a:t>SMALL MOLECULES</a:t>
             </a:r>
           </a:p>
         </p:txBody>
       </p:sp>
       <p:sp>
         <p:nvSpPr>
-          <p:cNvPr id="31" name="Funnel widths are schematic.">
-            <a:extLst xmlns:a="http://schemas.openxmlformats.org/drawingml/2006/main">
-              <a:ext uri="{FF2B5EF4-FFF2-40B4-BE49-F238E27FC236}">
-                <a16:creationId xmlns:a16="http://schemas.microsoft.com/office/drawing/2014/main" id="{8F405FA3-DACE-432E-A681-C1783FD6D5BB}"/>
-              </a:ext>
-            </a:extLst>
-          </p:cNvPr>
-          <p:cNvSpPr>
-            <a:spLocks xmlns:a="http://schemas.openxmlformats.org/drawingml/2006/main" noGrp="1"/>
-          </p:cNvSpPr>
-          <p:nvPr/>
-        </p:nvSpPr>
-        <p:spPr>
-          <a:xfrm xmlns:a="http://schemas.openxmlformats.org/drawingml/2006/main">
-            <a:off x="762000" y="9304020"/>
-            <a:ext cx="5181600" cy="579120"/>
+          <p:cNvPr id="31" name="Fewer syntheses per">
+            <a:extLst xmlns:a="http://schemas.openxmlformats.org/drawingml/2006/main">
+              <a:ext uri="{FF2B5EF4-FFF2-40B4-BE49-F238E27FC236}">
+                <a16:creationId xmlns:a16="http://schemas.microsoft.com/office/drawing/2014/main" id="{F3996C0B-B517-4975-ABF1-BDA0337B2E25}"/>
+              </a:ext>
+            </a:extLst>
+          </p:cNvPr>
+          <p:cNvSpPr>
+            <a:spLocks xmlns:a="http://schemas.openxmlformats.org/drawingml/2006/main" noGrp="1"/>
+          </p:cNvSpPr>
+          <p:nvPr/>
+        </p:nvSpPr>
+        <p:spPr>
+          <a:xfrm xmlns:a="http://schemas.openxmlformats.org/drawingml/2006/main">
+            <a:off x="883920" y="8763000"/>
+            <a:ext cx="2247900" cy="388620"/>
+          </a:xfrm>
+          <a:prstGeom xmlns:a="http://schemas.openxmlformats.org/drawingml/2006/main" prst="rect">
+            <a:avLst/>
+          </a:prstGeom>
+          <a:noFill xmlns:a="http://schemas.openxmlformats.org/drawingml/2006/main"/>
+          <a:ln xmlns:a="http://schemas.openxmlformats.org/drawingml/2006/main" w="0">
+            <a:noFill/>
+          </a:ln>
+        </p:spPr>
+        <p:txBody>
+          <a:bodyPr xmlns:a="http://schemas.openxmlformats.org/drawingml/2006/main" wrap="none" lIns="0" tIns="0" rIns="0" bIns="0" anchor="t"/>
+          <a:lstStyle xmlns:a="http://schemas.openxmlformats.org/drawingml/2006/main">
+            <a:defPPr algn="l">
+              <a:defRPr sz="1140" b="0">
+                <a:solidFill>
+                  <a:srgbClr val="00355F"/>
+                </a:solidFill>
+                <a:latin typeface="Arial"/>
+                <a:ea typeface="Arial"/>
+                <a:cs typeface="Arial"/>
+              </a:defRPr>
+            </a:defPPr>
+          </a:lstStyle>
+          <a:p xmlns:a="http://schemas.openxmlformats.org/drawingml/2006/main">
+            <a:pPr algn="l">
+              <a:buNone/>
+              <a:defRPr sz="1140" b="0">
+                <a:solidFill>
+                  <a:srgbClr val="00355F"/>
+                </a:solidFill>
+                <a:latin typeface="Arial"/>
+                <a:ea typeface="Arial"/>
+                <a:cs typeface="Arial"/>
+              </a:defRPr>
+            </a:pPr>
+            <a:r>
+              <a:rPr sz="1140" b="0">
+                <a:solidFill>
+                  <a:srgbClr val="00355F"/>
+                </a:solidFill>
+                <a:latin typeface="Arial"/>
+                <a:ea typeface="Arial"/>
+                <a:cs typeface="Arial"/>
+              </a:rPr>
+              <a:t>Fewer syntheses per</a:t>
+            </a:r>
+          </a:p>
+          <a:p xmlns:a="http://schemas.openxmlformats.org/drawingml/2006/main">
+            <a:pPr algn="l">
+              <a:buNone/>
+              <a:defRPr sz="1140" b="0">
+                <a:solidFill>
+                  <a:srgbClr val="00355F"/>
+                </a:solidFill>
+                <a:latin typeface="Arial"/>
+                <a:ea typeface="Arial"/>
+                <a:cs typeface="Arial"/>
+              </a:defRPr>
+            </a:pPr>
+            <a:r>
+              <a:rPr sz="1140" b="0">
+                <a:solidFill>
+                  <a:srgbClr val="00355F"/>
+                </a:solidFill>
+                <a:latin typeface="Arial"/>
+                <a:ea typeface="Arial"/>
+                <a:cs typeface="Arial"/>
+              </a:rPr>
+              <a:t>program are possible.</a:t>
+            </a:r>
+          </a:p>
+        </p:txBody>
+      </p:sp>
+      <p:sp>
+        <p:nvSpPr>
+          <p:cNvPr id="32" name="PROTEINS / ANTIBODIES">
+            <a:extLst xmlns:a="http://schemas.openxmlformats.org/drawingml/2006/main">
+              <a:ext uri="{FF2B5EF4-FFF2-40B4-BE49-F238E27FC236}">
+                <a16:creationId xmlns:a16="http://schemas.microsoft.com/office/drawing/2014/main" id="{4CA13231-A276-4415-9CF4-45B60D6AB207}"/>
+              </a:ext>
+            </a:extLst>
+          </p:cNvPr>
+          <p:cNvSpPr>
+            <a:spLocks xmlns:a="http://schemas.openxmlformats.org/drawingml/2006/main" noGrp="1"/>
+          </p:cNvSpPr>
+          <p:nvPr/>
+        </p:nvSpPr>
+        <p:spPr>
+          <a:xfrm xmlns:a="http://schemas.openxmlformats.org/drawingml/2006/main">
+            <a:off x="3497580" y="8473440"/>
+            <a:ext cx="2324100" cy="220980"/>
+          </a:xfrm>
+          <a:prstGeom xmlns:a="http://schemas.openxmlformats.org/drawingml/2006/main" prst="rect">
+            <a:avLst/>
+          </a:prstGeom>
+          <a:noFill xmlns:a="http://schemas.openxmlformats.org/drawingml/2006/main"/>
+          <a:ln xmlns:a="http://schemas.openxmlformats.org/drawingml/2006/main" w="0">
+            <a:noFill/>
+          </a:ln>
+        </p:spPr>
+        <p:txBody>
+          <a:bodyPr xmlns:a="http://schemas.openxmlformats.org/drawingml/2006/main" wrap="none" lIns="0" tIns="0" rIns="0" bIns="0" anchor="t"/>
+          <a:lstStyle xmlns:a="http://schemas.openxmlformats.org/drawingml/2006/main">
+            <a:defPPr algn="l">
+              <a:defRPr sz="1110" b="1">
+                <a:solidFill>
+                  <a:srgbClr val="00355F"/>
+                </a:solidFill>
+                <a:latin typeface="Arial"/>
+                <a:ea typeface="Arial"/>
+                <a:cs typeface="Arial"/>
+              </a:defRPr>
+            </a:defPPr>
+          </a:lstStyle>
+          <a:p xmlns:a="http://schemas.openxmlformats.org/drawingml/2006/main">
+            <a:pPr algn="l">
+              <a:buNone/>
+              <a:defRPr sz="1110" b="1">
+                <a:solidFill>
+                  <a:srgbClr val="00355F"/>
+                </a:solidFill>
+                <a:latin typeface="Arial"/>
+                <a:ea typeface="Arial"/>
+                <a:cs typeface="Arial"/>
+              </a:defRPr>
+            </a:pPr>
+            <a:r>
+              <a:rPr sz="1110" b="1">
+                <a:solidFill>
+                  <a:srgbClr val="00355F"/>
+                </a:solidFill>
+                <a:latin typeface="Arial"/>
+                <a:ea typeface="Arial"/>
+                <a:cs typeface="Arial"/>
+              </a:rPr>
+              <a:t>PROTEINS / ANTIBODIES</a:t>
+            </a:r>
+          </a:p>
+        </p:txBody>
+      </p:sp>
+      <p:sp>
+        <p:nvSpPr>
+          <p:cNvPr id="33" name="Pooled screens scale;">
+            <a:extLst xmlns:a="http://schemas.openxmlformats.org/drawingml/2006/main">
+              <a:ext uri="{FF2B5EF4-FFF2-40B4-BE49-F238E27FC236}">
+                <a16:creationId xmlns:a16="http://schemas.microsoft.com/office/drawing/2014/main" id="{8081EF3A-E2C8-4A65-A849-9EFA9DD570E9}"/>
+              </a:ext>
+            </a:extLst>
+          </p:cNvPr>
+          <p:cNvSpPr>
+            <a:spLocks xmlns:a="http://schemas.openxmlformats.org/drawingml/2006/main" noGrp="1"/>
+          </p:cNvSpPr>
+          <p:nvPr/>
+        </p:nvSpPr>
+        <p:spPr>
+          <a:xfrm xmlns:a="http://schemas.openxmlformats.org/drawingml/2006/main">
+            <a:off x="3497580" y="8763000"/>
+            <a:ext cx="2324100" cy="388620"/>
+          </a:xfrm>
+          <a:prstGeom xmlns:a="http://schemas.openxmlformats.org/drawingml/2006/main" prst="rect">
+            <a:avLst/>
+          </a:prstGeom>
+          <a:noFill xmlns:a="http://schemas.openxmlformats.org/drawingml/2006/main"/>
+          <a:ln xmlns:a="http://schemas.openxmlformats.org/drawingml/2006/main" w="0">
+            <a:noFill/>
+          </a:ln>
+        </p:spPr>
+        <p:txBody>
+          <a:bodyPr xmlns:a="http://schemas.openxmlformats.org/drawingml/2006/main" wrap="none" lIns="0" tIns="0" rIns="0" bIns="0" anchor="t"/>
+          <a:lstStyle xmlns:a="http://schemas.openxmlformats.org/drawingml/2006/main">
+            <a:defPPr algn="l">
+              <a:defRPr sz="1140" b="0">
+                <a:solidFill>
+                  <a:srgbClr val="00355F"/>
+                </a:solidFill>
+                <a:latin typeface="Arial"/>
+                <a:ea typeface="Arial"/>
+                <a:cs typeface="Arial"/>
+              </a:defRPr>
+            </a:defPPr>
+          </a:lstStyle>
+          <a:p xmlns:a="http://schemas.openxmlformats.org/drawingml/2006/main">
+            <a:pPr algn="l">
+              <a:buNone/>
+              <a:defRPr sz="1140" b="0">
+                <a:solidFill>
+                  <a:srgbClr val="00355F"/>
+                </a:solidFill>
+                <a:latin typeface="Arial"/>
+                <a:ea typeface="Arial"/>
+                <a:cs typeface="Arial"/>
+              </a:defRPr>
+            </a:pPr>
+            <a:r>
+              <a:rPr sz="1140" b="0">
+                <a:solidFill>
+                  <a:srgbClr val="00355F"/>
+                </a:solidFill>
+                <a:latin typeface="Arial"/>
+                <a:ea typeface="Arial"/>
+                <a:cs typeface="Arial"/>
+              </a:rPr>
+              <a:t>Pooled screens scale;</a:t>
+            </a:r>
+          </a:p>
+          <a:p xmlns:a="http://schemas.openxmlformats.org/drawingml/2006/main">
+            <a:pPr algn="l">
+              <a:buNone/>
+              <a:defRPr sz="1140" b="0">
+                <a:solidFill>
+                  <a:srgbClr val="00355F"/>
+                </a:solidFill>
+                <a:latin typeface="Arial"/>
+                <a:ea typeface="Arial"/>
+                <a:cs typeface="Arial"/>
+              </a:defRPr>
+            </a:pPr>
+            <a:r>
+              <a:rPr sz="1140" b="0">
+                <a:solidFill>
+                  <a:srgbClr val="00355F"/>
+                </a:solidFill>
+                <a:latin typeface="Arial"/>
+                <a:ea typeface="Arial"/>
+                <a:cs typeface="Arial"/>
+              </a:rPr>
+              <a:t>individual profiling differs.</a:t>
+            </a:r>
+          </a:p>
+        </p:txBody>
+      </p:sp>
+      <p:sp>
+        <p:nvSpPr>
+          <p:cNvPr id="34" name="WET LAB = BUILD + TEST">
+            <a:extLst xmlns:a="http://schemas.openxmlformats.org/drawingml/2006/main">
+              <a:ext uri="{FF2B5EF4-FFF2-40B4-BE49-F238E27FC236}">
+                <a16:creationId xmlns:a16="http://schemas.microsoft.com/office/drawing/2014/main" id="{BCF368F0-907F-43FF-8295-E1875E58DE0F}"/>
+              </a:ext>
+            </a:extLst>
+          </p:cNvPr>
+          <p:cNvSpPr>
+            <a:spLocks xmlns:a="http://schemas.openxmlformats.org/drawingml/2006/main" noGrp="1"/>
+          </p:cNvSpPr>
+          <p:nvPr/>
+        </p:nvSpPr>
+        <p:spPr>
+          <a:xfrm xmlns:a="http://schemas.openxmlformats.org/drawingml/2006/main">
+            <a:off x="762000" y="9372600"/>
+            <a:ext cx="5181600" cy="701040"/>
           </a:xfrm>
           <a:prstGeom xmlns:a="http://schemas.openxmlformats.org/drawingml/2006/main" prst="rect">
             <a:avLst/>
@@ -5030,7 +5854,7 @@
                 <a:ea typeface="Arial"/>
                 <a:cs typeface="Arial"/>
               </a:rPr>
-              <a:t>Funnel widths are schematic.</a:t>
+              <a:t>WET LAB = BUILD + TEST</a:t>
             </a:r>
           </a:p>
           <a:p xmlns:a="http://schemas.openxmlformats.org/drawingml/2006/main">
@@ -5054,7 +5878,7 @@
                 <a:ea typeface="Arial"/>
                 <a:cs typeface="Arial"/>
               </a:rPr>
-              <a:t>Clinical success remains unproven</a:t>
+              <a:t>No universal molecule-count funnel.</a:t>
             </a:r>
           </a:p>
           <a:p xmlns:a="http://schemas.openxmlformats.org/drawingml/2006/main">
@@ -5078,17 +5902,17 @@
                 <a:ea typeface="Arial"/>
                 <a:cs typeface="Arial"/>
               </a:rPr>
-              <a:t>in this scenario.</a:t>
+              <a:t>AI clinical advantage remains unproven.</a:t>
             </a:r>
           </a:p>
         </p:txBody>
       </p:sp>
       <p:sp>
         <p:nvSpPr>
-          <p:cNvPr id="32" name="">
-            <a:extLst xmlns:a="http://schemas.openxmlformats.org/drawingml/2006/main">
-              <a:ext uri="{FF2B5EF4-FFF2-40B4-BE49-F238E27FC236}">
-                <a16:creationId xmlns:a16="http://schemas.microsoft.com/office/drawing/2014/main" id="{EEA447D5-EAA6-4D86-8AF1-52C781709928}"/>
+          <p:cNvPr id="35" name="">
+            <a:extLst xmlns:a="http://schemas.openxmlformats.org/drawingml/2006/main">
+              <a:ext uri="{FF2B5EF4-FFF2-40B4-BE49-F238E27FC236}">
+                <a16:creationId xmlns:a16="http://schemas.microsoft.com/office/drawing/2014/main" id="{0B6CD182-FF07-4C1B-B0CF-E8C738C5833F}"/>
               </a:ext>
             </a:extLst>
           </p:cNvPr>
@@ -5119,10 +5943,10 @@
       </p:sp>
       <p:sp>
         <p:nvSpPr>
-          <p:cNvPr id="33" name="The LST ecosystem behind the capacity gate">
-            <a:extLst xmlns:a="http://schemas.openxmlformats.org/drawingml/2006/main">
-              <a:ext uri="{FF2B5EF4-FFF2-40B4-BE49-F238E27FC236}">
-                <a16:creationId xmlns:a16="http://schemas.microsoft.com/office/drawing/2014/main" id="{7782A3B0-28BD-41D0-8811-3E64106229A2}"/>
+          <p:cNvPr id="36" name="The LST ecosystem behind the capacity gate">
+            <a:extLst xmlns:a="http://schemas.openxmlformats.org/drawingml/2006/main">
+              <a:ext uri="{FF2B5EF4-FFF2-40B4-BE49-F238E27FC236}">
+                <a16:creationId xmlns:a16="http://schemas.microsoft.com/office/drawing/2014/main" id="{74062835-8B42-4668-99C6-42708D4E9E1A}"/>
               </a:ext>
             </a:extLst>
           </p:cNvPr>
@@ -5186,10 +6010,10 @@
       </p:sp>
       <p:sp>
         <p:nvSpPr>
-          <p:cNvPr id="34" name="Selected market anchors · different scopes and years · do not add these values">
-            <a:extLst xmlns:a="http://schemas.openxmlformats.org/drawingml/2006/main">
-              <a:ext uri="{FF2B5EF4-FFF2-40B4-BE49-F238E27FC236}">
-                <a16:creationId xmlns:a16="http://schemas.microsoft.com/office/drawing/2014/main" id="{9757D6E1-FDF7-4BB0-BAB8-C76279B6E9C7}"/>
+          <p:cNvPr id="37" name="Issuer-cited subset estimates · different scopes / years · source conflicts disclosed below">
+            <a:extLst xmlns:a="http://schemas.openxmlformats.org/drawingml/2006/main">
+              <a:ext uri="{FF2B5EF4-FFF2-40B4-BE49-F238E27FC236}">
+                <a16:creationId xmlns:a16="http://schemas.microsoft.com/office/drawing/2014/main" id="{C70507E4-9B24-4715-B548-68CA3F32070A}"/>
               </a:ext>
             </a:extLst>
           </p:cNvPr>
@@ -5246,17 +6070,17 @@
                 <a:ea typeface="Arial"/>
                 <a:cs typeface="Arial"/>
               </a:rPr>
-              <a:t>Selected market anchors · different scopes and years · do not add these values</a:t>
+              <a:t>Issuer-cited subset estimates · different scopes / years · source conflicts disclosed below</a:t>
             </a:r>
           </a:p>
         </p:txBody>
       </p:sp>
       <p:sp>
         <p:nvSpPr>
-          <p:cNvPr id="35" name="">
-            <a:extLst xmlns:a="http://schemas.openxmlformats.org/drawingml/2006/main">
-              <a:ext uri="{FF2B5EF4-FFF2-40B4-BE49-F238E27FC236}">
-                <a16:creationId xmlns:a16="http://schemas.microsoft.com/office/drawing/2014/main" id="{7A4D78E2-C655-4F17-B637-412B75A8CDF0}"/>
+          <p:cNvPr id="38" name="">
+            <a:extLst xmlns:a="http://schemas.openxmlformats.org/drawingml/2006/main">
+              <a:ext uri="{FF2B5EF4-FFF2-40B4-BE49-F238E27FC236}">
+                <a16:creationId xmlns:a16="http://schemas.microsoft.com/office/drawing/2014/main" id="{0115D6F1-3ADA-445A-B330-500F58F2BDAB}"/>
               </a:ext>
             </a:extLst>
           </p:cNvPr>
@@ -5287,10 +6111,10 @@
       </p:sp>
       <p:pic>
         <p:nvPicPr>
-          <p:cNvPr id="36" name="">
-            <a:extLst xmlns:a="http://schemas.openxmlformats.org/drawingml/2006/main">
-              <a:ext uri="{FF2B5EF4-FFF2-40B4-BE49-F238E27FC236}">
-                <a16:creationId xmlns:a16="http://schemas.microsoft.com/office/drawing/2014/main" id="{DB0E7D29-1995-4385-823F-498AEFD1CA86}"/>
+          <p:cNvPr id="39" name="">
+            <a:extLst xmlns:a="http://schemas.openxmlformats.org/drawingml/2006/main">
+              <a:ext uri="{FF2B5EF4-FFF2-40B4-BE49-F238E27FC236}">
+                <a16:creationId xmlns:a16="http://schemas.microsoft.com/office/drawing/2014/main" id="{D71A8618-CA79-494F-BDCE-14BE2392D452}"/>
               </a:ext>
             </a:extLst>
           </p:cNvPr>
@@ -5300,10 +6124,10 @@
           <p:nvPr/>
         </p:nvPicPr>
         <p:blipFill>
-          <a:blip xmlns:r="http://schemas.openxmlformats.org/officeDocument/2006/relationships" xmlns:a="http://schemas.openxmlformats.org/drawingml/2006/main" r:embed="R89b8274eb9ac453d">
+          <a:blip xmlns:r="http://schemas.openxmlformats.org/officeDocument/2006/relationships" xmlns:a="http://schemas.openxmlformats.org/drawingml/2006/main" r:embed="R2ab6efc2bab54862">
             <a:extLst>
               <a:ext uri="{96DAC541-7B7A-43D3-8B79-37D633B846F1}">
-                <asvg:svgBlip xmlns:asvg="http://schemas.microsoft.com/office/drawing/2016/SVG/main" r:embed="Rd8277dbebc4144b7"/>
+                <asvg:svgBlip xmlns:asvg="http://schemas.microsoft.com/office/drawing/2016/SVG/main" r:embed="Rbad2a3e82f424932"/>
               </a:ext>
             </a:extLst>
           </a:blip>
@@ -5321,10 +6145,10 @@
       </p:pic>
       <p:sp>
         <p:nvSpPr>
-          <p:cNvPr id="37" name="Molecular construction">
-            <a:extLst xmlns:a="http://schemas.openxmlformats.org/drawingml/2006/main">
-              <a:ext uri="{FF2B5EF4-FFF2-40B4-BE49-F238E27FC236}">
-                <a16:creationId xmlns:a16="http://schemas.microsoft.com/office/drawing/2014/main" id="{63E4DD47-C636-4639-96F0-434A108271EC}"/>
+          <p:cNvPr id="40" name="Molecular construction">
+            <a:extLst xmlns:a="http://schemas.openxmlformats.org/drawingml/2006/main">
+              <a:ext uri="{FF2B5EF4-FFF2-40B4-BE49-F238E27FC236}">
+                <a16:creationId xmlns:a16="http://schemas.microsoft.com/office/drawing/2014/main" id="{CBBA6B0D-D27E-4617-952D-C4F946FCA70E}"/>
               </a:ext>
             </a:extLst>
           </p:cNvPr>
@@ -5388,10 +6212,10 @@
       </p:sp>
       <p:sp>
         <p:nvSpPr>
-          <p:cNvPr id="38" name="DNA / RNA synthesis, enzymes">
-            <a:extLst xmlns:a="http://schemas.openxmlformats.org/drawingml/2006/main">
-              <a:ext uri="{FF2B5EF4-FFF2-40B4-BE49-F238E27FC236}">
-                <a16:creationId xmlns:a16="http://schemas.microsoft.com/office/drawing/2014/main" id="{CB64AF39-81DF-4C0D-80BE-E9945D9A3610}"/>
+          <p:cNvPr id="41" name="DNA / RNA synthesis, enzymes">
+            <a:extLst xmlns:a="http://schemas.openxmlformats.org/drawingml/2006/main">
+              <a:ext uri="{FF2B5EF4-FFF2-40B4-BE49-F238E27FC236}">
+                <a16:creationId xmlns:a16="http://schemas.microsoft.com/office/drawing/2014/main" id="{BA1D1A26-6674-4BDE-BD08-42E03B1D3A7B}"/>
               </a:ext>
             </a:extLst>
           </p:cNvPr>
@@ -5479,10 +6303,10 @@
       </p:sp>
       <p:sp>
         <p:nvSpPr>
-          <p:cNvPr id="39" name="RMB 1.33bn">
-            <a:extLst xmlns:a="http://schemas.openxmlformats.org/drawingml/2006/main">
-              <a:ext uri="{FF2B5EF4-FFF2-40B4-BE49-F238E27FC236}">
-                <a16:creationId xmlns:a16="http://schemas.microsoft.com/office/drawing/2014/main" id="{656DD2E5-1767-4D83-A293-797496549523}"/>
+          <p:cNvPr id="42" name="RMB 1.33bn">
+            <a:extLst xmlns:a="http://schemas.openxmlformats.org/drawingml/2006/main">
+              <a:ext uri="{FF2B5EF4-FFF2-40B4-BE49-F238E27FC236}">
+                <a16:creationId xmlns:a16="http://schemas.microsoft.com/office/drawing/2014/main" id="{67CA4957-9474-49C5-AB17-6E25F4C5EBCE}"/>
               </a:ext>
             </a:extLst>
           </p:cNvPr>
@@ -5546,10 +6370,10 @@
       </p:sp>
       <p:sp>
         <p:nvSpPr>
-          <p:cNvPr id="40" name="China • 2025 • DNA synthesis services [1]">
-            <a:extLst xmlns:a="http://schemas.openxmlformats.org/drawingml/2006/main">
-              <a:ext uri="{FF2B5EF4-FFF2-40B4-BE49-F238E27FC236}">
-                <a16:creationId xmlns:a16="http://schemas.microsoft.com/office/drawing/2014/main" id="{0D08DFEC-677D-4951-96AF-4D7837A7E56A}"/>
+          <p:cNvPr id="43" name="China • 2025 • DNA synthesis services [1]">
+            <a:extLst xmlns:a="http://schemas.openxmlformats.org/drawingml/2006/main">
+              <a:ext uri="{FF2B5EF4-FFF2-40B4-BE49-F238E27FC236}">
+                <a16:creationId xmlns:a16="http://schemas.microsoft.com/office/drawing/2014/main" id="{CCB4F1A9-9B41-402E-8AC6-4860ADC6252A}"/>
               </a:ext>
             </a:extLst>
           </p:cNvPr>
@@ -5613,10 +6437,10 @@
       </p:sp>
       <p:sp>
         <p:nvSpPr>
-          <p:cNvPr id="41" name="Oligos + long fragments only">
-            <a:extLst xmlns:a="http://schemas.openxmlformats.org/drawingml/2006/main">
-              <a:ext uri="{FF2B5EF4-FFF2-40B4-BE49-F238E27FC236}">
-                <a16:creationId xmlns:a16="http://schemas.microsoft.com/office/drawing/2014/main" id="{3A9A03E6-6143-4C2E-8078-BC07F62C2744}"/>
+          <p:cNvPr id="44" name="Oligos + long fragments only">
+            <a:extLst xmlns:a="http://schemas.openxmlformats.org/drawingml/2006/main">
+              <a:ext uri="{FF2B5EF4-FFF2-40B4-BE49-F238E27FC236}">
+                <a16:creationId xmlns:a16="http://schemas.microsoft.com/office/drawing/2014/main" id="{1FD19D9A-6658-49FC-9D8A-B52DF2D1C785}"/>
               </a:ext>
             </a:extLst>
           </p:cNvPr>
@@ -5680,10 +6504,10 @@
       </p:sp>
       <p:pic>
         <p:nvPicPr>
-          <p:cNvPr id="42" name="">
-            <a:extLst xmlns:a="http://schemas.openxmlformats.org/drawingml/2006/main">
-              <a:ext uri="{FF2B5EF4-FFF2-40B4-BE49-F238E27FC236}">
-                <a16:creationId xmlns:a16="http://schemas.microsoft.com/office/drawing/2014/main" id="{B5DB6EBF-6EA3-42B6-8E15-ACF580B5C114}"/>
+          <p:cNvPr id="45" name="">
+            <a:extLst xmlns:a="http://schemas.openxmlformats.org/drawingml/2006/main">
+              <a:ext uri="{FF2B5EF4-FFF2-40B4-BE49-F238E27FC236}">
+                <a16:creationId xmlns:a16="http://schemas.microsoft.com/office/drawing/2014/main" id="{4404E0D8-8737-4CEE-BB21-72407762FFF9}"/>
               </a:ext>
             </a:extLst>
           </p:cNvPr>
@@ -5693,7 +6517,7 @@
           <p:nvPr/>
         </p:nvPicPr>
         <p:blipFill>
-          <a:blip xmlns:r="http://schemas.openxmlformats.org/officeDocument/2006/relationships" xmlns:a="http://schemas.openxmlformats.org/drawingml/2006/main" r:embed="Rbb26a54706d34495"/>
+          <a:blip xmlns:r="http://schemas.openxmlformats.org/officeDocument/2006/relationships" xmlns:a="http://schemas.openxmlformats.org/drawingml/2006/main" r:embed="R63f1c4be67624dfb"/>
           <a:stretch xmlns:a="http://schemas.openxmlformats.org/drawingml/2006/main"/>
         </p:blipFill>
         <p:spPr>
@@ -5708,10 +6532,10 @@
       </p:pic>
       <p:pic>
         <p:nvPicPr>
-          <p:cNvPr id="43" name="">
-            <a:extLst xmlns:a="http://schemas.openxmlformats.org/drawingml/2006/main">
-              <a:ext uri="{FF2B5EF4-FFF2-40B4-BE49-F238E27FC236}">
-                <a16:creationId xmlns:a16="http://schemas.microsoft.com/office/drawing/2014/main" id="{FF3C6951-2F8F-42F6-9FD7-89096F215B09}"/>
+          <p:cNvPr id="46" name="">
+            <a:extLst xmlns:a="http://schemas.openxmlformats.org/drawingml/2006/main">
+              <a:ext uri="{FF2B5EF4-FFF2-40B4-BE49-F238E27FC236}">
+                <a16:creationId xmlns:a16="http://schemas.microsoft.com/office/drawing/2014/main" id="{CD7F6DE6-1D7B-4BCD-A2AA-CEE9DB9D9D54}"/>
               </a:ext>
             </a:extLst>
           </p:cNvPr>
@@ -5721,7 +6545,7 @@
           <p:nvPr/>
         </p:nvPicPr>
         <p:blipFill>
-          <a:blip xmlns:r="http://schemas.openxmlformats.org/officeDocument/2006/relationships" xmlns:a="http://schemas.openxmlformats.org/drawingml/2006/main" r:embed="R43801d5b5c014741"/>
+          <a:blip xmlns:r="http://schemas.openxmlformats.org/officeDocument/2006/relationships" xmlns:a="http://schemas.openxmlformats.org/drawingml/2006/main" r:embed="Rb8bf206b499945d7"/>
           <a:stretch xmlns:a="http://schemas.openxmlformats.org/drawingml/2006/main"/>
         </p:blipFill>
         <p:spPr>
@@ -5736,10 +6560,10 @@
       </p:pic>
       <p:sp>
         <p:nvSpPr>
-          <p:cNvPr id="44" name="CHINA / HK LISTINGS">
-            <a:extLst xmlns:a="http://schemas.openxmlformats.org/drawingml/2006/main">
-              <a:ext uri="{FF2B5EF4-FFF2-40B4-BE49-F238E27FC236}">
-                <a16:creationId xmlns:a16="http://schemas.microsoft.com/office/drawing/2014/main" id="{22D9E52A-D695-4E72-A3C8-BB2B9EB3D8FF}"/>
+          <p:cNvPr id="47" name="CHINA / HK LISTINGS">
+            <a:extLst xmlns:a="http://schemas.openxmlformats.org/drawingml/2006/main">
+              <a:ext uri="{FF2B5EF4-FFF2-40B4-BE49-F238E27FC236}">
+                <a16:creationId xmlns:a16="http://schemas.microsoft.com/office/drawing/2014/main" id="{7DE58CCB-6A15-45BF-9D5F-56500CA4F8B1}"/>
               </a:ext>
             </a:extLst>
           </p:cNvPr>
@@ -5803,10 +6627,10 @@
       </p:sp>
       <p:sp>
         <p:nvSpPr>
-          <p:cNvPr id="45" name="US LISTINGS / PARENTS">
-            <a:extLst xmlns:a="http://schemas.openxmlformats.org/drawingml/2006/main">
-              <a:ext uri="{FF2B5EF4-FFF2-40B4-BE49-F238E27FC236}">
-                <a16:creationId xmlns:a16="http://schemas.microsoft.com/office/drawing/2014/main" id="{3E7F2547-C497-475E-A859-BD4A8D2626FC}"/>
+          <p:cNvPr id="48" name="US LISTINGS / PARENTS">
+            <a:extLst xmlns:a="http://schemas.openxmlformats.org/drawingml/2006/main">
+              <a:ext uri="{FF2B5EF4-FFF2-40B4-BE49-F238E27FC236}">
+                <a16:creationId xmlns:a16="http://schemas.microsoft.com/office/drawing/2014/main" id="{9A97F0E9-C2BE-4C7B-9C70-6F664D8B99C6}"/>
               </a:ext>
             </a:extLst>
           </p:cNvPr>
@@ -5870,10 +6694,10 @@
       </p:sp>
       <p:sp>
         <p:nvSpPr>
-          <p:cNvPr id="46" name="GenScript · 1548.HK">
-            <a:extLst xmlns:a="http://schemas.openxmlformats.org/drawingml/2006/main">
-              <a:ext uri="{FF2B5EF4-FFF2-40B4-BE49-F238E27FC236}">
-                <a16:creationId xmlns:a16="http://schemas.microsoft.com/office/drawing/2014/main" id="{CBB04C80-46D9-4326-ABDF-2417DE48871E}"/>
+          <p:cNvPr id="49" name="GenScript · 1548.HK">
+            <a:extLst xmlns:a="http://schemas.openxmlformats.org/drawingml/2006/main">
+              <a:ext uri="{FF2B5EF4-FFF2-40B4-BE49-F238E27FC236}">
+                <a16:creationId xmlns:a16="http://schemas.microsoft.com/office/drawing/2014/main" id="{B084EC14-3616-40F5-8916-904C91060D75}"/>
               </a:ext>
             </a:extLst>
           </p:cNvPr>
@@ -5985,10 +6809,10 @@
       </p:sp>
       <p:sp>
         <p:nvSpPr>
-          <p:cNvPr id="47" name="Twist · TWST">
-            <a:extLst xmlns:a="http://schemas.openxmlformats.org/drawingml/2006/main">
-              <a:ext uri="{FF2B5EF4-FFF2-40B4-BE49-F238E27FC236}">
-                <a16:creationId xmlns:a16="http://schemas.microsoft.com/office/drawing/2014/main" id="{749D61CA-79B5-4A08-ACCC-8A42A7C745B0}"/>
+          <p:cNvPr id="50" name="Twist · TWST">
+            <a:extLst xmlns:a="http://schemas.openxmlformats.org/drawingml/2006/main">
+              <a:ext uri="{FF2B5EF4-FFF2-40B4-BE49-F238E27FC236}">
+                <a16:creationId xmlns:a16="http://schemas.microsoft.com/office/drawing/2014/main" id="{BB053420-8762-4898-A34E-C713BD352882}"/>
               </a:ext>
             </a:extLst>
           </p:cNvPr>
@@ -6076,10 +6900,10 @@
       </p:sp>
       <p:sp>
         <p:nvSpPr>
-          <p:cNvPr id="48" name="">
-            <a:extLst xmlns:a="http://schemas.openxmlformats.org/drawingml/2006/main">
-              <a:ext uri="{FF2B5EF4-FFF2-40B4-BE49-F238E27FC236}">
-                <a16:creationId xmlns:a16="http://schemas.microsoft.com/office/drawing/2014/main" id="{66326342-1666-480B-BF8F-7FCBE9468284}"/>
+          <p:cNvPr id="51" name="">
+            <a:extLst xmlns:a="http://schemas.openxmlformats.org/drawingml/2006/main">
+              <a:ext uri="{FF2B5EF4-FFF2-40B4-BE49-F238E27FC236}">
+                <a16:creationId xmlns:a16="http://schemas.microsoft.com/office/drawing/2014/main" id="{B78FEF24-C622-4673-BE5F-A783A2714A53}"/>
               </a:ext>
             </a:extLst>
           </p:cNvPr>
@@ -6110,10 +6934,10 @@
       </p:sp>
       <p:pic>
         <p:nvPicPr>
-          <p:cNvPr id="49" name="">
-            <a:extLst xmlns:a="http://schemas.openxmlformats.org/drawingml/2006/main">
-              <a:ext uri="{FF2B5EF4-FFF2-40B4-BE49-F238E27FC236}">
-                <a16:creationId xmlns:a16="http://schemas.microsoft.com/office/drawing/2014/main" id="{6C3C5E09-BCFA-4C1F-80B5-919EBC13943A}"/>
+          <p:cNvPr id="52" name="">
+            <a:extLst xmlns:a="http://schemas.openxmlformats.org/drawingml/2006/main">
+              <a:ext uri="{FF2B5EF4-FFF2-40B4-BE49-F238E27FC236}">
+                <a16:creationId xmlns:a16="http://schemas.microsoft.com/office/drawing/2014/main" id="{A8E5CC3D-CD92-4AA5-A2C8-40583337ED7F}"/>
               </a:ext>
             </a:extLst>
           </p:cNvPr>
@@ -6123,10 +6947,10 @@
           <p:nvPr/>
         </p:nvPicPr>
         <p:blipFill>
-          <a:blip xmlns:r="http://schemas.openxmlformats.org/officeDocument/2006/relationships" xmlns:a="http://schemas.openxmlformats.org/drawingml/2006/main" r:embed="Rbb26a54706d34495">
+          <a:blip xmlns:r="http://schemas.openxmlformats.org/officeDocument/2006/relationships" xmlns:a="http://schemas.openxmlformats.org/drawingml/2006/main" r:embed="R63f1c4be67624dfb">
             <a:extLst>
               <a:ext uri="{96DAC541-7B7A-43D3-8B79-37D633B846F1}">
-                <asvg:svgBlip xmlns:asvg="http://schemas.microsoft.com/office/drawing/2016/SVG/main" r:embed="Rf5757dcd54144e1c"/>
+                <asvg:svgBlip xmlns:asvg="http://schemas.microsoft.com/office/drawing/2016/SVG/main" r:embed="Rda04494aa6694f90"/>
               </a:ext>
             </a:extLst>
           </a:blip>
@@ -6144,10 +6968,10 @@
       </p:pic>
       <p:sp>
         <p:nvSpPr>
-          <p:cNvPr id="50" name="Protein &amp; functional assays">
-            <a:extLst xmlns:a="http://schemas.openxmlformats.org/drawingml/2006/main">
-              <a:ext uri="{FF2B5EF4-FFF2-40B4-BE49-F238E27FC236}">
-                <a16:creationId xmlns:a16="http://schemas.microsoft.com/office/drawing/2014/main" id="{19F07BF1-281C-46C7-B424-CCAF94491867}"/>
+          <p:cNvPr id="53" name="Protein &amp; functional assays">
+            <a:extLst xmlns:a="http://schemas.openxmlformats.org/drawingml/2006/main">
+              <a:ext uri="{FF2B5EF4-FFF2-40B4-BE49-F238E27FC236}">
+                <a16:creationId xmlns:a16="http://schemas.microsoft.com/office/drawing/2014/main" id="{F064DA7E-2079-4A00-96CE-286F9B5805A4}"/>
               </a:ext>
             </a:extLst>
           </p:cNvPr>
@@ -6211,10 +7035,10 @@
       </p:sp>
       <p:sp>
         <p:nvSpPr>
-          <p:cNvPr id="51" name="Recombinant proteins, antibodies">
-            <a:extLst xmlns:a="http://schemas.openxmlformats.org/drawingml/2006/main">
-              <a:ext uri="{FF2B5EF4-FFF2-40B4-BE49-F238E27FC236}">
-                <a16:creationId xmlns:a16="http://schemas.microsoft.com/office/drawing/2014/main" id="{8BC10CC2-37BE-4256-B6F5-9A92053643FB}"/>
+          <p:cNvPr id="54" name="Recombinant proteins, antibodies">
+            <a:extLst xmlns:a="http://schemas.openxmlformats.org/drawingml/2006/main">
+              <a:ext uri="{FF2B5EF4-FFF2-40B4-BE49-F238E27FC236}">
+                <a16:creationId xmlns:a16="http://schemas.microsoft.com/office/drawing/2014/main" id="{E9067404-0630-4992-BFD6-5173EFE01BC4}"/>
               </a:ext>
             </a:extLst>
           </p:cNvPr>
@@ -6302,10 +7126,10 @@
       </p:sp>
       <p:sp>
         <p:nvSpPr>
-          <p:cNvPr id="52" name="US$3.5bn">
-            <a:extLst xmlns:a="http://schemas.openxmlformats.org/drawingml/2006/main">
-              <a:ext uri="{FF2B5EF4-FFF2-40B4-BE49-F238E27FC236}">
-                <a16:creationId xmlns:a16="http://schemas.microsoft.com/office/drawing/2014/main" id="{1A594EFA-DCD8-42B4-8193-4E8F3D73B4B3}"/>
+          <p:cNvPr id="55" name="US$3.5bn">
+            <a:extLst xmlns:a="http://schemas.openxmlformats.org/drawingml/2006/main">
+              <a:ext uri="{FF2B5EF4-FFF2-40B4-BE49-F238E27FC236}">
+                <a16:creationId xmlns:a16="http://schemas.microsoft.com/office/drawing/2014/main" id="{726EA5B9-1A04-46C8-BAEB-0AE29F70776A}"/>
               </a:ext>
             </a:extLst>
           </p:cNvPr>
@@ -6369,10 +7193,10 @@
       </p:sp>
       <p:sp>
         <p:nvSpPr>
-          <p:cNvPr id="53" name="Global • 2025 • research proteins [2]">
-            <a:extLst xmlns:a="http://schemas.openxmlformats.org/drawingml/2006/main">
-              <a:ext uri="{FF2B5EF4-FFF2-40B4-BE49-F238E27FC236}">
-                <a16:creationId xmlns:a16="http://schemas.microsoft.com/office/drawing/2014/main" id="{628A3EC5-841C-498A-9F81-9238D4EFEEC0}"/>
+          <p:cNvPr id="56" name="Global · 2025 · F&amp;S RUO proteins [2]">
+            <a:extLst xmlns:a="http://schemas.openxmlformats.org/drawingml/2006/main">
+              <a:ext uri="{FF2B5EF4-FFF2-40B4-BE49-F238E27FC236}">
+                <a16:creationId xmlns:a16="http://schemas.microsoft.com/office/drawing/2014/main" id="{3692FCB2-C5A3-4E72-9D7A-2040A9D02218}"/>
               </a:ext>
             </a:extLst>
           </p:cNvPr>
@@ -6429,17 +7253,17 @@
                 <a:ea typeface="Arial"/>
                 <a:cs typeface="Arial"/>
               </a:rPr>
-              <a:t>Global • 2025 • research proteins [2]</a:t>
+              <a:t>Global · 2025 · F&amp;S RUO proteins [2]</a:t>
             </a:r>
           </a:p>
         </p:txBody>
       </p:sp>
       <p:sp>
         <p:nvSpPr>
-          <p:cNvPr id="54" name="China: ~US$0.4bn • RUO scope">
-            <a:extLst xmlns:a="http://schemas.openxmlformats.org/drawingml/2006/main">
-              <a:ext uri="{FF2B5EF4-FFF2-40B4-BE49-F238E27FC236}">
-                <a16:creationId xmlns:a16="http://schemas.microsoft.com/office/drawing/2014/main" id="{78195C79-A4B0-4B6B-A972-40B68E956597}"/>
+          <p:cNvPr id="57" name="Issuer-commissioned; estimate disputed">
+            <a:extLst xmlns:a="http://schemas.openxmlformats.org/drawingml/2006/main">
+              <a:ext uri="{FF2B5EF4-FFF2-40B4-BE49-F238E27FC236}">
+                <a16:creationId xmlns:a16="http://schemas.microsoft.com/office/drawing/2014/main" id="{AAB1DB81-85A9-4D03-A891-2F9835CCBE7A}"/>
               </a:ext>
             </a:extLst>
           </p:cNvPr>
@@ -6496,17 +7320,17 @@
                 <a:ea typeface="Arial"/>
                 <a:cs typeface="Arial"/>
               </a:rPr>
-              <a:t>China: ~US$0.4bn • RUO scope</a:t>
+              <a:t>Issuer-commissioned; estimate disputed</a:t>
             </a:r>
           </a:p>
         </p:txBody>
       </p:sp>
       <p:pic>
         <p:nvPicPr>
-          <p:cNvPr id="55" name="">
-            <a:extLst xmlns:a="http://schemas.openxmlformats.org/drawingml/2006/main">
-              <a:ext uri="{FF2B5EF4-FFF2-40B4-BE49-F238E27FC236}">
-                <a16:creationId xmlns:a16="http://schemas.microsoft.com/office/drawing/2014/main" id="{284C8592-443D-48A2-94DD-18B53B0C1B8A}"/>
+          <p:cNvPr id="58" name="">
+            <a:extLst xmlns:a="http://schemas.openxmlformats.org/drawingml/2006/main">
+              <a:ext uri="{FF2B5EF4-FFF2-40B4-BE49-F238E27FC236}">
+                <a16:creationId xmlns:a16="http://schemas.microsoft.com/office/drawing/2014/main" id="{F58575BB-C16F-4D13-AA68-1C8A39E8BF7F}"/>
               </a:ext>
             </a:extLst>
           </p:cNvPr>
@@ -6516,7 +7340,7 @@
           <p:nvPr/>
         </p:nvPicPr>
         <p:blipFill>
-          <a:blip xmlns:r="http://schemas.openxmlformats.org/officeDocument/2006/relationships" xmlns:a="http://schemas.openxmlformats.org/drawingml/2006/main" r:embed="R2b52523d4e394751"/>
+          <a:blip xmlns:r="http://schemas.openxmlformats.org/officeDocument/2006/relationships" xmlns:a="http://schemas.openxmlformats.org/drawingml/2006/main" r:embed="Rf7feec6d82e14abb"/>
           <a:stretch xmlns:a="http://schemas.openxmlformats.org/drawingml/2006/main"/>
         </p:blipFill>
         <p:spPr>
@@ -6531,10 +7355,10 @@
       </p:pic>
       <p:sp>
         <p:nvSpPr>
-          <p:cNvPr id="56" name="CHINA / HK LISTINGS">
-            <a:extLst xmlns:a="http://schemas.openxmlformats.org/drawingml/2006/main">
-              <a:ext uri="{FF2B5EF4-FFF2-40B4-BE49-F238E27FC236}">
-                <a16:creationId xmlns:a16="http://schemas.microsoft.com/office/drawing/2014/main" id="{09E32DDF-F760-4F7A-A790-D506A5C0F214}"/>
+          <p:cNvPr id="59" name="CHINA / HK LISTINGS">
+            <a:extLst xmlns:a="http://schemas.openxmlformats.org/drawingml/2006/main">
+              <a:ext uri="{FF2B5EF4-FFF2-40B4-BE49-F238E27FC236}">
+                <a16:creationId xmlns:a16="http://schemas.microsoft.com/office/drawing/2014/main" id="{8220878F-5715-4DCD-832C-66484F835004}"/>
               </a:ext>
             </a:extLst>
           </p:cNvPr>
@@ -6598,10 +7422,10 @@
       </p:sp>
       <p:sp>
         <p:nvSpPr>
-          <p:cNvPr id="57" name="US LISTINGS / PARENTS">
-            <a:extLst xmlns:a="http://schemas.openxmlformats.org/drawingml/2006/main">
-              <a:ext uri="{FF2B5EF4-FFF2-40B4-BE49-F238E27FC236}">
-                <a16:creationId xmlns:a16="http://schemas.microsoft.com/office/drawing/2014/main" id="{6B0CF5DB-542C-4622-8FB1-A0611D2AFF3E}"/>
+          <p:cNvPr id="60" name="US LISTINGS / PARENTS">
+            <a:extLst xmlns:a="http://schemas.openxmlformats.org/drawingml/2006/main">
+              <a:ext uri="{FF2B5EF4-FFF2-40B4-BE49-F238E27FC236}">
+                <a16:creationId xmlns:a16="http://schemas.microsoft.com/office/drawing/2014/main" id="{3669D5B1-8B35-4B42-B4D4-3227A6A1B633}"/>
               </a:ext>
             </a:extLst>
           </p:cNvPr>
@@ -6665,10 +7489,10 @@
       </p:sp>
       <p:sp>
         <p:nvSpPr>
-          <p:cNvPr id="58" name="ACRO · 301080.SZ">
-            <a:extLst xmlns:a="http://schemas.openxmlformats.org/drawingml/2006/main">
-              <a:ext uri="{FF2B5EF4-FFF2-40B4-BE49-F238E27FC236}">
-                <a16:creationId xmlns:a16="http://schemas.microsoft.com/office/drawing/2014/main" id="{B11AF569-25B3-47AC-A298-525096A8EBD9}"/>
+          <p:cNvPr id="61" name="ACRO · 301080.SZ">
+            <a:extLst xmlns:a="http://schemas.openxmlformats.org/drawingml/2006/main">
+              <a:ext uri="{FF2B5EF4-FFF2-40B4-BE49-F238E27FC236}">
+                <a16:creationId xmlns:a16="http://schemas.microsoft.com/office/drawing/2014/main" id="{83EE79CA-1EC9-446A-9A28-BEFD585379AF}"/>
               </a:ext>
             </a:extLst>
           </p:cNvPr>
@@ -6756,10 +7580,10 @@
       </p:sp>
       <p:sp>
         <p:nvSpPr>
-          <p:cNvPr id="59" name="Bio-Techne · TECH">
-            <a:extLst xmlns:a="http://schemas.openxmlformats.org/drawingml/2006/main">
-              <a:ext uri="{FF2B5EF4-FFF2-40B4-BE49-F238E27FC236}">
-                <a16:creationId xmlns:a16="http://schemas.microsoft.com/office/drawing/2014/main" id="{6C89002A-B4C6-4302-9647-163960384B9F}"/>
+          <p:cNvPr id="62" name="Bio-Techne · TECH">
+            <a:extLst xmlns:a="http://schemas.openxmlformats.org/drawingml/2006/main">
+              <a:ext uri="{FF2B5EF4-FFF2-40B4-BE49-F238E27FC236}">
+                <a16:creationId xmlns:a16="http://schemas.microsoft.com/office/drawing/2014/main" id="{E4695AB0-52BC-42A8-AA5C-3AA87874421E}"/>
               </a:ext>
             </a:extLst>
           </p:cNvPr>
@@ -6847,10 +7671,10 @@
       </p:sp>
       <p:sp>
         <p:nvSpPr>
-          <p:cNvPr id="60" name="">
-            <a:extLst xmlns:a="http://schemas.openxmlformats.org/drawingml/2006/main">
-              <a:ext uri="{FF2B5EF4-FFF2-40B4-BE49-F238E27FC236}">
-                <a16:creationId xmlns:a16="http://schemas.microsoft.com/office/drawing/2014/main" id="{7919EC2B-E1D6-434F-A524-F82B19109B6A}"/>
+          <p:cNvPr id="63" name="">
+            <a:extLst xmlns:a="http://schemas.openxmlformats.org/drawingml/2006/main">
+              <a:ext uri="{FF2B5EF4-FFF2-40B4-BE49-F238E27FC236}">
+                <a16:creationId xmlns:a16="http://schemas.microsoft.com/office/drawing/2014/main" id="{23F6E543-E380-4A6F-AC56-8D65502CE92C}"/>
               </a:ext>
             </a:extLst>
           </p:cNvPr>
@@ -6881,10 +7705,10 @@
       </p:sp>
       <p:pic>
         <p:nvPicPr>
-          <p:cNvPr id="61" name="">
-            <a:extLst xmlns:a="http://schemas.openxmlformats.org/drawingml/2006/main">
-              <a:ext uri="{FF2B5EF4-FFF2-40B4-BE49-F238E27FC236}">
-                <a16:creationId xmlns:a16="http://schemas.microsoft.com/office/drawing/2014/main" id="{C761F8E9-C891-4D87-A7E1-BF8A7F1B6761}"/>
+          <p:cNvPr id="64" name="">
+            <a:extLst xmlns:a="http://schemas.openxmlformats.org/drawingml/2006/main">
+              <a:ext uri="{FF2B5EF4-FFF2-40B4-BE49-F238E27FC236}">
+                <a16:creationId xmlns:a16="http://schemas.microsoft.com/office/drawing/2014/main" id="{F97678D8-2FCA-4DAA-B199-A493133A1E1F}"/>
               </a:ext>
             </a:extLst>
           </p:cNvPr>
@@ -6894,10 +7718,10 @@
           <p:nvPr/>
         </p:nvPicPr>
         <p:blipFill>
-          <a:blip xmlns:r="http://schemas.openxmlformats.org/officeDocument/2006/relationships" xmlns:a="http://schemas.openxmlformats.org/drawingml/2006/main" r:embed="R43801d5b5c014741">
+          <a:blip xmlns:r="http://schemas.openxmlformats.org/officeDocument/2006/relationships" xmlns:a="http://schemas.openxmlformats.org/drawingml/2006/main" r:embed="Rb8bf206b499945d7">
             <a:extLst>
               <a:ext uri="{96DAC541-7B7A-43D3-8B79-37D633B846F1}">
-                <asvg:svgBlip xmlns:asvg="http://schemas.microsoft.com/office/drawing/2016/SVG/main" r:embed="R4e548d0e873148a0"/>
+                <asvg:svgBlip xmlns:asvg="http://schemas.microsoft.com/office/drawing/2016/SVG/main" r:embed="Rde9816056d754b77"/>
               </a:ext>
             </a:extLst>
           </a:blip>
@@ -6915,10 +7739,10 @@
       </p:pic>
       <p:sp>
         <p:nvSpPr>
-          <p:cNvPr id="62" name="Cells &amp; culture systems">
-            <a:extLst xmlns:a="http://schemas.openxmlformats.org/drawingml/2006/main">
-              <a:ext uri="{FF2B5EF4-FFF2-40B4-BE49-F238E27FC236}">
-                <a16:creationId xmlns:a16="http://schemas.microsoft.com/office/drawing/2014/main" id="{8CCE68B7-F40F-4FDF-8348-85CE8BE92F05}"/>
+          <p:cNvPr id="65" name="Cells &amp; culture systems">
+            <a:extLst xmlns:a="http://schemas.openxmlformats.org/drawingml/2006/main">
+              <a:ext uri="{FF2B5EF4-FFF2-40B4-BE49-F238E27FC236}">
+                <a16:creationId xmlns:a16="http://schemas.microsoft.com/office/drawing/2014/main" id="{B428326F-DAF8-4BA8-9D79-CCA77CAEC2C6}"/>
               </a:ext>
             </a:extLst>
           </p:cNvPr>
@@ -6982,10 +7806,10 @@
       </p:sp>
       <p:sp>
         <p:nvSpPr>
-          <p:cNvPr id="63" name="Cell models, media, feeds">
-            <a:extLst xmlns:a="http://schemas.openxmlformats.org/drawingml/2006/main">
-              <a:ext uri="{FF2B5EF4-FFF2-40B4-BE49-F238E27FC236}">
-                <a16:creationId xmlns:a16="http://schemas.microsoft.com/office/drawing/2014/main" id="{83FB76BD-1865-4C08-B1AE-9AB8E1A65F2B}"/>
+          <p:cNvPr id="66" name="Cell models, media, feeds">
+            <a:extLst xmlns:a="http://schemas.openxmlformats.org/drawingml/2006/main">
+              <a:ext uri="{FF2B5EF4-FFF2-40B4-BE49-F238E27FC236}">
+                <a16:creationId xmlns:a16="http://schemas.microsoft.com/office/drawing/2014/main" id="{7643540B-2F46-4EC3-B4C0-52C0E4288586}"/>
               </a:ext>
             </a:extLst>
           </p:cNvPr>
@@ -7073,10 +7897,10 @@
       </p:sp>
       <p:sp>
         <p:nvSpPr>
-          <p:cNvPr id="64" name="US$323.5m*">
-            <a:extLst xmlns:a="http://schemas.openxmlformats.org/drawingml/2006/main">
-              <a:ext uri="{FF2B5EF4-FFF2-40B4-BE49-F238E27FC236}">
-                <a16:creationId xmlns:a16="http://schemas.microsoft.com/office/drawing/2014/main" id="{E700A98A-317C-4AD5-BAE2-43942F325998}"/>
+          <p:cNvPr id="67" name="Source pending">
+            <a:extLst xmlns:a="http://schemas.openxmlformats.org/drawingml/2006/main">
+              <a:ext uri="{FF2B5EF4-FFF2-40B4-BE49-F238E27FC236}">
+                <a16:creationId xmlns:a16="http://schemas.microsoft.com/office/drawing/2014/main" id="{BCEF9A56-A956-4BE3-84D6-A7D88266DDF7}"/>
               </a:ext>
             </a:extLst>
           </p:cNvPr>
@@ -7102,7 +7926,7 @@
           <a:bodyPr xmlns:a="http://schemas.openxmlformats.org/drawingml/2006/main" wrap="none" lIns="0" tIns="0" rIns="0" bIns="0" anchor="t"/>
           <a:lstStyle xmlns:a="http://schemas.openxmlformats.org/drawingml/2006/main">
             <a:defPPr algn="l">
-              <a:defRPr sz="2220" b="1">
+              <a:defRPr sz="1860" b="1">
                 <a:solidFill>
                   <a:srgbClr val="00355F"/>
                 </a:solidFill>
@@ -7115,7 +7939,7 @@
           <a:p xmlns:a="http://schemas.openxmlformats.org/drawingml/2006/main">
             <a:pPr algn="l">
               <a:buNone/>
-              <a:defRPr sz="2220" b="1">
+              <a:defRPr sz="1860" b="1">
                 <a:solidFill>
                   <a:srgbClr val="00355F"/>
                 </a:solidFill>
@@ -7125,7 +7949,7 @@
               </a:defRPr>
             </a:pPr>
             <a:r>
-              <a:rPr sz="2220" b="1">
+              <a:rPr sz="1860" b="1">
                 <a:solidFill>
                   <a:srgbClr val="00355F"/>
                 </a:solidFill>
@@ -7133,17 +7957,17 @@
                 <a:ea typeface="Arial"/>
                 <a:cs typeface="Arial"/>
               </a:rPr>
-              <a:t>US$323.5m*</a:t>
+              <a:t>Source pending</a:t>
             </a:r>
           </a:p>
         </p:txBody>
       </p:sp>
       <p:sp>
         <p:nvSpPr>
-          <p:cNvPr id="65" name="China • 2024 • bioprocess media [3]">
-            <a:extLst xmlns:a="http://schemas.openxmlformats.org/drawingml/2006/main">
-              <a:ext uri="{FF2B5EF4-FFF2-40B4-BE49-F238E27FC236}">
-                <a16:creationId xmlns:a16="http://schemas.microsoft.com/office/drawing/2014/main" id="{4EB8285D-36A2-431F-A27D-804232175103}"/>
+          <p:cNvPr id="68" name="China • 2024 • bioprocess media [3]">
+            <a:extLst xmlns:a="http://schemas.openxmlformats.org/drawingml/2006/main">
+              <a:ext uri="{FF2B5EF4-FFF2-40B4-BE49-F238E27FC236}">
+                <a16:creationId xmlns:a16="http://schemas.microsoft.com/office/drawing/2014/main" id="{AA1B66AE-744B-4B01-9FE0-4DA1B57B96BC}"/>
               </a:ext>
             </a:extLst>
           </p:cNvPr>
@@ -7207,10 +8031,10 @@
       </p:sp>
       <p:sp>
         <p:nvSpPr>
-          <p:cNvPr id="66" name="Selected media anchor; not all cell tools">
-            <a:extLst xmlns:a="http://schemas.openxmlformats.org/drawingml/2006/main">
-              <a:ext uri="{FF2B5EF4-FFF2-40B4-BE49-F238E27FC236}">
-                <a16:creationId xmlns:a16="http://schemas.microsoft.com/office/drawing/2014/main" id="{637F147D-F694-416F-AD8D-B3578E166675}"/>
+          <p:cNvPr id="69" name="Original filing unavailable; TAM withheld">
+            <a:extLst xmlns:a="http://schemas.openxmlformats.org/drawingml/2006/main">
+              <a:ext uri="{FF2B5EF4-FFF2-40B4-BE49-F238E27FC236}">
+                <a16:creationId xmlns:a16="http://schemas.microsoft.com/office/drawing/2014/main" id="{A2D51D92-EE76-4441-A26C-77EDE259A7D6}"/>
               </a:ext>
             </a:extLst>
           </p:cNvPr>
@@ -7267,17 +8091,17 @@
                 <a:ea typeface="Arial"/>
                 <a:cs typeface="Arial"/>
               </a:rPr>
-              <a:t>Selected media anchor; not all cell tools</a:t>
+              <a:t>Original filing unavailable; TAM withheld</a:t>
             </a:r>
           </a:p>
         </p:txBody>
       </p:sp>
       <p:sp>
         <p:nvSpPr>
-          <p:cNvPr id="67" name="Gibco / HyClone">
-            <a:extLst xmlns:a="http://schemas.openxmlformats.org/drawingml/2006/main">
-              <a:ext uri="{FF2B5EF4-FFF2-40B4-BE49-F238E27FC236}">
-                <a16:creationId xmlns:a16="http://schemas.microsoft.com/office/drawing/2014/main" id="{D50E4DF5-A743-4499-9556-5EC4327B949E}"/>
+          <p:cNvPr id="70" name="Gibco / HyClone">
+            <a:extLst xmlns:a="http://schemas.openxmlformats.org/drawingml/2006/main">
+              <a:ext uri="{FF2B5EF4-FFF2-40B4-BE49-F238E27FC236}">
+                <a16:creationId xmlns:a16="http://schemas.microsoft.com/office/drawing/2014/main" id="{AF4E173C-1D2E-4587-9A34-8589060B1E86}"/>
               </a:ext>
             </a:extLst>
           </p:cNvPr>
@@ -7341,10 +8165,10 @@
       </p:sp>
       <p:sp>
         <p:nvSpPr>
-          <p:cNvPr id="68" name="CHINA / HK LISTINGS">
-            <a:extLst xmlns:a="http://schemas.openxmlformats.org/drawingml/2006/main">
-              <a:ext uri="{FF2B5EF4-FFF2-40B4-BE49-F238E27FC236}">
-                <a16:creationId xmlns:a16="http://schemas.microsoft.com/office/drawing/2014/main" id="{F1DED9DC-0318-4C9F-8E95-902C46A18BE7}"/>
+          <p:cNvPr id="71" name="CHINA / HK LISTINGS">
+            <a:extLst xmlns:a="http://schemas.openxmlformats.org/drawingml/2006/main">
+              <a:ext uri="{FF2B5EF4-FFF2-40B4-BE49-F238E27FC236}">
+                <a16:creationId xmlns:a16="http://schemas.microsoft.com/office/drawing/2014/main" id="{72E3ED06-F7BF-4D44-B5F7-CD249BD65895}"/>
               </a:ext>
             </a:extLst>
           </p:cNvPr>
@@ -7408,10 +8232,10 @@
       </p:sp>
       <p:sp>
         <p:nvSpPr>
-          <p:cNvPr id="69" name="US LISTINGS / PARENTS">
-            <a:extLst xmlns:a="http://schemas.openxmlformats.org/drawingml/2006/main">
-              <a:ext uri="{FF2B5EF4-FFF2-40B4-BE49-F238E27FC236}">
-                <a16:creationId xmlns:a16="http://schemas.microsoft.com/office/drawing/2014/main" id="{2B82C810-10BD-4C11-81A9-B43152B1CD51}"/>
+          <p:cNvPr id="72" name="US LISTINGS / PARENTS">
+            <a:extLst xmlns:a="http://schemas.openxmlformats.org/drawingml/2006/main">
+              <a:ext uri="{FF2B5EF4-FFF2-40B4-BE49-F238E27FC236}">
+                <a16:creationId xmlns:a16="http://schemas.microsoft.com/office/drawing/2014/main" id="{5A388A9B-D379-4FC3-B7C1-C38918D78881}"/>
               </a:ext>
             </a:extLst>
           </p:cNvPr>
@@ -7475,10 +8299,10 @@
       </p:sp>
       <p:sp>
         <p:nvSpPr>
-          <p:cNvPr id="70" name="OPM · 688293.SH">
-            <a:extLst xmlns:a="http://schemas.openxmlformats.org/drawingml/2006/main">
-              <a:ext uri="{FF2B5EF4-FFF2-40B4-BE49-F238E27FC236}">
-                <a16:creationId xmlns:a16="http://schemas.microsoft.com/office/drawing/2014/main" id="{C245258C-A401-4AF8-BCF3-88980EC18229}"/>
+          <p:cNvPr id="73" name="OPM · 688293.SH">
+            <a:extLst xmlns:a="http://schemas.openxmlformats.org/drawingml/2006/main">
+              <a:ext uri="{FF2B5EF4-FFF2-40B4-BE49-F238E27FC236}">
+                <a16:creationId xmlns:a16="http://schemas.microsoft.com/office/drawing/2014/main" id="{50C9853D-E452-4B95-9242-E102B9246F2B}"/>
               </a:ext>
             </a:extLst>
           </p:cNvPr>
@@ -7566,10 +8390,10 @@
       </p:sp>
       <p:sp>
         <p:nvSpPr>
-          <p:cNvPr id="71" name="Gibco / Thermo · TMO">
-            <a:extLst xmlns:a="http://schemas.openxmlformats.org/drawingml/2006/main">
-              <a:ext uri="{FF2B5EF4-FFF2-40B4-BE49-F238E27FC236}">
-                <a16:creationId xmlns:a16="http://schemas.microsoft.com/office/drawing/2014/main" id="{3164D376-FE1D-4BE5-A819-752863275EB1}"/>
+          <p:cNvPr id="74" name="Gibco / Thermo · TMO">
+            <a:extLst xmlns:a="http://schemas.openxmlformats.org/drawingml/2006/main">
+              <a:ext uri="{FF2B5EF4-FFF2-40B4-BE49-F238E27FC236}">
+                <a16:creationId xmlns:a16="http://schemas.microsoft.com/office/drawing/2014/main" id="{541F8CD4-E4A8-4B40-9239-4736406696C3}"/>
               </a:ext>
             </a:extLst>
           </p:cNvPr>
@@ -7657,10 +8481,10 @@
       </p:sp>
       <p:sp>
         <p:nvSpPr>
-          <p:cNvPr id="72" name="">
-            <a:extLst xmlns:a="http://schemas.openxmlformats.org/drawingml/2006/main">
-              <a:ext uri="{FF2B5EF4-FFF2-40B4-BE49-F238E27FC236}">
-                <a16:creationId xmlns:a16="http://schemas.microsoft.com/office/drawing/2014/main" id="{520E00AC-23A7-494C-BEE6-9CED53F7196B}"/>
+          <p:cNvPr id="75" name="">
+            <a:extLst xmlns:a="http://schemas.openxmlformats.org/drawingml/2006/main">
+              <a:ext uri="{FF2B5EF4-FFF2-40B4-BE49-F238E27FC236}">
+                <a16:creationId xmlns:a16="http://schemas.microsoft.com/office/drawing/2014/main" id="{4B21FAEE-EC0A-46E1-A141-70F8F8F94F6A}"/>
               </a:ext>
             </a:extLst>
           </p:cNvPr>
@@ -7691,10 +8515,10 @@
       </p:sp>
       <p:pic>
         <p:nvPicPr>
-          <p:cNvPr id="73" name="">
-            <a:extLst xmlns:a="http://schemas.openxmlformats.org/drawingml/2006/main">
-              <a:ext uri="{FF2B5EF4-FFF2-40B4-BE49-F238E27FC236}">
-                <a16:creationId xmlns:a16="http://schemas.microsoft.com/office/drawing/2014/main" id="{D7EBA621-0207-445E-BA57-B9B275A2DB4A}"/>
+          <p:cNvPr id="76" name="">
+            <a:extLst xmlns:a="http://schemas.openxmlformats.org/drawingml/2006/main">
+              <a:ext uri="{FF2B5EF4-FFF2-40B4-BE49-F238E27FC236}">
+                <a16:creationId xmlns:a16="http://schemas.microsoft.com/office/drawing/2014/main" id="{E5A7CFA0-04EC-4DD9-AD76-7EBEEA36CEB3}"/>
               </a:ext>
             </a:extLst>
           </p:cNvPr>
@@ -7704,10 +8528,10 @@
           <p:nvPr/>
         </p:nvPicPr>
         <p:blipFill>
-          <a:blip xmlns:r="http://schemas.openxmlformats.org/officeDocument/2006/relationships" xmlns:a="http://schemas.openxmlformats.org/drawingml/2006/main" r:embed="Rd550bb1a9e414eb1">
+          <a:blip xmlns:r="http://schemas.openxmlformats.org/officeDocument/2006/relationships" xmlns:a="http://schemas.openxmlformats.org/drawingml/2006/main" r:embed="R02619106c41946fd">
             <a:extLst>
               <a:ext uri="{96DAC541-7B7A-43D3-8B79-37D633B846F1}">
-                <asvg:svgBlip xmlns:asvg="http://schemas.microsoft.com/office/drawing/2016/SVG/main" r:embed="R319bbd13ab1745b4"/>
+                <asvg:svgBlip xmlns:asvg="http://schemas.microsoft.com/office/drawing/2016/SVG/main" r:embed="Rf2b31b9c99bd4b52"/>
               </a:ext>
             </a:extLst>
           </a:blip>
@@ -7725,10 +8549,10 @@
       </p:pic>
       <p:sp>
         <p:nvSpPr>
-          <p:cNvPr id="74" name="Labware &amp; sample handling">
-            <a:extLst xmlns:a="http://schemas.openxmlformats.org/drawingml/2006/main">
-              <a:ext uri="{FF2B5EF4-FFF2-40B4-BE49-F238E27FC236}">
-                <a16:creationId xmlns:a16="http://schemas.microsoft.com/office/drawing/2014/main" id="{4DF490C0-2D24-4B3C-B2E5-C45420308301}"/>
+          <p:cNvPr id="77" name="Labware &amp; sample handling">
+            <a:extLst xmlns:a="http://schemas.openxmlformats.org/drawingml/2006/main">
+              <a:ext uri="{FF2B5EF4-FFF2-40B4-BE49-F238E27FC236}">
+                <a16:creationId xmlns:a16="http://schemas.microsoft.com/office/drawing/2014/main" id="{A44D38EE-3683-4694-843D-0352A5210003}"/>
               </a:ext>
             </a:extLst>
           </p:cNvPr>
@@ -7792,10 +8616,10 @@
       </p:sp>
       <p:sp>
         <p:nvSpPr>
-          <p:cNvPr id="75" name="Tips, plates, tubes, filtration">
-            <a:extLst xmlns:a="http://schemas.openxmlformats.org/drawingml/2006/main">
-              <a:ext uri="{FF2B5EF4-FFF2-40B4-BE49-F238E27FC236}">
-                <a16:creationId xmlns:a16="http://schemas.microsoft.com/office/drawing/2014/main" id="{36BE5E0D-43AA-4764-8207-9D1D4FC96089}"/>
+          <p:cNvPr id="78" name="Tips, plates, tubes, filtration">
+            <a:extLst xmlns:a="http://schemas.openxmlformats.org/drawingml/2006/main">
+              <a:ext uri="{FF2B5EF4-FFF2-40B4-BE49-F238E27FC236}">
+                <a16:creationId xmlns:a16="http://schemas.microsoft.com/office/drawing/2014/main" id="{1A53DF28-450C-482E-8C75-3DAE6BBEC2D7}"/>
               </a:ext>
             </a:extLst>
           </p:cNvPr>
@@ -7883,10 +8707,10 @@
       </p:sp>
       <p:sp>
         <p:nvSpPr>
-          <p:cNvPr id="76" name="~RMB 23bn">
-            <a:extLst xmlns:a="http://schemas.openxmlformats.org/drawingml/2006/main">
-              <a:ext uri="{FF2B5EF4-FFF2-40B4-BE49-F238E27FC236}">
-                <a16:creationId xmlns:a16="http://schemas.microsoft.com/office/drawing/2014/main" id="{49FADE2A-FC99-4EE7-AA39-ACBC728D4AE2}"/>
+          <p:cNvPr id="79" name="~RMB 23bn">
+            <a:extLst xmlns:a="http://schemas.openxmlformats.org/drawingml/2006/main">
+              <a:ext uri="{FF2B5EF4-FFF2-40B4-BE49-F238E27FC236}">
+                <a16:creationId xmlns:a16="http://schemas.microsoft.com/office/drawing/2014/main" id="{3549B8B1-9590-4EA4-B4DD-480275826B7D}"/>
               </a:ext>
             </a:extLst>
           </p:cNvPr>
@@ -7950,10 +8774,10 @@
       </p:sp>
       <p:sp>
         <p:nvSpPr>
-          <p:cNvPr id="77" name="China • 2024 • plastic labware [4]">
-            <a:extLst xmlns:a="http://schemas.openxmlformats.org/drawingml/2006/main">
-              <a:ext uri="{FF2B5EF4-FFF2-40B4-BE49-F238E27FC236}">
-                <a16:creationId xmlns:a16="http://schemas.microsoft.com/office/drawing/2014/main" id="{353FB520-56F0-4C68-B9EC-E25D93646B07}"/>
+          <p:cNvPr id="80" name="China • 2024 • plastic labware [4]">
+            <a:extLst xmlns:a="http://schemas.openxmlformats.org/drawingml/2006/main">
+              <a:ext uri="{FF2B5EF4-FFF2-40B4-BE49-F238E27FC236}">
+                <a16:creationId xmlns:a16="http://schemas.microsoft.com/office/drawing/2014/main" id="{04642C90-4E99-4678-9B43-AB5DA2C6F942}"/>
               </a:ext>
             </a:extLst>
           </p:cNvPr>
@@ -8017,10 +8841,10 @@
       </p:sp>
       <p:sp>
         <p:nvSpPr>
-          <p:cNvPr id="78" name="Includes clinical and industrial uses">
-            <a:extLst xmlns:a="http://schemas.openxmlformats.org/drawingml/2006/main">
-              <a:ext uri="{FF2B5EF4-FFF2-40B4-BE49-F238E27FC236}">
-                <a16:creationId xmlns:a16="http://schemas.microsoft.com/office/drawing/2014/main" id="{D3F75192-7498-4AA2-881F-DD763C411E62}"/>
+          <p:cNvPr id="81" name="Includes clinical and industrial uses">
+            <a:extLst xmlns:a="http://schemas.openxmlformats.org/drawingml/2006/main">
+              <a:ext uri="{FF2B5EF4-FFF2-40B4-BE49-F238E27FC236}">
+                <a16:creationId xmlns:a16="http://schemas.microsoft.com/office/drawing/2014/main" id="{C9C3E8A2-A1E0-4380-BFA5-1CBAFFE38755}"/>
               </a:ext>
             </a:extLst>
           </p:cNvPr>
@@ -8084,10 +8908,10 @@
       </p:sp>
       <p:pic>
         <p:nvPicPr>
-          <p:cNvPr id="79" name="">
-            <a:extLst xmlns:a="http://schemas.openxmlformats.org/drawingml/2006/main">
-              <a:ext uri="{FF2B5EF4-FFF2-40B4-BE49-F238E27FC236}">
-                <a16:creationId xmlns:a16="http://schemas.microsoft.com/office/drawing/2014/main" id="{3F173DA3-0AD5-42A7-B910-E6C6BD35C827}"/>
+          <p:cNvPr id="82" name="">
+            <a:extLst xmlns:a="http://schemas.openxmlformats.org/drawingml/2006/main">
+              <a:ext uri="{FF2B5EF4-FFF2-40B4-BE49-F238E27FC236}">
+                <a16:creationId xmlns:a16="http://schemas.microsoft.com/office/drawing/2014/main" id="{5169812F-8631-4167-A563-342766A53DF5}"/>
               </a:ext>
             </a:extLst>
           </p:cNvPr>
@@ -8097,7 +8921,7 @@
           <p:nvPr/>
         </p:nvPicPr>
         <p:blipFill>
-          <a:blip xmlns:r="http://schemas.openxmlformats.org/officeDocument/2006/relationships" xmlns:a="http://schemas.openxmlformats.org/drawingml/2006/main" r:embed="Rf5ae518bc6e448b7"/>
+          <a:blip xmlns:r="http://schemas.openxmlformats.org/officeDocument/2006/relationships" xmlns:a="http://schemas.openxmlformats.org/drawingml/2006/main" r:embed="R3fff92112c8446e5"/>
           <a:stretch xmlns:a="http://schemas.openxmlformats.org/drawingml/2006/main"/>
         </p:blipFill>
         <p:spPr>
@@ -8112,10 +8936,10 @@
       </p:pic>
       <p:pic>
         <p:nvPicPr>
-          <p:cNvPr id="80" name="">
-            <a:extLst xmlns:a="http://schemas.openxmlformats.org/drawingml/2006/main">
-              <a:ext uri="{FF2B5EF4-FFF2-40B4-BE49-F238E27FC236}">
-                <a16:creationId xmlns:a16="http://schemas.microsoft.com/office/drawing/2014/main" id="{2858BFAC-36E2-4732-A3E9-F9C03629790E}"/>
+          <p:cNvPr id="83" name="">
+            <a:extLst xmlns:a="http://schemas.openxmlformats.org/drawingml/2006/main">
+              <a:ext uri="{FF2B5EF4-FFF2-40B4-BE49-F238E27FC236}">
+                <a16:creationId xmlns:a16="http://schemas.microsoft.com/office/drawing/2014/main" id="{2B055701-54C8-4CD5-A0C2-4DE2209D885D}"/>
               </a:ext>
             </a:extLst>
           </p:cNvPr>
@@ -8125,10 +8949,10 @@
           <p:nvPr/>
         </p:nvPicPr>
         <p:blipFill>
-          <a:blip xmlns:r="http://schemas.openxmlformats.org/officeDocument/2006/relationships" xmlns:a="http://schemas.openxmlformats.org/drawingml/2006/main" r:embed="R2b52523d4e394751">
+          <a:blip xmlns:r="http://schemas.openxmlformats.org/officeDocument/2006/relationships" xmlns:a="http://schemas.openxmlformats.org/drawingml/2006/main" r:embed="Rf7feec6d82e14abb">
             <a:extLst>
               <a:ext uri="{96DAC541-7B7A-43D3-8B79-37D633B846F1}">
-                <asvg:svgBlip xmlns:asvg="http://schemas.microsoft.com/office/drawing/2016/SVG/main" r:embed="R470f57f06f9a4eeb"/>
+                <asvg:svgBlip xmlns:asvg="http://schemas.microsoft.com/office/drawing/2016/SVG/main" r:embed="R82221df980cd4538"/>
               </a:ext>
             </a:extLst>
           </a:blip>
@@ -8146,10 +8970,10 @@
       </p:pic>
       <p:sp>
         <p:nvSpPr>
-          <p:cNvPr id="81" name="CHINA / HK LISTINGS">
-            <a:extLst xmlns:a="http://schemas.openxmlformats.org/drawingml/2006/main">
-              <a:ext uri="{FF2B5EF4-FFF2-40B4-BE49-F238E27FC236}">
-                <a16:creationId xmlns:a16="http://schemas.microsoft.com/office/drawing/2014/main" id="{E65FB1D6-89F1-4384-8AAA-0F9053790FC7}"/>
+          <p:cNvPr id="84" name="CHINA / HK LISTINGS">
+            <a:extLst xmlns:a="http://schemas.openxmlformats.org/drawingml/2006/main">
+              <a:ext uri="{FF2B5EF4-FFF2-40B4-BE49-F238E27FC236}">
+                <a16:creationId xmlns:a16="http://schemas.microsoft.com/office/drawing/2014/main" id="{D4C5307B-1ABA-4A88-98CB-C599D4E32F0E}"/>
               </a:ext>
             </a:extLst>
           </p:cNvPr>
@@ -8213,10 +9037,10 @@
       </p:sp>
       <p:sp>
         <p:nvSpPr>
-          <p:cNvPr id="82" name="US LISTINGS / PARENTS">
-            <a:extLst xmlns:a="http://schemas.openxmlformats.org/drawingml/2006/main">
-              <a:ext uri="{FF2B5EF4-FFF2-40B4-BE49-F238E27FC236}">
-                <a16:creationId xmlns:a16="http://schemas.microsoft.com/office/drawing/2014/main" id="{16E33716-9CC1-4F7C-A4F6-5042901E0407}"/>
+          <p:cNvPr id="85" name="US LISTINGS / PARENTS">
+            <a:extLst xmlns:a="http://schemas.openxmlformats.org/drawingml/2006/main">
+              <a:ext uri="{FF2B5EF4-FFF2-40B4-BE49-F238E27FC236}">
+                <a16:creationId xmlns:a16="http://schemas.microsoft.com/office/drawing/2014/main" id="{E40E6EE3-BEEA-402E-9D6F-A94B801567CA}"/>
               </a:ext>
             </a:extLst>
           </p:cNvPr>
@@ -8280,10 +9104,10 @@
       </p:sp>
       <p:sp>
         <p:nvSpPr>
-          <p:cNvPr id="83" name="JET Biofil · 688026.SH">
-            <a:extLst xmlns:a="http://schemas.openxmlformats.org/drawingml/2006/main">
-              <a:ext uri="{FF2B5EF4-FFF2-40B4-BE49-F238E27FC236}">
-                <a16:creationId xmlns:a16="http://schemas.microsoft.com/office/drawing/2014/main" id="{808886CB-E744-42C0-B836-116D9CEFB440}"/>
+          <p:cNvPr id="86" name="JET Biofil · 688026.SH">
+            <a:extLst xmlns:a="http://schemas.openxmlformats.org/drawingml/2006/main">
+              <a:ext uri="{FF2B5EF4-FFF2-40B4-BE49-F238E27FC236}">
+                <a16:creationId xmlns:a16="http://schemas.microsoft.com/office/drawing/2014/main" id="{3054008D-5A6B-4FDE-B854-F81E111B629F}"/>
               </a:ext>
             </a:extLst>
           </p:cNvPr>
@@ -8371,10 +9195,10 @@
       </p:sp>
       <p:sp>
         <p:nvSpPr>
-          <p:cNvPr id="84" name="Corning · GLW">
-            <a:extLst xmlns:a="http://schemas.openxmlformats.org/drawingml/2006/main">
-              <a:ext uri="{FF2B5EF4-FFF2-40B4-BE49-F238E27FC236}">
-                <a16:creationId xmlns:a16="http://schemas.microsoft.com/office/drawing/2014/main" id="{EB87D236-BE12-4148-A461-060487522C36}"/>
+          <p:cNvPr id="87" name="Corning · GLW">
+            <a:extLst xmlns:a="http://schemas.openxmlformats.org/drawingml/2006/main">
+              <a:ext uri="{FF2B5EF4-FFF2-40B4-BE49-F238E27FC236}">
+                <a16:creationId xmlns:a16="http://schemas.microsoft.com/office/drawing/2014/main" id="{C08265A3-3FAE-4419-BBAF-FC73018A58B5}"/>
               </a:ext>
             </a:extLst>
           </p:cNvPr>
@@ -8462,10 +9286,10 @@
       </p:sp>
       <p:sp>
         <p:nvSpPr>
-          <p:cNvPr id="85" name="">
-            <a:extLst xmlns:a="http://schemas.openxmlformats.org/drawingml/2006/main">
-              <a:ext uri="{FF2B5EF4-FFF2-40B4-BE49-F238E27FC236}">
-                <a16:creationId xmlns:a16="http://schemas.microsoft.com/office/drawing/2014/main" id="{D748637A-EF1F-496D-8536-422FEAC63637}"/>
+          <p:cNvPr id="88" name="">
+            <a:extLst xmlns:a="http://schemas.openxmlformats.org/drawingml/2006/main">
+              <a:ext uri="{FF2B5EF4-FFF2-40B4-BE49-F238E27FC236}">
+                <a16:creationId xmlns:a16="http://schemas.microsoft.com/office/drawing/2014/main" id="{656BBA24-0AA1-4ABB-BD26-06410542DBE0}"/>
               </a:ext>
             </a:extLst>
           </p:cNvPr>
@@ -8496,10 +9320,10 @@
       </p:sp>
       <p:pic>
         <p:nvPicPr>
-          <p:cNvPr id="86" name="">
-            <a:extLst xmlns:a="http://schemas.openxmlformats.org/drawingml/2006/main">
-              <a:ext uri="{FF2B5EF4-FFF2-40B4-BE49-F238E27FC236}">
-                <a16:creationId xmlns:a16="http://schemas.microsoft.com/office/drawing/2014/main" id="{CBE01569-B00D-4B97-B85D-09FCC9579794}"/>
+          <p:cNvPr id="89" name="">
+            <a:extLst xmlns:a="http://schemas.openxmlformats.org/drawingml/2006/main">
+              <a:ext uri="{FF2B5EF4-FFF2-40B4-BE49-F238E27FC236}">
+                <a16:creationId xmlns:a16="http://schemas.microsoft.com/office/drawing/2014/main" id="{C9C6B889-059B-4AF3-9EF6-46575B269FA2}"/>
               </a:ext>
             </a:extLst>
           </p:cNvPr>
@@ -8509,10 +9333,10 @@
           <p:nvPr/>
         </p:nvPicPr>
         <p:blipFill>
-          <a:blip xmlns:r="http://schemas.openxmlformats.org/officeDocument/2006/relationships" xmlns:a="http://schemas.openxmlformats.org/drawingml/2006/main" r:embed="R7b1b7be611f843f9">
+          <a:blip xmlns:r="http://schemas.openxmlformats.org/officeDocument/2006/relationships" xmlns:a="http://schemas.openxmlformats.org/drawingml/2006/main" r:embed="R5454090eb3684053">
             <a:extLst>
               <a:ext uri="{96DAC541-7B7A-43D3-8B79-37D633B846F1}">
-                <asvg:svgBlip xmlns:asvg="http://schemas.microsoft.com/office/drawing/2016/SVG/main" r:embed="Rcd8fb2012b314c4f"/>
+                <asvg:svgBlip xmlns:asvg="http://schemas.microsoft.com/office/drawing/2016/SVG/main" r:embed="R136e747671784580"/>
               </a:ext>
             </a:extLst>
           </a:blip>
@@ -8530,10 +9354,10 @@
       </p:pic>
       <p:sp>
         <p:nvSpPr>
-          <p:cNvPr id="87" name="Measurement &amp; analytics">
-            <a:extLst xmlns:a="http://schemas.openxmlformats.org/drawingml/2006/main">
-              <a:ext uri="{FF2B5EF4-FFF2-40B4-BE49-F238E27FC236}">
-                <a16:creationId xmlns:a16="http://schemas.microsoft.com/office/drawing/2014/main" id="{87EBB5E1-C950-4226-B82D-9DFD6990C758}"/>
+          <p:cNvPr id="90" name="Measurement &amp; analytics">
+            <a:extLst xmlns:a="http://schemas.openxmlformats.org/drawingml/2006/main">
+              <a:ext uri="{FF2B5EF4-FFF2-40B4-BE49-F238E27FC236}">
+                <a16:creationId xmlns:a16="http://schemas.microsoft.com/office/drawing/2014/main" id="{884E2DF6-122F-4FFE-A109-7808D183E49C}"/>
               </a:ext>
             </a:extLst>
           </p:cNvPr>
@@ -8597,10 +9421,10 @@
       </p:sp>
       <p:sp>
         <p:nvSpPr>
-          <p:cNvPr id="88" name="Sequencing, LC / LC-MS, flow">
-            <a:extLst xmlns:a="http://schemas.openxmlformats.org/drawingml/2006/main">
-              <a:ext uri="{FF2B5EF4-FFF2-40B4-BE49-F238E27FC236}">
-                <a16:creationId xmlns:a16="http://schemas.microsoft.com/office/drawing/2014/main" id="{49826398-8AFF-4F53-992C-CCC77E74926A}"/>
+          <p:cNvPr id="91" name="Sequencing, LC / LC-MS, flow">
+            <a:extLst xmlns:a="http://schemas.openxmlformats.org/drawingml/2006/main">
+              <a:ext uri="{FF2B5EF4-FFF2-40B4-BE49-F238E27FC236}">
+                <a16:creationId xmlns:a16="http://schemas.microsoft.com/office/drawing/2014/main" id="{97477B8B-C6D4-438B-856F-81643FDC92A9}"/>
               </a:ext>
             </a:extLst>
           </p:cNvPr>
@@ -8688,10 +9512,10 @@
       </p:sp>
       <p:sp>
         <p:nvSpPr>
-          <p:cNvPr id="89" name="RMB 4.3bn">
-            <a:extLst xmlns:a="http://schemas.openxmlformats.org/drawingml/2006/main">
-              <a:ext uri="{FF2B5EF4-FFF2-40B4-BE49-F238E27FC236}">
-                <a16:creationId xmlns:a16="http://schemas.microsoft.com/office/drawing/2014/main" id="{908B88DB-F5B5-4EFD-9E0E-F0278319DE2F}"/>
+          <p:cNvPr id="92" name="RMB 4.3bn">
+            <a:extLst xmlns:a="http://schemas.openxmlformats.org/drawingml/2006/main">
+              <a:ext uri="{FF2B5EF4-FFF2-40B4-BE49-F238E27FC236}">
+                <a16:creationId xmlns:a16="http://schemas.microsoft.com/office/drawing/2014/main" id="{78793B75-84B7-450C-A273-7034E0A4EA65}"/>
               </a:ext>
             </a:extLst>
           </p:cNvPr>
@@ -8755,10 +9579,10 @@
       </p:sp>
       <p:sp>
         <p:nvSpPr>
-          <p:cNvPr id="90" name="China • 2024 • sequencing tools [5]">
-            <a:extLst xmlns:a="http://schemas.openxmlformats.org/drawingml/2006/main">
-              <a:ext uri="{FF2B5EF4-FFF2-40B4-BE49-F238E27FC236}">
-                <a16:creationId xmlns:a16="http://schemas.microsoft.com/office/drawing/2014/main" id="{6E7B4DC5-2E78-48AF-8B75-184121071ADA}"/>
+          <p:cNvPr id="93" name="China • 2024 • sequencing tools [5]">
+            <a:extLst xmlns:a="http://schemas.openxmlformats.org/drawingml/2006/main">
+              <a:ext uri="{FF2B5EF4-FFF2-40B4-BE49-F238E27FC236}">
+                <a16:creationId xmlns:a16="http://schemas.microsoft.com/office/drawing/2014/main" id="{E82D8D0D-4C6E-450F-9CDA-8A6375E6079B}"/>
               </a:ext>
             </a:extLst>
           </p:cNvPr>
@@ -8822,10 +9646,10 @@
       </p:sp>
       <p:sp>
         <p:nvSpPr>
-          <p:cNvPr id="91" name="Sequencers + consumables; all uses">
-            <a:extLst xmlns:a="http://schemas.openxmlformats.org/drawingml/2006/main">
-              <a:ext uri="{FF2B5EF4-FFF2-40B4-BE49-F238E27FC236}">
-                <a16:creationId xmlns:a16="http://schemas.microsoft.com/office/drawing/2014/main" id="{2C34A8C2-4E77-4783-9B57-8AE1F76AFB68}"/>
+          <p:cNvPr id="94" name="Sequencing subset; 2024 policy baseline">
+            <a:extLst xmlns:a="http://schemas.openxmlformats.org/drawingml/2006/main">
+              <a:ext uri="{FF2B5EF4-FFF2-40B4-BE49-F238E27FC236}">
+                <a16:creationId xmlns:a16="http://schemas.microsoft.com/office/drawing/2014/main" id="{E7B93377-7320-4271-AEC1-34DDFB7B7536}"/>
               </a:ext>
             </a:extLst>
           </p:cNvPr>
@@ -8882,17 +9706,17 @@
                 <a:ea typeface="Arial"/>
                 <a:cs typeface="Arial"/>
               </a:rPr>
-              <a:t>Sequencers + consumables; all uses</a:t>
+              <a:t>Sequencing subset; 2024 policy baseline</a:t>
             </a:r>
           </a:p>
         </p:txBody>
       </p:sp>
       <p:pic>
         <p:nvPicPr>
-          <p:cNvPr id="92" name="">
-            <a:extLst xmlns:a="http://schemas.openxmlformats.org/drawingml/2006/main">
-              <a:ext uri="{FF2B5EF4-FFF2-40B4-BE49-F238E27FC236}">
-                <a16:creationId xmlns:a16="http://schemas.microsoft.com/office/drawing/2014/main" id="{DCEEBD67-538B-499B-B781-BE0C3DCEE592}"/>
+          <p:cNvPr id="95" name="">
+            <a:extLst xmlns:a="http://schemas.openxmlformats.org/drawingml/2006/main">
+              <a:ext uri="{FF2B5EF4-FFF2-40B4-BE49-F238E27FC236}">
+                <a16:creationId xmlns:a16="http://schemas.microsoft.com/office/drawing/2014/main" id="{5F61FA59-7C9F-474A-B3B2-A54A1870C299}"/>
               </a:ext>
             </a:extLst>
           </p:cNvPr>
@@ -8902,7 +9726,7 @@
           <p:nvPr/>
         </p:nvPicPr>
         <p:blipFill>
-          <a:blip xmlns:r="http://schemas.openxmlformats.org/officeDocument/2006/relationships" xmlns:a="http://schemas.openxmlformats.org/drawingml/2006/main" r:embed="R922de039721f4530"/>
+          <a:blip xmlns:r="http://schemas.openxmlformats.org/officeDocument/2006/relationships" xmlns:a="http://schemas.openxmlformats.org/drawingml/2006/main" r:embed="R7a6afcb0aa114d92"/>
           <a:stretch xmlns:a="http://schemas.openxmlformats.org/drawingml/2006/main"/>
         </p:blipFill>
         <p:spPr>
@@ -8917,10 +9741,10 @@
       </p:pic>
       <p:sp>
         <p:nvSpPr>
-          <p:cNvPr id="93" name="BD flow → WAT†">
-            <a:extLst xmlns:a="http://schemas.openxmlformats.org/drawingml/2006/main">
-              <a:ext uri="{FF2B5EF4-FFF2-40B4-BE49-F238E27FC236}">
-                <a16:creationId xmlns:a16="http://schemas.microsoft.com/office/drawing/2014/main" id="{642F11BC-1605-4D62-9E5A-5BB2B468E739}"/>
+          <p:cNvPr id="96" name="BD flow → WAT†">
+            <a:extLst xmlns:a="http://schemas.openxmlformats.org/drawingml/2006/main">
+              <a:ext uri="{FF2B5EF4-FFF2-40B4-BE49-F238E27FC236}">
+                <a16:creationId xmlns:a16="http://schemas.microsoft.com/office/drawing/2014/main" id="{34D70078-632B-4617-A64B-9EFDD0C8DC06}"/>
               </a:ext>
             </a:extLst>
           </p:cNvPr>
@@ -8984,10 +9808,10 @@
       </p:sp>
       <p:sp>
         <p:nvSpPr>
-          <p:cNvPr id="94" name="CHINA / HK LISTINGS">
-            <a:extLst xmlns:a="http://schemas.openxmlformats.org/drawingml/2006/main">
-              <a:ext uri="{FF2B5EF4-FFF2-40B4-BE49-F238E27FC236}">
-                <a16:creationId xmlns:a16="http://schemas.microsoft.com/office/drawing/2014/main" id="{0EBC2D6D-ACB8-450E-A626-D65352DC2C9C}"/>
+          <p:cNvPr id="97" name="CHINA / HK LISTINGS">
+            <a:extLst xmlns:a="http://schemas.openxmlformats.org/drawingml/2006/main">
+              <a:ext uri="{FF2B5EF4-FFF2-40B4-BE49-F238E27FC236}">
+                <a16:creationId xmlns:a16="http://schemas.microsoft.com/office/drawing/2014/main" id="{61E83EA7-2241-489D-B2C4-5801F21E44A1}"/>
               </a:ext>
             </a:extLst>
           </p:cNvPr>
@@ -9051,10 +9875,10 @@
       </p:sp>
       <p:sp>
         <p:nvSpPr>
-          <p:cNvPr id="95" name="US LISTINGS / PARENTS">
-            <a:extLst xmlns:a="http://schemas.openxmlformats.org/drawingml/2006/main">
-              <a:ext uri="{FF2B5EF4-FFF2-40B4-BE49-F238E27FC236}">
-                <a16:creationId xmlns:a16="http://schemas.microsoft.com/office/drawing/2014/main" id="{93B5A8C2-ED6A-43E6-AEFD-53B4420E2337}"/>
+          <p:cNvPr id="98" name="US LISTINGS / PARENTS">
+            <a:extLst xmlns:a="http://schemas.openxmlformats.org/drawingml/2006/main">
+              <a:ext uri="{FF2B5EF4-FFF2-40B4-BE49-F238E27FC236}">
+                <a16:creationId xmlns:a16="http://schemas.microsoft.com/office/drawing/2014/main" id="{B991CFDF-3140-430C-AEC4-E7E598B22192}"/>
               </a:ext>
             </a:extLst>
           </p:cNvPr>
@@ -9118,10 +9942,10 @@
       </p:sp>
       <p:sp>
         <p:nvSpPr>
-          <p:cNvPr id="96" name="MGI · 688114.SH">
-            <a:extLst xmlns:a="http://schemas.openxmlformats.org/drawingml/2006/main">
-              <a:ext uri="{FF2B5EF4-FFF2-40B4-BE49-F238E27FC236}">
-                <a16:creationId xmlns:a16="http://schemas.microsoft.com/office/drawing/2014/main" id="{677C6441-2146-48DD-AE57-002F602E91D3}"/>
+          <p:cNvPr id="99" name="MGI · 688114.SH">
+            <a:extLst xmlns:a="http://schemas.openxmlformats.org/drawingml/2006/main">
+              <a:ext uri="{FF2B5EF4-FFF2-40B4-BE49-F238E27FC236}">
+                <a16:creationId xmlns:a16="http://schemas.microsoft.com/office/drawing/2014/main" id="{D032DFF1-248E-4BDA-BF28-7A1456FF674F}"/>
               </a:ext>
             </a:extLst>
           </p:cNvPr>
@@ -9209,10 +10033,10 @@
       </p:sp>
       <p:sp>
         <p:nvSpPr>
-          <p:cNvPr id="97" name="Illumina · ILMN">
-            <a:extLst xmlns:a="http://schemas.openxmlformats.org/drawingml/2006/main">
-              <a:ext uri="{FF2B5EF4-FFF2-40B4-BE49-F238E27FC236}">
-                <a16:creationId xmlns:a16="http://schemas.microsoft.com/office/drawing/2014/main" id="{D9B92017-52B0-4A89-8263-C8B2F54026B8}"/>
+          <p:cNvPr id="100" name="Illumina · ILMN">
+            <a:extLst xmlns:a="http://schemas.openxmlformats.org/drawingml/2006/main">
+              <a:ext uri="{FF2B5EF4-FFF2-40B4-BE49-F238E27FC236}">
+                <a16:creationId xmlns:a16="http://schemas.microsoft.com/office/drawing/2014/main" id="{A89D1D39-E881-4EF6-8FB2-A77D81DB5A8B}"/>
               </a:ext>
             </a:extLst>
           </p:cNvPr>
@@ -9324,10 +10148,10 @@
       </p:sp>
       <p:sp>
         <p:nvSpPr>
-          <p:cNvPr id="98" name="">
-            <a:extLst xmlns:a="http://schemas.openxmlformats.org/drawingml/2006/main">
-              <a:ext uri="{FF2B5EF4-FFF2-40B4-BE49-F238E27FC236}">
-                <a16:creationId xmlns:a16="http://schemas.microsoft.com/office/drawing/2014/main" id="{B7565F19-47AB-456F-A7B5-21E78A9F11AA}"/>
+          <p:cNvPr id="101" name="">
+            <a:extLst xmlns:a="http://schemas.openxmlformats.org/drawingml/2006/main">
+              <a:ext uri="{FF2B5EF4-FFF2-40B4-BE49-F238E27FC236}">
+                <a16:creationId xmlns:a16="http://schemas.microsoft.com/office/drawing/2014/main" id="{F570786C-8161-4D96-BA71-42C02079E3DD}"/>
               </a:ext>
             </a:extLst>
           </p:cNvPr>
@@ -9358,10 +10182,10 @@
       </p:sp>
       <p:pic>
         <p:nvPicPr>
-          <p:cNvPr id="99" name="">
-            <a:extLst xmlns:a="http://schemas.openxmlformats.org/drawingml/2006/main">
-              <a:ext uri="{FF2B5EF4-FFF2-40B4-BE49-F238E27FC236}">
-                <a16:creationId xmlns:a16="http://schemas.microsoft.com/office/drawing/2014/main" id="{7B1C9F00-7D3F-41E7-9BB0-D22ED071E9B4}"/>
+          <p:cNvPr id="102" name="">
+            <a:extLst xmlns:a="http://schemas.openxmlformats.org/drawingml/2006/main">
+              <a:ext uri="{FF2B5EF4-FFF2-40B4-BE49-F238E27FC236}">
+                <a16:creationId xmlns:a16="http://schemas.microsoft.com/office/drawing/2014/main" id="{E4E22145-05EB-4677-B2DF-CFEAB9A27396}"/>
               </a:ext>
             </a:extLst>
           </p:cNvPr>
@@ -9371,10 +10195,10 @@
           <p:nvPr/>
         </p:nvPicPr>
         <p:blipFill>
-          <a:blip xmlns:r="http://schemas.openxmlformats.org/officeDocument/2006/relationships" xmlns:a="http://schemas.openxmlformats.org/drawingml/2006/main" r:embed="R4900accef28f4b25">
+          <a:blip xmlns:r="http://schemas.openxmlformats.org/officeDocument/2006/relationships" xmlns:a="http://schemas.openxmlformats.org/drawingml/2006/main" r:embed="R1ee3d20e7d6f4887">
             <a:extLst>
               <a:ext uri="{96DAC541-7B7A-43D3-8B79-37D633B846F1}">
-                <asvg:svgBlip xmlns:asvg="http://schemas.microsoft.com/office/drawing/2016/SVG/main" r:embed="R80fd79af247c46ac"/>
+                <asvg:svgBlip xmlns:asvg="http://schemas.microsoft.com/office/drawing/2016/SVG/main" r:embed="Ree748c7a4f944ede"/>
               </a:ext>
             </a:extLst>
           </a:blip>
@@ -9392,10 +10216,10 @@
       </p:pic>
       <p:sp>
         <p:nvSpPr>
-          <p:cNvPr id="100" name="Purification &amp; scale-up">
-            <a:extLst xmlns:a="http://schemas.openxmlformats.org/drawingml/2006/main">
-              <a:ext uri="{FF2B5EF4-FFF2-40B4-BE49-F238E27FC236}">
-                <a16:creationId xmlns:a16="http://schemas.microsoft.com/office/drawing/2014/main" id="{4226B4E5-A189-4AD5-8993-D32F7146E206}"/>
+          <p:cNvPr id="103" name="Purification &amp; scale-up">
+            <a:extLst xmlns:a="http://schemas.openxmlformats.org/drawingml/2006/main">
+              <a:ext uri="{FF2B5EF4-FFF2-40B4-BE49-F238E27FC236}">
+                <a16:creationId xmlns:a16="http://schemas.microsoft.com/office/drawing/2014/main" id="{5E61B309-8E40-4CB1-BE87-5E024587C4E5}"/>
               </a:ext>
             </a:extLst>
           </p:cNvPr>
@@ -9459,10 +10283,10 @@
       </p:sp>
       <p:sp>
         <p:nvSpPr>
-          <p:cNvPr id="101" name="Analytical columns, process resins">
-            <a:extLst xmlns:a="http://schemas.openxmlformats.org/drawingml/2006/main">
-              <a:ext uri="{FF2B5EF4-FFF2-40B4-BE49-F238E27FC236}">
-                <a16:creationId xmlns:a16="http://schemas.microsoft.com/office/drawing/2014/main" id="{CCAD1A37-650F-484F-92BF-7E3C444DFB4B}"/>
+          <p:cNvPr id="104" name="Analytical columns, process resins">
+            <a:extLst xmlns:a="http://schemas.openxmlformats.org/drawingml/2006/main">
+              <a:ext uri="{FF2B5EF4-FFF2-40B4-BE49-F238E27FC236}">
+                <a16:creationId xmlns:a16="http://schemas.microsoft.com/office/drawing/2014/main" id="{5D115580-E300-4A75-9FFA-6BB277D82ADF}"/>
               </a:ext>
             </a:extLst>
           </p:cNvPr>
@@ -9550,10 +10374,10 @@
       </p:sp>
       <p:sp>
         <p:nvSpPr>
-          <p:cNvPr id="102" name="US$578.2m*">
-            <a:extLst xmlns:a="http://schemas.openxmlformats.org/drawingml/2006/main">
-              <a:ext uri="{FF2B5EF4-FFF2-40B4-BE49-F238E27FC236}">
-                <a16:creationId xmlns:a16="http://schemas.microsoft.com/office/drawing/2014/main" id="{D74059DD-AFE8-4409-A97C-CB60064FFAC7}"/>
+          <p:cNvPr id="105" name="Source pending">
+            <a:extLst xmlns:a="http://schemas.openxmlformats.org/drawingml/2006/main">
+              <a:ext uri="{FF2B5EF4-FFF2-40B4-BE49-F238E27FC236}">
+                <a16:creationId xmlns:a16="http://schemas.microsoft.com/office/drawing/2014/main" id="{8B067F9B-C8B8-4283-8E64-06469B5ABB8C}"/>
               </a:ext>
             </a:extLst>
           </p:cNvPr>
@@ -9579,7 +10403,7 @@
           <a:bodyPr xmlns:a="http://schemas.openxmlformats.org/drawingml/2006/main" wrap="none" lIns="0" tIns="0" rIns="0" bIns="0" anchor="t"/>
           <a:lstStyle xmlns:a="http://schemas.openxmlformats.org/drawingml/2006/main">
             <a:defPPr algn="l">
-              <a:defRPr sz="2220" b="1">
+              <a:defRPr sz="1860" b="1">
                 <a:solidFill>
                   <a:srgbClr val="00355F"/>
                 </a:solidFill>
@@ -9592,7 +10416,7 @@
           <a:p xmlns:a="http://schemas.openxmlformats.org/drawingml/2006/main">
             <a:pPr algn="l">
               <a:buNone/>
-              <a:defRPr sz="2220" b="1">
+              <a:defRPr sz="1860" b="1">
                 <a:solidFill>
                   <a:srgbClr val="00355F"/>
                 </a:solidFill>
@@ -9602,7 +10426,7 @@
               </a:defRPr>
             </a:pPr>
             <a:r>
-              <a:rPr sz="2220" b="1">
+              <a:rPr sz="1860" b="1">
                 <a:solidFill>
                   <a:srgbClr val="00355F"/>
                 </a:solidFill>
@@ -9610,17 +10434,17 @@
                 <a:ea typeface="Arial"/>
                 <a:cs typeface="Arial"/>
               </a:rPr>
-              <a:t>US$578.2m*</a:t>
+              <a:t>Source pending</a:t>
             </a:r>
           </a:p>
         </p:txBody>
       </p:sp>
       <p:sp>
         <p:nvSpPr>
-          <p:cNvPr id="103" name="China • 2024 • bioprocess resins [3]">
-            <a:extLst xmlns:a="http://schemas.openxmlformats.org/drawingml/2006/main">
-              <a:ext uri="{FF2B5EF4-FFF2-40B4-BE49-F238E27FC236}">
-                <a16:creationId xmlns:a16="http://schemas.microsoft.com/office/drawing/2014/main" id="{0FD53FCA-C16B-40CD-872A-7A23874AC63E}"/>
+          <p:cNvPr id="106" name="China • 2024 • bioprocess resins [3]">
+            <a:extLst xmlns:a="http://schemas.openxmlformats.org/drawingml/2006/main">
+              <a:ext uri="{FF2B5EF4-FFF2-40B4-BE49-F238E27FC236}">
+                <a16:creationId xmlns:a16="http://schemas.microsoft.com/office/drawing/2014/main" id="{C5AFD67A-A5C5-4AA2-977B-8099E8EFF4CD}"/>
               </a:ext>
             </a:extLst>
           </p:cNvPr>
@@ -9684,10 +10508,10 @@
       </p:sp>
       <p:sp>
         <p:nvSpPr>
-          <p:cNvPr id="104" name="Manufacturing demand has a longer lag">
-            <a:extLst xmlns:a="http://schemas.openxmlformats.org/drawingml/2006/main">
-              <a:ext uri="{FF2B5EF4-FFF2-40B4-BE49-F238E27FC236}">
-                <a16:creationId xmlns:a16="http://schemas.microsoft.com/office/drawing/2014/main" id="{671898DE-2FFD-430D-A321-5F14627BB4FB}"/>
+          <p:cNvPr id="107" name="Original filing unavailable; TAM withheld">
+            <a:extLst xmlns:a="http://schemas.openxmlformats.org/drawingml/2006/main">
+              <a:ext uri="{FF2B5EF4-FFF2-40B4-BE49-F238E27FC236}">
+                <a16:creationId xmlns:a16="http://schemas.microsoft.com/office/drawing/2014/main" id="{2A8F91A5-67B9-4F2A-BF63-544EE6937AB6}"/>
               </a:ext>
             </a:extLst>
           </p:cNvPr>
@@ -9744,17 +10568,17 @@
                 <a:ea typeface="Arial"/>
                 <a:cs typeface="Arial"/>
               </a:rPr>
-              <a:t>Manufacturing demand has a longer lag</a:t>
+              <a:t>Original filing unavailable; TAM withheld</a:t>
             </a:r>
           </a:p>
         </p:txBody>
       </p:sp>
       <p:pic>
         <p:nvPicPr>
-          <p:cNvPr id="105" name="">
-            <a:extLst xmlns:a="http://schemas.openxmlformats.org/drawingml/2006/main">
-              <a:ext uri="{FF2B5EF4-FFF2-40B4-BE49-F238E27FC236}">
-                <a16:creationId xmlns:a16="http://schemas.microsoft.com/office/drawing/2014/main" id="{A8C1CA47-99A2-4691-A65F-31DBC80EEC05}"/>
+          <p:cNvPr id="108" name="">
+            <a:extLst xmlns:a="http://schemas.openxmlformats.org/drawingml/2006/main">
+              <a:ext uri="{FF2B5EF4-FFF2-40B4-BE49-F238E27FC236}">
+                <a16:creationId xmlns:a16="http://schemas.microsoft.com/office/drawing/2014/main" id="{A0C83892-0AA0-4710-A80A-5ECA0C119416}"/>
               </a:ext>
             </a:extLst>
           </p:cNvPr>
@@ -9764,10 +10588,10 @@
           <p:nvPr/>
         </p:nvPicPr>
         <p:blipFill>
-          <a:blip xmlns:r="http://schemas.openxmlformats.org/officeDocument/2006/relationships" xmlns:a="http://schemas.openxmlformats.org/drawingml/2006/main" r:embed="Rf5ae518bc6e448b7">
+          <a:blip xmlns:r="http://schemas.openxmlformats.org/officeDocument/2006/relationships" xmlns:a="http://schemas.openxmlformats.org/drawingml/2006/main" r:embed="R3fff92112c8446e5">
             <a:extLst>
               <a:ext uri="{96DAC541-7B7A-43D3-8B79-37D633B846F1}">
-                <asvg:svgBlip xmlns:asvg="http://schemas.microsoft.com/office/drawing/2016/SVG/main" r:embed="R963aa88321a043c2"/>
+                <asvg:svgBlip xmlns:asvg="http://schemas.microsoft.com/office/drawing/2016/SVG/main" r:embed="R87271b5ae62b4c87"/>
               </a:ext>
             </a:extLst>
           </a:blip>
@@ -9785,10 +10609,10 @@
       </p:pic>
       <p:sp>
         <p:nvSpPr>
-          <p:cNvPr id="106" name="NanoMicro">
-            <a:extLst xmlns:a="http://schemas.openxmlformats.org/drawingml/2006/main">
-              <a:ext uri="{FF2B5EF4-FFF2-40B4-BE49-F238E27FC236}">
-                <a16:creationId xmlns:a16="http://schemas.microsoft.com/office/drawing/2014/main" id="{3F578045-5FE2-43A9-9FCB-02BBB09ED7AD}"/>
+          <p:cNvPr id="109" name="NanoMicro">
+            <a:extLst xmlns:a="http://schemas.openxmlformats.org/drawingml/2006/main">
+              <a:ext uri="{FF2B5EF4-FFF2-40B4-BE49-F238E27FC236}">
+                <a16:creationId xmlns:a16="http://schemas.microsoft.com/office/drawing/2014/main" id="{54629FFE-F185-4507-8546-D3C4C0DCFAF3}"/>
               </a:ext>
             </a:extLst>
           </p:cNvPr>
@@ -9852,10 +10676,10 @@
       </p:sp>
       <p:pic>
         <p:nvPicPr>
-          <p:cNvPr id="107" name="">
-            <a:extLst xmlns:a="http://schemas.openxmlformats.org/drawingml/2006/main">
-              <a:ext uri="{FF2B5EF4-FFF2-40B4-BE49-F238E27FC236}">
-                <a16:creationId xmlns:a16="http://schemas.microsoft.com/office/drawing/2014/main" id="{46A32EEB-B996-4E71-A5B1-A4A3709911E1}"/>
+          <p:cNvPr id="110" name="">
+            <a:extLst xmlns:a="http://schemas.openxmlformats.org/drawingml/2006/main">
+              <a:ext uri="{FF2B5EF4-FFF2-40B4-BE49-F238E27FC236}">
+                <a16:creationId xmlns:a16="http://schemas.microsoft.com/office/drawing/2014/main" id="{D67D760A-418A-4D5A-B60E-F0396E474A11}"/>
               </a:ext>
             </a:extLst>
           </p:cNvPr>
@@ -9865,7 +10689,7 @@
           <p:nvPr/>
         </p:nvPicPr>
         <p:blipFill>
-          <a:blip xmlns:r="http://schemas.openxmlformats.org/officeDocument/2006/relationships" xmlns:a="http://schemas.openxmlformats.org/drawingml/2006/main" r:embed="R66ca786e3b284425"/>
+          <a:blip xmlns:r="http://schemas.openxmlformats.org/officeDocument/2006/relationships" xmlns:a="http://schemas.openxmlformats.org/drawingml/2006/main" r:embed="R41785f03412045e3"/>
           <a:stretch xmlns:a="http://schemas.openxmlformats.org/drawingml/2006/main"/>
         </p:blipFill>
         <p:spPr>
@@ -9880,10 +10704,10 @@
       </p:pic>
       <p:sp>
         <p:nvSpPr>
-          <p:cNvPr id="108" name="CHINA / HK LISTINGS">
-            <a:extLst xmlns:a="http://schemas.openxmlformats.org/drawingml/2006/main">
-              <a:ext uri="{FF2B5EF4-FFF2-40B4-BE49-F238E27FC236}">
-                <a16:creationId xmlns:a16="http://schemas.microsoft.com/office/drawing/2014/main" id="{F6946C97-E383-4EDD-B8B0-06D5C6D0770E}"/>
+          <p:cNvPr id="111" name="CHINA / HK LISTINGS">
+            <a:extLst xmlns:a="http://schemas.openxmlformats.org/drawingml/2006/main">
+              <a:ext uri="{FF2B5EF4-FFF2-40B4-BE49-F238E27FC236}">
+                <a16:creationId xmlns:a16="http://schemas.microsoft.com/office/drawing/2014/main" id="{1D657D2A-D4D2-4233-A96C-D3EAE8FBBBA9}"/>
               </a:ext>
             </a:extLst>
           </p:cNvPr>
@@ -9947,10 +10771,10 @@
       </p:sp>
       <p:sp>
         <p:nvSpPr>
-          <p:cNvPr id="109" name="US LISTINGS / PARENTS">
-            <a:extLst xmlns:a="http://schemas.openxmlformats.org/drawingml/2006/main">
-              <a:ext uri="{FF2B5EF4-FFF2-40B4-BE49-F238E27FC236}">
-                <a16:creationId xmlns:a16="http://schemas.microsoft.com/office/drawing/2014/main" id="{BFFA75CD-F9A2-4CD6-BA49-11349E8500D7}"/>
+          <p:cNvPr id="112" name="US LISTINGS / PARENTS">
+            <a:extLst xmlns:a="http://schemas.openxmlformats.org/drawingml/2006/main">
+              <a:ext uri="{FF2B5EF4-FFF2-40B4-BE49-F238E27FC236}">
+                <a16:creationId xmlns:a16="http://schemas.microsoft.com/office/drawing/2014/main" id="{4F039E53-3587-422B-9AE2-1D40F2887A4C}"/>
               </a:ext>
             </a:extLst>
           </p:cNvPr>
@@ -10014,10 +10838,10 @@
       </p:sp>
       <p:sp>
         <p:nvSpPr>
-          <p:cNvPr id="110" name="NanoMicro · 688690.SH">
-            <a:extLst xmlns:a="http://schemas.openxmlformats.org/drawingml/2006/main">
-              <a:ext uri="{FF2B5EF4-FFF2-40B4-BE49-F238E27FC236}">
-                <a16:creationId xmlns:a16="http://schemas.microsoft.com/office/drawing/2014/main" id="{85E4D165-068E-4EE8-9290-46E82D935158}"/>
+          <p:cNvPr id="113" name="NanoMicro · 688690.SH">
+            <a:extLst xmlns:a="http://schemas.openxmlformats.org/drawingml/2006/main">
+              <a:ext uri="{FF2B5EF4-FFF2-40B4-BE49-F238E27FC236}">
+                <a16:creationId xmlns:a16="http://schemas.microsoft.com/office/drawing/2014/main" id="{34969D6E-D165-4941-AD09-448F0BD9AF9C}"/>
               </a:ext>
             </a:extLst>
           </p:cNvPr>
@@ -10105,10 +10929,10 @@
       </p:sp>
       <p:sp>
         <p:nvSpPr>
-          <p:cNvPr id="111" name="Cytiva · DHR">
-            <a:extLst xmlns:a="http://schemas.openxmlformats.org/drawingml/2006/main">
-              <a:ext uri="{FF2B5EF4-FFF2-40B4-BE49-F238E27FC236}">
-                <a16:creationId xmlns:a16="http://schemas.microsoft.com/office/drawing/2014/main" id="{BAC961D8-AAF8-4602-970D-90B5CADD0F35}"/>
+          <p:cNvPr id="114" name="Cytiva · DHR">
+            <a:extLst xmlns:a="http://schemas.openxmlformats.org/drawingml/2006/main">
+              <a:ext uri="{FF2B5EF4-FFF2-40B4-BE49-F238E27FC236}">
+                <a16:creationId xmlns:a16="http://schemas.microsoft.com/office/drawing/2014/main" id="{5FAF9C94-676A-4E52-B303-3216F9BEDE98}"/>
               </a:ext>
             </a:extLst>
           </p:cNvPr>
@@ -10196,10 +11020,10 @@
       </p:sp>
       <p:sp>
         <p:nvSpPr>
-          <p:cNvPr id="112" name="">
-            <a:extLst xmlns:a="http://schemas.openxmlformats.org/drawingml/2006/main">
-              <a:ext uri="{FF2B5EF4-FFF2-40B4-BE49-F238E27FC236}">
-                <a16:creationId xmlns:a16="http://schemas.microsoft.com/office/drawing/2014/main" id="{B6D2AC1B-A069-4DBE-BD0C-DF7FAE494481}"/>
+          <p:cNvPr id="115" name="">
+            <a:extLst xmlns:a="http://schemas.openxmlformats.org/drawingml/2006/main">
+              <a:ext uri="{FF2B5EF4-FFF2-40B4-BE49-F238E27FC236}">
+                <a16:creationId xmlns:a16="http://schemas.microsoft.com/office/drawing/2014/main" id="{A4840C60-B9E6-44E0-BE47-8353C327E655}"/>
               </a:ext>
             </a:extLst>
           </p:cNvPr>
@@ -10228,10 +11052,10 @@
       </p:sp>
       <p:pic>
         <p:nvPicPr>
-          <p:cNvPr id="113" name="">
-            <a:extLst xmlns:a="http://schemas.openxmlformats.org/drawingml/2006/main">
-              <a:ext uri="{FF2B5EF4-FFF2-40B4-BE49-F238E27FC236}">
-                <a16:creationId xmlns:a16="http://schemas.microsoft.com/office/drawing/2014/main" id="{59BCA910-1980-492D-9F05-79D67DB18D39}"/>
+          <p:cNvPr id="116" name="">
+            <a:extLst xmlns:a="http://schemas.openxmlformats.org/drawingml/2006/main">
+              <a:ext uri="{FF2B5EF4-FFF2-40B4-BE49-F238E27FC236}">
+                <a16:creationId xmlns:a16="http://schemas.microsoft.com/office/drawing/2014/main" id="{C0F8D6B7-1193-4785-B490-3C059CF4777C}"/>
               </a:ext>
             </a:extLst>
           </p:cNvPr>
@@ -10241,10 +11065,10 @@
           <p:nvPr/>
         </p:nvPicPr>
         <p:blipFill>
-          <a:blip xmlns:r="http://schemas.openxmlformats.org/officeDocument/2006/relationships" xmlns:a="http://schemas.openxmlformats.org/drawingml/2006/main" r:embed="Re0ed9db04a504537">
+          <a:blip xmlns:r="http://schemas.openxmlformats.org/officeDocument/2006/relationships" xmlns:a="http://schemas.openxmlformats.org/drawingml/2006/main" r:embed="R0a302ef79ca0495a">
             <a:extLst>
               <a:ext uri="{96DAC541-7B7A-43D3-8B79-37D633B846F1}">
-                <asvg:svgBlip xmlns:asvg="http://schemas.microsoft.com/office/drawing/2016/SVG/main" r:embed="Rc1331c6417824758"/>
+                <asvg:svgBlip xmlns:asvg="http://schemas.microsoft.com/office/drawing/2016/SVG/main" r:embed="R638dcd01b1b94fe1"/>
               </a:ext>
             </a:extLst>
           </a:blip>
@@ -10262,10 +11086,10 @@
       </p:pic>
       <p:sp>
         <p:nvSpPr>
-          <p:cNvPr id="114" name="Automation + data orchestration span every tool family">
-            <a:extLst xmlns:a="http://schemas.openxmlformats.org/drawingml/2006/main">
-              <a:ext uri="{FF2B5EF4-FFF2-40B4-BE49-F238E27FC236}">
-                <a16:creationId xmlns:a16="http://schemas.microsoft.com/office/drawing/2014/main" id="{6C767A39-6E4D-4907-B673-44EE46F53F33}"/>
+          <p:cNvPr id="117" name="Automation + data orchestration span every tool family">
+            <a:extLst xmlns:a="http://schemas.openxmlformats.org/drawingml/2006/main">
+              <a:ext uri="{FF2B5EF4-FFF2-40B4-BE49-F238E27FC236}">
+                <a16:creationId xmlns:a16="http://schemas.microsoft.com/office/drawing/2014/main" id="{6F86D10A-557C-4743-9C64-85E1DF0A1868}"/>
               </a:ext>
             </a:extLst>
           </p:cNvPr>
@@ -10329,10 +11153,10 @@
       </p:sp>
       <p:sp>
         <p:nvSpPr>
-          <p:cNvPr id="115" name="">
-            <a:extLst xmlns:a="http://schemas.openxmlformats.org/drawingml/2006/main">
-              <a:ext uri="{FF2B5EF4-FFF2-40B4-BE49-F238E27FC236}">
-                <a16:creationId xmlns:a16="http://schemas.microsoft.com/office/drawing/2014/main" id="{C81716F4-E31D-4D44-8FD9-F4B638E667B6}"/>
+          <p:cNvPr id="118" name="">
+            <a:extLst xmlns:a="http://schemas.openxmlformats.org/drawingml/2006/main">
+              <a:ext uri="{FF2B5EF4-FFF2-40B4-BE49-F238E27FC236}">
+                <a16:creationId xmlns:a16="http://schemas.microsoft.com/office/drawing/2014/main" id="{3B1CD563-1C4F-492E-B490-12621566818C}"/>
               </a:ext>
             </a:extLst>
           </p:cNvPr>
@@ -10361,10 +11185,10 @@
       </p:sp>
       <p:pic>
         <p:nvPicPr>
-          <p:cNvPr id="116" name="">
-            <a:extLst xmlns:a="http://schemas.openxmlformats.org/drawingml/2006/main">
-              <a:ext uri="{FF2B5EF4-FFF2-40B4-BE49-F238E27FC236}">
-                <a16:creationId xmlns:a16="http://schemas.microsoft.com/office/drawing/2014/main" id="{C4F52D07-4246-431E-83E9-965A837E5093}"/>
+          <p:cNvPr id="119" name="">
+            <a:extLst xmlns:a="http://schemas.openxmlformats.org/drawingml/2006/main">
+              <a:ext uri="{FF2B5EF4-FFF2-40B4-BE49-F238E27FC236}">
+                <a16:creationId xmlns:a16="http://schemas.microsoft.com/office/drawing/2014/main" id="{B6D74D30-090A-4B52-8F39-225D79C7E457}"/>
               </a:ext>
             </a:extLst>
           </p:cNvPr>
@@ -10374,7 +11198,7 @@
           <p:nvPr/>
         </p:nvPicPr>
         <p:blipFill>
-          <a:blip xmlns:r="http://schemas.openxmlformats.org/officeDocument/2006/relationships" xmlns:a="http://schemas.openxmlformats.org/drawingml/2006/main" r:embed="R1cde28844f55469d"/>
+          <a:blip xmlns:r="http://schemas.openxmlformats.org/officeDocument/2006/relationships" xmlns:a="http://schemas.openxmlformats.org/drawingml/2006/main" r:embed="R0b846ef8d6f44472"/>
           <a:stretch xmlns:a="http://schemas.openxmlformats.org/drawingml/2006/main"/>
         </p:blipFill>
         <p:spPr>
@@ -10389,10 +11213,10 @@
       </p:pic>
       <p:sp>
         <p:nvSpPr>
-          <p:cNvPr id="117" name="SIX: TECN">
-            <a:extLst xmlns:a="http://schemas.openxmlformats.org/drawingml/2006/main">
-              <a:ext uri="{FF2B5EF4-FFF2-40B4-BE49-F238E27FC236}">
-                <a16:creationId xmlns:a16="http://schemas.microsoft.com/office/drawing/2014/main" id="{0BA3457F-434F-4147-9807-213038EFABC8}"/>
+          <p:cNvPr id="120" name="SIX: TECN">
+            <a:extLst xmlns:a="http://schemas.openxmlformats.org/drawingml/2006/main">
+              <a:ext uri="{FF2B5EF4-FFF2-40B4-BE49-F238E27FC236}">
+                <a16:creationId xmlns:a16="http://schemas.microsoft.com/office/drawing/2014/main" id="{64E1E1A6-470A-4D42-AB49-2ACF9454FD15}"/>
               </a:ext>
             </a:extLst>
           </p:cNvPr>
@@ -10456,10 +11280,10 @@
       </p:sp>
       <p:sp>
         <p:nvSpPr>
-          <p:cNvPr id="118" name="† Ex-BD biosciences / flow moved to Waters on 9 Feb 2026; BD (BDX) here means specimen collection.">
-            <a:extLst xmlns:a="http://schemas.openxmlformats.org/drawingml/2006/main">
-              <a:ext uri="{FF2B5EF4-FFF2-40B4-BE49-F238E27FC236}">
-                <a16:creationId xmlns:a16="http://schemas.microsoft.com/office/drawing/2014/main" id="{416EF607-3619-493C-8FFD-5AE36EB75A7B}"/>
+          <p:cNvPr id="121" name="† Ex-BD biosciences / flow moved to Waters on 9 Feb 2026; BD (BDX) here means specimen collection.">
+            <a:extLst xmlns:a="http://schemas.openxmlformats.org/drawingml/2006/main">
+              <a:ext uri="{FF2B5EF4-FFF2-40B4-BE49-F238E27FC236}">
+                <a16:creationId xmlns:a16="http://schemas.microsoft.com/office/drawing/2014/main" id="{4F53F274-88FB-47DB-ACA2-C02DE8C576E4}"/>
               </a:ext>
             </a:extLst>
           </p:cNvPr>
@@ -10523,10 +11347,10 @@
       </p:sp>
       <p:sp>
         <p:nvSpPr>
-          <p:cNvPr id="119" name="Groups denote listings, not incorporation; brands use parent tickers. * Source access limited. Sources and ticker register: SOURCES.md.">
-            <a:extLst xmlns:a="http://schemas.openxmlformats.org/drawingml/2006/main">
-              <a:ext uri="{FF2B5EF4-FFF2-40B4-BE49-F238E27FC236}">
-                <a16:creationId xmlns:a16="http://schemas.microsoft.com/office/drawing/2014/main" id="{23399A8B-6E5E-460E-A014-BFDA853C6B5B}"/>
+          <p:cNvPr id="122" name="Protein TAM is issuer-commissioned / disputed. Media &amp; resin TAMs withheld. Sources, scope and tickers: SOURCES.md.">
+            <a:extLst xmlns:a="http://schemas.openxmlformats.org/drawingml/2006/main">
+              <a:ext uri="{FF2B5EF4-FFF2-40B4-BE49-F238E27FC236}">
+                <a16:creationId xmlns:a16="http://schemas.microsoft.com/office/drawing/2014/main" id="{47CF4E5A-6D4D-416D-A6EC-FA89FD282180}"/>
               </a:ext>
             </a:extLst>
           </p:cNvPr>
@@ -10583,7 +11407,7 @@
                 <a:ea typeface="Arial"/>
                 <a:cs typeface="Arial"/>
               </a:rPr>
-              <a:t>Groups denote listings, not incorporation; brands use parent tickers. * Source access limited. Sources and ticker register: SOURCES.md.</a:t>
+              <a:t>Protein TAM is issuer-commissioned / disputed. Media &amp; resin TAMs withheld. Sources, scope and tickers: SOURCES.md.</a:t>
             </a:r>
           </a:p>
         </p:txBody>
@@ -10591,7 +11415,7 @@
     </p:spTree>
     <p:extLst>
       <p:ext uri="{BB962C8B-B14F-4D97-AF65-F5344CB8AC3E}">
-        <p14:creationId xmlns:p14="http://schemas.microsoft.com/office/powerpoint/2010/main" val="1251841564"/>
+        <p14:creationId xmlns:p14="http://schemas.microsoft.com/office/powerpoint/2010/main" val="1334873230"/>
       </p:ext>
     </p:extLst>
   </p:cSld>
